--- a/APG_TrenchVerify_Pitch.pptx
+++ b/APG_TrenchVerify_Pitch.pptx
@@ -14,7 +14,6 @@
     <p:sldId id="262" r:id="rId13"/>
     <p:sldId id="263" r:id="rId14"/>
     <p:sldId id="264" r:id="rId15"/>
-    <p:sldId id="265" r:id="rId16"/>
   </p:sldIdLst>
   <p:sldSz cx="12188952" cy="6858000" type="screen4x3"/>
   <p:notesSz cx="6858000" cy="9144000"/>
@@ -3369,288 +3368,6 @@
 </p:sld>
 </file>
 
-<file path=ppt/slides/slide10.xml><?xml version="1.0" encoding="utf-8"?>
-<p:sld xmlns:a="http://schemas.openxmlformats.org/drawingml/2006/main" xmlns:p="http://schemas.openxmlformats.org/presentationml/2006/main" xmlns:r="http://schemas.openxmlformats.org/officeDocument/2006/relationships">
-  <p:cSld>
-    <p:bg>
-      <p:bgPr>
-        <a:solidFill>
-          <a:srgbClr val="0D1B2A"/>
-        </a:solidFill>
-        <a:effectLst/>
-      </p:bgPr>
-    </p:bg>
-    <p:spTree>
-      <p:nvGrpSpPr>
-        <p:cNvPr id="1" name=""/>
-        <p:cNvGrpSpPr/>
-        <p:nvPr/>
-      </p:nvGrpSpPr>
-      <p:grpSpPr/>
-      <p:sp>
-        <p:nvSpPr>
-          <p:cNvPr id="2" name="Rectangle 1"/>
-          <p:cNvSpPr/>
-          <p:nvPr/>
-        </p:nvSpPr>
-        <p:spPr>
-          <a:xfrm>
-            <a:off x="0" y="0"/>
-            <a:ext cx="12188952" cy="73152"/>
-          </a:xfrm>
-          <a:prstGeom prst="rect">
-            <a:avLst/>
-          </a:prstGeom>
-          <a:solidFill>
-            <a:srgbClr val="00A8E8"/>
-          </a:solidFill>
-          <a:ln>
-            <a:noFill/>
-          </a:ln>
-        </p:spPr>
-        <p:style>
-          <a:lnRef idx="1">
-            <a:schemeClr val="accent1"/>
-          </a:lnRef>
-          <a:fillRef idx="3">
-            <a:schemeClr val="accent1"/>
-          </a:fillRef>
-          <a:effectRef idx="2">
-            <a:schemeClr val="accent1"/>
-          </a:effectRef>
-          <a:fontRef idx="minor">
-            <a:schemeClr val="lt1"/>
-          </a:fontRef>
-        </p:style>
-        <p:txBody>
-          <a:bodyPr rtlCol="0" anchor="ctr"/>
-          <a:lstStyle/>
-          <a:p>
-            <a:pPr algn="ctr"/>
-          </a:p>
-        </p:txBody>
-      </p:sp>
-      <p:sp>
-        <p:nvSpPr>
-          <p:cNvPr id="3" name="Rectangle 2"/>
-          <p:cNvSpPr/>
-          <p:nvPr/>
-        </p:nvSpPr>
-        <p:spPr>
-          <a:xfrm>
-            <a:off x="0" y="6766560"/>
-            <a:ext cx="12188952" cy="73152"/>
-          </a:xfrm>
-          <a:prstGeom prst="rect">
-            <a:avLst/>
-          </a:prstGeom>
-          <a:solidFill>
-            <a:srgbClr val="00D47E"/>
-          </a:solidFill>
-          <a:ln>
-            <a:noFill/>
-          </a:ln>
-        </p:spPr>
-        <p:style>
-          <a:lnRef idx="1">
-            <a:schemeClr val="accent1"/>
-          </a:lnRef>
-          <a:fillRef idx="3">
-            <a:schemeClr val="accent1"/>
-          </a:fillRef>
-          <a:effectRef idx="2">
-            <a:schemeClr val="accent1"/>
-          </a:effectRef>
-          <a:fontRef idx="minor">
-            <a:schemeClr val="lt1"/>
-          </a:fontRef>
-        </p:style>
-        <p:txBody>
-          <a:bodyPr rtlCol="0" anchor="ctr"/>
-          <a:lstStyle/>
-          <a:p>
-            <a:pPr algn="ctr"/>
-          </a:p>
-        </p:txBody>
-      </p:sp>
-      <p:sp>
-        <p:nvSpPr>
-          <p:cNvPr id="4" name="TextBox 3"/>
-          <p:cNvSpPr txBox="1"/>
-          <p:nvPr/>
-        </p:nvSpPr>
-        <p:spPr>
-          <a:xfrm>
-            <a:off x="457200" y="1645920"/>
-            <a:ext cx="11247120" cy="1645920"/>
-          </a:xfrm>
-          <a:prstGeom prst="rect">
-            <a:avLst/>
-          </a:prstGeom>
-          <a:noFill/>
-        </p:spPr>
-        <p:txBody>
-          <a:bodyPr wrap="square">
-            <a:spAutoFit/>
-          </a:bodyPr>
-          <a:lstStyle/>
-          <a:p>
-            <a:pPr algn="ctr"/>
-            <a:r>
-              <a:rPr sz="8000" b="1" i="0">
-                <a:solidFill>
-                  <a:srgbClr val="FFFFFF"/>
-                </a:solidFill>
-              </a:rPr>
-              <a:t>Thank You</a:t>
-            </a:r>
-          </a:p>
-        </p:txBody>
-      </p:sp>
-      <p:sp>
-        <p:nvSpPr>
-          <p:cNvPr id="5" name="TextBox 4"/>
-          <p:cNvSpPr txBox="1"/>
-          <p:nvPr/>
-        </p:nvSpPr>
-        <p:spPr>
-          <a:xfrm>
-            <a:off x="457200" y="3383280"/>
-            <a:ext cx="11247120" cy="640080"/>
-          </a:xfrm>
-          <a:prstGeom prst="rect">
-            <a:avLst/>
-          </a:prstGeom>
-          <a:noFill/>
-        </p:spPr>
-        <p:txBody>
-          <a:bodyPr wrap="square">
-            <a:spAutoFit/>
-          </a:bodyPr>
-          <a:lstStyle/>
-          <a:p>
-            <a:pPr algn="ctr"/>
-            <a:r>
-              <a:rPr sz="3000" b="0" i="0">
-                <a:solidFill>
-                  <a:srgbClr val="00A8E8"/>
-                </a:solidFill>
-              </a:rPr>
-              <a:t>Questions welcome</a:t>
-            </a:r>
-          </a:p>
-        </p:txBody>
-      </p:sp>
-      <p:sp>
-        <p:nvSpPr>
-          <p:cNvPr id="6" name="TextBox 5"/>
-          <p:cNvSpPr txBox="1"/>
-          <p:nvPr/>
-        </p:nvSpPr>
-        <p:spPr>
-          <a:xfrm>
-            <a:off x="457200" y="4206240"/>
-            <a:ext cx="11247120" cy="502920"/>
-          </a:xfrm>
-          <a:prstGeom prst="rect">
-            <a:avLst/>
-          </a:prstGeom>
-          <a:noFill/>
-        </p:spPr>
-        <p:txBody>
-          <a:bodyPr wrap="square">
-            <a:spAutoFit/>
-          </a:bodyPr>
-          <a:lstStyle/>
-          <a:p>
-            <a:pPr algn="ctr"/>
-            <a:r>
-              <a:rPr sz="1600" b="0" i="0">
-                <a:solidFill>
-                  <a:srgbClr val="CCD6E0"/>
-                </a:solidFill>
-              </a:rPr>
-              <a:t>TrenchVerify — From Site Photo to Compliance Audit — Automatically</a:t>
-            </a:r>
-          </a:p>
-        </p:txBody>
-      </p:sp>
-      <p:sp>
-        <p:nvSpPr>
-          <p:cNvPr id="7" name="TextBox 6"/>
-          <p:cNvSpPr txBox="1"/>
-          <p:nvPr/>
-        </p:nvSpPr>
-        <p:spPr>
-          <a:xfrm>
-            <a:off x="457200" y="4754880"/>
-            <a:ext cx="11247120" cy="457200"/>
-          </a:xfrm>
-          <a:prstGeom prst="rect">
-            <a:avLst/>
-          </a:prstGeom>
-          <a:noFill/>
-        </p:spPr>
-        <p:txBody>
-          <a:bodyPr wrap="square">
-            <a:spAutoFit/>
-          </a:bodyPr>
-          <a:lstStyle/>
-          <a:p>
-            <a:pPr algn="ctr"/>
-            <a:r>
-              <a:rPr sz="1500" b="0" i="0">
-                <a:solidFill>
-                  <a:srgbClr val="CCD6E0"/>
-                </a:solidFill>
-              </a:rPr>
-              <a:t>Team: [Name 1]  ·  [Name 2]  ·  [Name 3]</a:t>
-            </a:r>
-          </a:p>
-        </p:txBody>
-      </p:sp>
-      <p:sp>
-        <p:nvSpPr>
-          <p:cNvPr id="8" name="TextBox 7"/>
-          <p:cNvSpPr txBox="1"/>
-          <p:nvPr/>
-        </p:nvSpPr>
-        <p:spPr>
-          <a:xfrm>
-            <a:off x="457200" y="5989320"/>
-            <a:ext cx="11247120" cy="365760"/>
-          </a:xfrm>
-          <a:prstGeom prst="rect">
-            <a:avLst/>
-          </a:prstGeom>
-          <a:noFill/>
-        </p:spPr>
-        <p:txBody>
-          <a:bodyPr wrap="square">
-            <a:spAutoFit/>
-          </a:bodyPr>
-          <a:lstStyle/>
-          <a:p>
-            <a:pPr algn="ctr"/>
-            <a:r>
-              <a:rPr sz="1100" b="0" i="1">
-                <a:solidFill>
-                  <a:srgbClr val="445566"/>
-                </a:solidFill>
-              </a:rPr>
-              <a:t>Built at Vienna UP 2026  ·  All pilot data from APG partner dataset</a:t>
-            </a:r>
-          </a:p>
-        </p:txBody>
-      </p:sp>
-    </p:spTree>
-  </p:cSld>
-  <p:clrMapOvr>
-    <a:masterClrMapping/>
-  </p:clrMapOvr>
-</p:sld>
-</file>
-
 <file path=ppt/slides/slide2.xml><?xml version="1.0" encoding="utf-8"?>
 <p:sld xmlns:a="http://schemas.openxmlformats.org/drawingml/2006/main" xmlns:p="http://schemas.openxmlformats.org/presentationml/2006/main" xmlns:r="http://schemas.openxmlformats.org/officeDocument/2006/relationships">
   <p:cSld>
@@ -6302,9 +6019,9 @@
                   <a:srgbClr val="CCD6E0"/>
                 </a:solidFill>
               </a:rPr>
-              <a:t>8 compliance checks
+              <a:t>6 compliance checks
 per photo via
-Claude vision model</a:t>
+AI vision model</a:t>
             </a:r>
           </a:p>
         </p:txBody>
@@ -6974,7 +6691,7 @@
                   <a:srgbClr val="CCD6E0"/>
                 </a:solidFill>
               </a:rPr>
-              <a:t>CSV + HTML report
+              <a:t>CSV + PDF report
 downloaded; full
 per-meter log exported</a:t>
             </a:r>
@@ -7010,7 +6727,7 @@
                   <a:srgbClr val="445566"/>
                 </a:solidFill>
               </a:rPr>
-              <a:t>8 checks: warning tape · sand bedding · side-view angle · depth reference · sealed cable ends · GDPR (faces/plates) · duplicate detection · GPS↔address match</a:t>
+              <a:t>6 checks: warning tape · sand bedding · side-view angle · depth reference · sealed cable ends · GDPR (faces/plates)</a:t>
             </a:r>
           </a:p>
         </p:txBody>
@@ -7133,6 +6850,315 @@
             <a:avLst/>
           </a:prstGeom>
           <a:solidFill>
+            <a:srgbClr val="00D47E"/>
+          </a:solidFill>
+          <a:ln>
+            <a:noFill/>
+          </a:ln>
+        </p:spPr>
+        <p:style>
+          <a:lnRef idx="1">
+            <a:schemeClr val="accent1"/>
+          </a:lnRef>
+          <a:fillRef idx="3">
+            <a:schemeClr val="accent1"/>
+          </a:fillRef>
+          <a:effectRef idx="2">
+            <a:schemeClr val="accent1"/>
+          </a:effectRef>
+          <a:fontRef idx="minor">
+            <a:schemeClr val="lt1"/>
+          </a:fontRef>
+        </p:style>
+        <p:txBody>
+          <a:bodyPr rtlCol="0" anchor="ctr"/>
+          <a:lstStyle/>
+          <a:p>
+            <a:pPr algn="ctr"/>
+          </a:p>
+        </p:txBody>
+      </p:sp>
+      <p:sp>
+        <p:nvSpPr>
+          <p:cNvPr id="3" name="TextBox 2"/>
+          <p:cNvSpPr txBox="1"/>
+          <p:nvPr/>
+        </p:nvSpPr>
+        <p:spPr>
+          <a:xfrm>
+            <a:off x="457200" y="228600"/>
+            <a:ext cx="10972800" cy="365760"/>
+          </a:xfrm>
+          <a:prstGeom prst="rect">
+            <a:avLst/>
+          </a:prstGeom>
+          <a:noFill/>
+        </p:spPr>
+        <p:txBody>
+          <a:bodyPr wrap="square">
+            <a:spAutoFit/>
+          </a:bodyPr>
+          <a:lstStyle/>
+          <a:p>
+            <a:pPr algn="l"/>
+            <a:r>
+              <a:rPr sz="900" b="1" i="0">
+                <a:solidFill>
+                  <a:srgbClr val="00A8E8"/>
+                </a:solidFill>
+              </a:rPr>
+              <a:t>COMPLIANCE &amp; GDPR</a:t>
+            </a:r>
+          </a:p>
+        </p:txBody>
+      </p:sp>
+      <p:sp>
+        <p:nvSpPr>
+          <p:cNvPr id="4" name="TextBox 3"/>
+          <p:cNvSpPr txBox="1"/>
+          <p:nvPr/>
+        </p:nvSpPr>
+        <p:spPr>
+          <a:xfrm>
+            <a:off x="457200" y="502920"/>
+            <a:ext cx="10972800" cy="640080"/>
+          </a:xfrm>
+          <a:prstGeom prst="rect">
+            <a:avLst/>
+          </a:prstGeom>
+          <a:noFill/>
+        </p:spPr>
+        <p:txBody>
+          <a:bodyPr wrap="square">
+            <a:spAutoFit/>
+          </a:bodyPr>
+          <a:lstStyle/>
+          <a:p>
+            <a:pPr algn="l"/>
+            <a:r>
+              <a:rPr sz="3200" b="1" i="0">
+                <a:solidFill>
+                  <a:srgbClr val="FFFFFF"/>
+                </a:solidFill>
+              </a:rPr>
+              <a:t>Compliance Report: What APG Receives</a:t>
+            </a:r>
+          </a:p>
+        </p:txBody>
+      </p:sp>
+      <p:sp>
+        <p:nvSpPr>
+          <p:cNvPr id="5" name="Rectangle 4"/>
+          <p:cNvSpPr/>
+          <p:nvPr/>
+        </p:nvSpPr>
+        <p:spPr>
+          <a:xfrm>
+            <a:off x="365760" y="1371600"/>
+            <a:ext cx="5303520" cy="2286000"/>
+          </a:xfrm>
+          <a:prstGeom prst="rect">
+            <a:avLst/>
+          </a:prstGeom>
+          <a:solidFill>
+            <a:srgbClr val="122636"/>
+          </a:solidFill>
+          <a:ln>
+            <a:noFill/>
+          </a:ln>
+        </p:spPr>
+        <p:style>
+          <a:lnRef idx="1">
+            <a:schemeClr val="accent1"/>
+          </a:lnRef>
+          <a:fillRef idx="3">
+            <a:schemeClr val="accent1"/>
+          </a:fillRef>
+          <a:effectRef idx="2">
+            <a:schemeClr val="accent1"/>
+          </a:effectRef>
+          <a:fontRef idx="minor">
+            <a:schemeClr val="lt1"/>
+          </a:fontRef>
+        </p:style>
+        <p:txBody>
+          <a:bodyPr rtlCol="0" anchor="ctr"/>
+          <a:lstStyle/>
+          <a:p>
+            <a:pPr algn="ctr"/>
+          </a:p>
+        </p:txBody>
+      </p:sp>
+      <p:sp>
+        <p:nvSpPr>
+          <p:cNvPr id="6" name="Rectangle 5"/>
+          <p:cNvSpPr/>
+          <p:nvPr/>
+        </p:nvSpPr>
+        <p:spPr>
+          <a:xfrm>
+            <a:off x="365760" y="1371600"/>
+            <a:ext cx="5303520" cy="91440"/>
+          </a:xfrm>
+          <a:prstGeom prst="rect">
+            <a:avLst/>
+          </a:prstGeom>
+          <a:solidFill>
+            <a:srgbClr val="00D47E"/>
+          </a:solidFill>
+          <a:ln>
+            <a:noFill/>
+          </a:ln>
+        </p:spPr>
+        <p:style>
+          <a:lnRef idx="1">
+            <a:schemeClr val="accent1"/>
+          </a:lnRef>
+          <a:fillRef idx="3">
+            <a:schemeClr val="accent1"/>
+          </a:fillRef>
+          <a:effectRef idx="2">
+            <a:schemeClr val="accent1"/>
+          </a:effectRef>
+          <a:fontRef idx="minor">
+            <a:schemeClr val="lt1"/>
+          </a:fontRef>
+        </p:style>
+        <p:txBody>
+          <a:bodyPr rtlCol="0" anchor="ctr"/>
+          <a:lstStyle/>
+          <a:p>
+            <a:pPr algn="ctr"/>
+          </a:p>
+        </p:txBody>
+      </p:sp>
+      <p:sp>
+        <p:nvSpPr>
+          <p:cNvPr id="7" name="TextBox 6"/>
+          <p:cNvSpPr txBox="1"/>
+          <p:nvPr/>
+        </p:nvSpPr>
+        <p:spPr>
+          <a:xfrm>
+            <a:off x="548640" y="1508760"/>
+            <a:ext cx="4937760" cy="685800"/>
+          </a:xfrm>
+          <a:prstGeom prst="rect">
+            <a:avLst/>
+          </a:prstGeom>
+          <a:noFill/>
+        </p:spPr>
+        <p:txBody>
+          <a:bodyPr wrap="square">
+            <a:spAutoFit/>
+          </a:bodyPr>
+          <a:lstStyle/>
+          <a:p>
+            <a:pPr algn="l"/>
+            <a:r>
+              <a:rPr sz="1700" b="1" i="0">
+                <a:solidFill>
+                  <a:srgbClr val="00D47E"/>
+                </a:solidFill>
+              </a:rPr>
+              <a:t>GDPR / NIS2
+Compliant</a:t>
+            </a:r>
+          </a:p>
+        </p:txBody>
+      </p:sp>
+      <p:sp>
+        <p:nvSpPr>
+          <p:cNvPr id="8" name="TextBox 7"/>
+          <p:cNvSpPr txBox="1"/>
+          <p:nvPr/>
+        </p:nvSpPr>
+        <p:spPr>
+          <a:xfrm>
+            <a:off x="548640" y="2240280"/>
+            <a:ext cx="4937760" cy="1280160"/>
+          </a:xfrm>
+          <a:prstGeom prst="rect">
+            <a:avLst/>
+          </a:prstGeom>
+          <a:noFill/>
+        </p:spPr>
+        <p:txBody>
+          <a:bodyPr wrap="square">
+            <a:spAutoFit/>
+          </a:bodyPr>
+          <a:lstStyle/>
+          <a:p>
+            <a:pPr algn="l"/>
+            <a:r>
+              <a:rPr sz="1800" b="0" i="0">
+                <a:solidFill>
+                  <a:srgbClr val="CCD6E0"/>
+                </a:solidFill>
+              </a:rPr>
+              <a:t>Faces and license plates detected in every photo before any reviewer sees them. Flagged images are withheld from the display grid and routed to a "needs retake" list. No personal data is ever shown, stored, or transmitted to our infrastructure.</a:t>
+            </a:r>
+          </a:p>
+        </p:txBody>
+      </p:sp>
+      <p:sp>
+        <p:nvSpPr>
+          <p:cNvPr id="9" name="Rectangle 8"/>
+          <p:cNvSpPr/>
+          <p:nvPr/>
+        </p:nvSpPr>
+        <p:spPr>
+          <a:xfrm>
+            <a:off x="6309360" y="1371600"/>
+            <a:ext cx="5303520" cy="2286000"/>
+          </a:xfrm>
+          <a:prstGeom prst="rect">
+            <a:avLst/>
+          </a:prstGeom>
+          <a:solidFill>
+            <a:srgbClr val="122636"/>
+          </a:solidFill>
+          <a:ln>
+            <a:noFill/>
+          </a:ln>
+        </p:spPr>
+        <p:style>
+          <a:lnRef idx="1">
+            <a:schemeClr val="accent1"/>
+          </a:lnRef>
+          <a:fillRef idx="3">
+            <a:schemeClr val="accent1"/>
+          </a:fillRef>
+          <a:effectRef idx="2">
+            <a:schemeClr val="accent1"/>
+          </a:effectRef>
+          <a:fontRef idx="minor">
+            <a:schemeClr val="lt1"/>
+          </a:fontRef>
+        </p:style>
+        <p:txBody>
+          <a:bodyPr rtlCol="0" anchor="ctr"/>
+          <a:lstStyle/>
+          <a:p>
+            <a:pPr algn="ctr"/>
+          </a:p>
+        </p:txBody>
+      </p:sp>
+      <p:sp>
+        <p:nvSpPr>
+          <p:cNvPr id="10" name="Rectangle 9"/>
+          <p:cNvSpPr/>
+          <p:nvPr/>
+        </p:nvSpPr>
+        <p:spPr>
+          <a:xfrm>
+            <a:off x="6309360" y="1371600"/>
+            <a:ext cx="5303520" cy="91440"/>
+          </a:xfrm>
+          <a:prstGeom prst="rect">
+            <a:avLst/>
+          </a:prstGeom>
+          <a:solidFill>
             <a:srgbClr val="00A8E8"/>
           </a:solidFill>
           <a:ln>
@@ -7163,14 +7189,14 @@
       </p:sp>
       <p:sp>
         <p:nvSpPr>
-          <p:cNvPr id="3" name="TextBox 2"/>
-          <p:cNvSpPr txBox="1"/>
-          <p:nvPr/>
-        </p:nvSpPr>
-        <p:spPr>
-          <a:xfrm>
-            <a:off x="457200" y="228600"/>
-            <a:ext cx="10972800" cy="365760"/>
+          <p:cNvPr id="11" name="TextBox 10"/>
+          <p:cNvSpPr txBox="1"/>
+          <p:nvPr/>
+        </p:nvSpPr>
+        <p:spPr>
+          <a:xfrm>
+            <a:off x="6492240" y="1508760"/>
+            <a:ext cx="4937760" cy="685800"/>
           </a:xfrm>
           <a:prstGeom prst="rect">
             <a:avLst/>
@@ -7185,26 +7211,27 @@
           <a:p>
             <a:pPr algn="l"/>
             <a:r>
-              <a:rPr sz="900" b="1" i="0">
+              <a:rPr sz="1700" b="1" i="0">
                 <a:solidFill>
                   <a:srgbClr val="00A8E8"/>
                 </a:solidFill>
               </a:rPr>
-              <a:t>ARCHITECTURE</a:t>
-            </a:r>
-          </a:p>
-        </p:txBody>
-      </p:sp>
-      <p:sp>
-        <p:nvSpPr>
-          <p:cNvPr id="4" name="TextBox 3"/>
-          <p:cNvSpPr txBox="1"/>
-          <p:nvPr/>
-        </p:nvSpPr>
-        <p:spPr>
-          <a:xfrm>
-            <a:off x="457200" y="502920"/>
-            <a:ext cx="10972800" cy="640080"/>
+              <a:t>Zero Data
+Retention</a:t>
+            </a:r>
+          </a:p>
+        </p:txBody>
+      </p:sp>
+      <p:sp>
+        <p:nvSpPr>
+          <p:cNvPr id="12" name="TextBox 11"/>
+          <p:cNvSpPr txBox="1"/>
+          <p:nvPr/>
+        </p:nvSpPr>
+        <p:spPr>
+          <a:xfrm>
+            <a:off x="6492240" y="2240280"/>
+            <a:ext cx="4937760" cy="1280160"/>
           </a:xfrm>
           <a:prstGeom prst="rect">
             <a:avLst/>
@@ -7219,32 +7246,32 @@
           <a:p>
             <a:pPr algn="l"/>
             <a:r>
-              <a:rPr sz="3200" b="1" i="0">
-                <a:solidFill>
-                  <a:srgbClr val="FFFFFF"/>
-                </a:solidFill>
-              </a:rPr>
-              <a:t>Two Screens. One Pipeline. Zero Data Retained.</a:t>
-            </a:r>
-          </a:p>
-        </p:txBody>
-      </p:sp>
-      <p:sp>
-        <p:nvSpPr>
-          <p:cNvPr id="5" name="Rectangle 4"/>
+              <a:rPr sz="1800" b="0" i="0">
+                <a:solidFill>
+                  <a:srgbClr val="CCD6E0"/>
+                </a:solidFill>
+              </a:rPr>
+              <a:t>Photos are processed transiently — held in memory for the duration of the AI call, then released. Nothing is persisted on our servers. All results (scores, logs) are written exclusively to the customer's own database.</a:t>
+            </a:r>
+          </a:p>
+        </p:txBody>
+      </p:sp>
+      <p:sp>
+        <p:nvSpPr>
+          <p:cNvPr id="13" name="Rectangle 12"/>
           <p:cNvSpPr/>
           <p:nvPr/>
         </p:nvSpPr>
         <p:spPr>
           <a:xfrm>
-            <a:off x="365760" y="1371600"/>
-            <a:ext cx="5029200" cy="4846320"/>
+            <a:off x="365760" y="3840480"/>
+            <a:ext cx="5303520" cy="2286000"/>
           </a:xfrm>
           <a:prstGeom prst="rect">
             <a:avLst/>
           </a:prstGeom>
           <a:solidFill>
-            <a:srgbClr val="0C2A1A"/>
+            <a:srgbClr val="122636"/>
           </a:solidFill>
           <a:ln>
             <a:noFill/>
@@ -7274,190 +7301,20 @@
       </p:sp>
       <p:sp>
         <p:nvSpPr>
-          <p:cNvPr id="6" name="TextBox 5"/>
-          <p:cNvSpPr txBox="1"/>
-          <p:nvPr/>
-        </p:nvSpPr>
-        <p:spPr>
-          <a:xfrm>
-            <a:off x="457200" y="1463040"/>
-            <a:ext cx="4846320" cy="457200"/>
-          </a:xfrm>
-          <a:prstGeom prst="rect">
-            <a:avLst/>
-          </a:prstGeom>
-          <a:noFill/>
-        </p:spPr>
-        <p:txBody>
-          <a:bodyPr wrap="square">
-            <a:spAutoFit/>
-          </a:bodyPr>
-          <a:lstStyle/>
-          <a:p>
-            <a:pPr algn="l"/>
-            <a:r>
-              <a:rPr sz="1300" b="1" i="0">
-                <a:solidFill>
-                  <a:srgbClr val="00D47E"/>
-                </a:solidFill>
-              </a:rPr>
-              <a:t>OPERATOR SCREEN  (on-site)</a:t>
-            </a:r>
-          </a:p>
-        </p:txBody>
-      </p:sp>
-      <p:sp>
-        <p:nvSpPr>
-          <p:cNvPr id="7" name="TextBox 6"/>
-          <p:cNvSpPr txBox="1"/>
-          <p:nvPr/>
-        </p:nvSpPr>
-        <p:spPr>
-          <a:xfrm>
-            <a:off x="548640" y="1965960"/>
-            <a:ext cx="4663440" cy="594360"/>
-          </a:xfrm>
-          <a:prstGeom prst="rect">
-            <a:avLst/>
-          </a:prstGeom>
-          <a:noFill/>
-        </p:spPr>
-        <p:txBody>
-          <a:bodyPr wrap="square">
-            <a:spAutoFit/>
-          </a:bodyPr>
-          <a:lstStyle/>
-          <a:p>
-            <a:pPr algn="l"/>
-            <a:r>
-              <a:rPr sz="1600" b="0" i="0">
-                <a:solidFill>
-                  <a:srgbClr val="FFFFFF"/>
-                </a:solidFill>
-              </a:rPr>
-              <a:t>• Upload photos from site tablet</a:t>
-            </a:r>
-          </a:p>
-        </p:txBody>
-      </p:sp>
-      <p:sp>
-        <p:nvSpPr>
-          <p:cNvPr id="8" name="TextBox 7"/>
-          <p:cNvSpPr txBox="1"/>
-          <p:nvPr/>
-        </p:nvSpPr>
-        <p:spPr>
-          <a:xfrm>
-            <a:off x="548640" y="2651760"/>
-            <a:ext cx="4663440" cy="594360"/>
-          </a:xfrm>
-          <a:prstGeom prst="rect">
-            <a:avLst/>
-          </a:prstGeom>
-          <a:noFill/>
-        </p:spPr>
-        <p:txBody>
-          <a:bodyPr wrap="square">
-            <a:spAutoFit/>
-          </a:bodyPr>
-          <a:lstStyle/>
-          <a:p>
-            <a:pPr algn="l"/>
-            <a:r>
-              <a:rPr sz="1600" b="0" i="0">
-                <a:solidFill>
-                  <a:srgbClr val="FFFFFF"/>
-                </a:solidFill>
-              </a:rPr>
-              <a:t>• Instant per-photo feedback</a:t>
-            </a:r>
-          </a:p>
-        </p:txBody>
-      </p:sp>
-      <p:sp>
-        <p:nvSpPr>
-          <p:cNvPr id="9" name="TextBox 8"/>
-          <p:cNvSpPr txBox="1"/>
-          <p:nvPr/>
-        </p:nvSpPr>
-        <p:spPr>
-          <a:xfrm>
-            <a:off x="548640" y="3337560"/>
-            <a:ext cx="4663440" cy="594360"/>
-          </a:xfrm>
-          <a:prstGeom prst="rect">
-            <a:avLst/>
-          </a:prstGeom>
-          <a:noFill/>
-        </p:spPr>
-        <p:txBody>
-          <a:bodyPr wrap="square">
-            <a:spAutoFit/>
-          </a:bodyPr>
-          <a:lstStyle/>
-          <a:p>
-            <a:pPr algn="l"/>
-            <a:r>
-              <a:rPr sz="1600" b="0" i="0">
-                <a:solidFill>
-                  <a:srgbClr val="FFFFFF"/>
-                </a:solidFill>
-              </a:rPr>
-              <a:t>• "Missing sand photo — retake now"</a:t>
-            </a:r>
-          </a:p>
-        </p:txBody>
-      </p:sp>
-      <p:sp>
-        <p:nvSpPr>
-          <p:cNvPr id="10" name="TextBox 9"/>
-          <p:cNvSpPr txBox="1"/>
-          <p:nvPr/>
-        </p:nvSpPr>
-        <p:spPr>
-          <a:xfrm>
-            <a:off x="548640" y="4023360"/>
-            <a:ext cx="4663440" cy="594360"/>
-          </a:xfrm>
-          <a:prstGeom prst="rect">
-            <a:avLst/>
-          </a:prstGeom>
-          <a:noFill/>
-        </p:spPr>
-        <p:txBody>
-          <a:bodyPr wrap="square">
-            <a:spAutoFit/>
-          </a:bodyPr>
-          <a:lstStyle/>
-          <a:p>
-            <a:pPr algn="l"/>
-            <a:r>
-              <a:rPr sz="1600" b="0" i="0">
-                <a:solidFill>
-                  <a:srgbClr val="FFFFFF"/>
-                </a:solidFill>
-              </a:rPr>
-              <a:t>• Catches gaps while trench is open</a:t>
-            </a:r>
-          </a:p>
-        </p:txBody>
-      </p:sp>
-      <p:sp>
-        <p:nvSpPr>
-          <p:cNvPr id="11" name="Rectangle 10"/>
+          <p:cNvPr id="14" name="Rectangle 13"/>
           <p:cNvSpPr/>
           <p:nvPr/>
         </p:nvSpPr>
         <p:spPr>
           <a:xfrm>
-            <a:off x="6492240" y="1371600"/>
-            <a:ext cx="5303520" cy="4846320"/>
+            <a:off x="365760" y="3840480"/>
+            <a:ext cx="5303520" cy="91440"/>
           </a:xfrm>
           <a:prstGeom prst="rect">
             <a:avLst/>
           </a:prstGeom>
           <a:solidFill>
-            <a:srgbClr val="0C1A2E"/>
+            <a:srgbClr val="FFC107"/>
           </a:solidFill>
           <a:ln>
             <a:noFill/>
@@ -7487,14 +7344,14 @@
       </p:sp>
       <p:sp>
         <p:nvSpPr>
-          <p:cNvPr id="12" name="TextBox 11"/>
-          <p:cNvSpPr txBox="1"/>
-          <p:nvPr/>
-        </p:nvSpPr>
-        <p:spPr>
-          <a:xfrm>
-            <a:off x="6583680" y="1463040"/>
-            <a:ext cx="5120640" cy="457200"/>
+          <p:cNvPr id="15" name="TextBox 14"/>
+          <p:cNvSpPr txBox="1"/>
+          <p:nvPr/>
+        </p:nvSpPr>
+        <p:spPr>
+          <a:xfrm>
+            <a:off x="548640" y="3977640"/>
+            <a:ext cx="4937760" cy="685800"/>
           </a:xfrm>
           <a:prstGeom prst="rect">
             <a:avLst/>
@@ -7509,26 +7366,27 @@
           <a:p>
             <a:pPr algn="l"/>
             <a:r>
-              <a:rPr sz="1300" b="1" i="0">
-                <a:solidFill>
-                  <a:srgbClr val="00A8E8"/>
-                </a:solidFill>
-              </a:rPr>
-              <a:t>REVIEWER DASHBOARD  (APG office)</a:t>
-            </a:r>
-          </a:p>
-        </p:txBody>
-      </p:sp>
-      <p:sp>
-        <p:nvSpPr>
-          <p:cNvPr id="13" name="TextBox 12"/>
-          <p:cNvSpPr txBox="1"/>
-          <p:nvPr/>
-        </p:nvSpPr>
-        <p:spPr>
-          <a:xfrm>
-            <a:off x="6675120" y="1965960"/>
-            <a:ext cx="4937760" cy="594360"/>
+              <a:rPr sz="1700" b="1" i="0">
+                <a:solidFill>
+                  <a:srgbClr val="FFC107"/>
+                </a:solidFill>
+              </a:rPr>
+              <a:t>Full Audit
+Trail</a:t>
+            </a:r>
+          </a:p>
+        </p:txBody>
+      </p:sp>
+      <p:sp>
+        <p:nvSpPr>
+          <p:cNvPr id="16" name="TextBox 15"/>
+          <p:cNvSpPr txBox="1"/>
+          <p:nvPr/>
+        </p:nvSpPr>
+        <p:spPr>
+          <a:xfrm>
+            <a:off x="548640" y="4709160"/>
+            <a:ext cx="4937760" cy="1280160"/>
           </a:xfrm>
           <a:prstGeom prst="rect">
             <a:avLst/>
@@ -7543,203 +7401,32 @@
           <a:p>
             <a:pPr algn="l"/>
             <a:r>
-              <a:rPr sz="1600" b="0" i="0">
-                <a:solidFill>
-                  <a:srgbClr val="FFFFFF"/>
-                </a:solidFill>
-              </a:rPr>
-              <a:t>• AI runs once at upload — results stored, zero re-processing per session</a:t>
-            </a:r>
-          </a:p>
-        </p:txBody>
-      </p:sp>
-      <p:sp>
-        <p:nvSpPr>
-          <p:cNvPr id="14" name="TextBox 13"/>
-          <p:cNvSpPr txBox="1"/>
-          <p:nvPr/>
-        </p:nvSpPr>
-        <p:spPr>
-          <a:xfrm>
-            <a:off x="6675120" y="2651760"/>
-            <a:ext cx="4937760" cy="594360"/>
-          </a:xfrm>
-          <a:prstGeom prst="rect">
-            <a:avLst/>
-          </a:prstGeom>
-          <a:noFill/>
-        </p:spPr>
-        <p:txBody>
-          <a:bodyPr wrap="square">
-            <a:spAutoFit/>
-          </a:bodyPr>
-          <a:lstStyle/>
-          <a:p>
-            <a:pPr algn="l"/>
-            <a:r>
-              <a:rPr sz="1600" b="0" i="0">
-                <a:solidFill>
-                  <a:srgbClr val="FFFFFF"/>
-                </a:solidFill>
-              </a:rPr>
-              <a:t>• Color map: click any red segment</a:t>
-            </a:r>
-          </a:p>
-        </p:txBody>
-      </p:sp>
-      <p:sp>
-        <p:nvSpPr>
-          <p:cNvPr id="15" name="TextBox 14"/>
-          <p:cNvSpPr txBox="1"/>
-          <p:nvPr/>
-        </p:nvSpPr>
-        <p:spPr>
-          <a:xfrm>
-            <a:off x="6675120" y="3337560"/>
-            <a:ext cx="4937760" cy="594360"/>
-          </a:xfrm>
-          <a:prstGeom prst="rect">
-            <a:avLst/>
-          </a:prstGeom>
-          <a:noFill/>
-        </p:spPr>
-        <p:txBody>
-          <a:bodyPr wrap="square">
-            <a:spAutoFit/>
-          </a:bodyPr>
-          <a:lstStyle/>
-          <a:p>
-            <a:pPr algn="l"/>
-            <a:r>
-              <a:rPr sz="1600" b="0" i="0">
-                <a:solidFill>
-                  <a:srgbClr val="FFFFFF"/>
-                </a:solidFill>
-              </a:rPr>
-              <a:t>• View evidence photos + check results</a:t>
-            </a:r>
-          </a:p>
-        </p:txBody>
-      </p:sp>
-      <p:sp>
-        <p:nvSpPr>
-          <p:cNvPr id="16" name="TextBox 15"/>
-          <p:cNvSpPr txBox="1"/>
-          <p:nvPr/>
-        </p:nvSpPr>
-        <p:spPr>
-          <a:xfrm>
-            <a:off x="6675120" y="4023360"/>
-            <a:ext cx="4937760" cy="594360"/>
-          </a:xfrm>
-          <a:prstGeom prst="rect">
-            <a:avLst/>
-          </a:prstGeom>
-          <a:noFill/>
-        </p:spPr>
-        <p:txBody>
-          <a:bodyPr wrap="square">
-            <a:spAutoFit/>
-          </a:bodyPr>
-          <a:lstStyle/>
-          <a:p>
-            <a:pPr algn="l"/>
-            <a:r>
-              <a:rPr sz="1600" b="0" i="0">
-                <a:solidFill>
-                  <a:srgbClr val="FFFFFF"/>
-                </a:solidFill>
-              </a:rPr>
-              <a:t>• Download audit CSV / HTML report</a:t>
-            </a:r>
-          </a:p>
-        </p:txBody>
-      </p:sp>
-      <p:sp>
-        <p:nvSpPr>
-          <p:cNvPr id="17" name="TextBox 16"/>
-          <p:cNvSpPr txBox="1"/>
-          <p:nvPr/>
-        </p:nvSpPr>
-        <p:spPr>
-          <a:xfrm>
-            <a:off x="5440680" y="2834640"/>
-            <a:ext cx="1097280" cy="548640"/>
-          </a:xfrm>
-          <a:prstGeom prst="rect">
-            <a:avLst/>
-          </a:prstGeom>
-          <a:noFill/>
-        </p:spPr>
-        <p:txBody>
-          <a:bodyPr wrap="square">
-            <a:spAutoFit/>
-          </a:bodyPr>
-          <a:lstStyle/>
-          <a:p>
-            <a:pPr algn="ctr"/>
-            <a:r>
-              <a:rPr sz="3000" b="1" i="0">
-                <a:solidFill>
-                  <a:srgbClr val="00A8E8"/>
-                </a:solidFill>
-              </a:rPr>
-              <a:t>⟷</a:t>
-            </a:r>
-          </a:p>
-        </p:txBody>
-      </p:sp>
-      <p:sp>
-        <p:nvSpPr>
-          <p:cNvPr id="18" name="TextBox 17"/>
-          <p:cNvSpPr txBox="1"/>
-          <p:nvPr/>
-        </p:nvSpPr>
-        <p:spPr>
-          <a:xfrm>
-            <a:off x="5257800" y="3429000"/>
-            <a:ext cx="1463040" cy="502920"/>
-          </a:xfrm>
-          <a:prstGeom prst="rect">
-            <a:avLst/>
-          </a:prstGeom>
-          <a:noFill/>
-        </p:spPr>
-        <p:txBody>
-          <a:bodyPr wrap="square">
-            <a:spAutoFit/>
-          </a:bodyPr>
-          <a:lstStyle/>
-          <a:p>
-            <a:pPr algn="ctr"/>
-            <a:r>
-              <a:rPr sz="1000" b="0" i="0">
+              <a:rPr sz="1800" b="0" i="0">
                 <a:solidFill>
                   <a:srgbClr val="CCD6E0"/>
                 </a:solidFill>
               </a:rPr>
-              <a:t>One platform
-two entry points</a:t>
-            </a:r>
-          </a:p>
-        </p:txBody>
-      </p:sp>
-      <p:sp>
-        <p:nvSpPr>
-          <p:cNvPr id="19" name="Rectangle 18"/>
+              <a:t>Every check result is logged with: photo ID · trench segment · GPS coordinates · timestamp · pass/fail per check. The export is a court-admissible evidence trail, not just a summary report.</a:t>
+            </a:r>
+          </a:p>
+        </p:txBody>
+      </p:sp>
+      <p:sp>
+        <p:nvSpPr>
+          <p:cNvPr id="17" name="Rectangle 16"/>
           <p:cNvSpPr/>
           <p:nvPr/>
         </p:nvSpPr>
         <p:spPr>
           <a:xfrm>
-            <a:off x="365760" y="6263640"/>
-            <a:ext cx="11430000" cy="457200"/>
+            <a:off x="6309360" y="3840480"/>
+            <a:ext cx="5303520" cy="2286000"/>
           </a:xfrm>
           <a:prstGeom prst="rect">
             <a:avLst/>
           </a:prstGeom>
           <a:solidFill>
-            <a:srgbClr val="1A1A1A"/>
+            <a:srgbClr val="122636"/>
           </a:solidFill>
           <a:ln>
             <a:noFill/>
@@ -7769,14 +7456,92 @@
       </p:sp>
       <p:sp>
         <p:nvSpPr>
+          <p:cNvPr id="18" name="Rectangle 17"/>
+          <p:cNvSpPr/>
+          <p:nvPr/>
+        </p:nvSpPr>
+        <p:spPr>
+          <a:xfrm>
+            <a:off x="6309360" y="3840480"/>
+            <a:ext cx="5303520" cy="91440"/>
+          </a:xfrm>
+          <a:prstGeom prst="rect">
+            <a:avLst/>
+          </a:prstGeom>
+          <a:solidFill>
+            <a:srgbClr val="FFFFFF"/>
+          </a:solidFill>
+          <a:ln>
+            <a:noFill/>
+          </a:ln>
+        </p:spPr>
+        <p:style>
+          <a:lnRef idx="1">
+            <a:schemeClr val="accent1"/>
+          </a:lnRef>
+          <a:fillRef idx="3">
+            <a:schemeClr val="accent1"/>
+          </a:fillRef>
+          <a:effectRef idx="2">
+            <a:schemeClr val="accent1"/>
+          </a:effectRef>
+          <a:fontRef idx="minor">
+            <a:schemeClr val="lt1"/>
+          </a:fontRef>
+        </p:style>
+        <p:txBody>
+          <a:bodyPr rtlCol="0" anchor="ctr"/>
+          <a:lstStyle/>
+          <a:p>
+            <a:pPr algn="ctr"/>
+          </a:p>
+        </p:txBody>
+      </p:sp>
+      <p:sp>
+        <p:nvSpPr>
+          <p:cNvPr id="19" name="TextBox 18"/>
+          <p:cNvSpPr txBox="1"/>
+          <p:nvPr/>
+        </p:nvSpPr>
+        <p:spPr>
+          <a:xfrm>
+            <a:off x="6492240" y="3977640"/>
+            <a:ext cx="4937760" cy="685800"/>
+          </a:xfrm>
+          <a:prstGeom prst="rect">
+            <a:avLst/>
+          </a:prstGeom>
+          <a:noFill/>
+        </p:spPr>
+        <p:txBody>
+          <a:bodyPr wrap="square">
+            <a:spAutoFit/>
+          </a:bodyPr>
+          <a:lstStyle/>
+          <a:p>
+            <a:pPr algn="l"/>
+            <a:r>
+              <a:rPr sz="1700" b="1" i="0">
+                <a:solidFill>
+                  <a:srgbClr val="FFFFFF"/>
+                </a:solidFill>
+              </a:rPr>
+              <a:t>Contractor
+Accountability</a:t>
+            </a:r>
+          </a:p>
+        </p:txBody>
+      </p:sp>
+      <p:sp>
+        <p:nvSpPr>
           <p:cNvPr id="20" name="TextBox 19"/>
           <p:cNvSpPr txBox="1"/>
           <p:nvPr/>
         </p:nvSpPr>
         <p:spPr>
           <a:xfrm>
-            <a:off x="548640" y="6291072"/>
-            <a:ext cx="11155680" cy="411480"/>
+            <a:off x="6492240" y="4709160"/>
+            <a:ext cx="4937760" cy="1280160"/>
           </a:xfrm>
           <a:prstGeom prst="rect">
             <a:avLst/>
@@ -7791,12 +7556,12 @@
           <a:p>
             <a:pPr algn="l"/>
             <a:r>
-              <a:rPr sz="1100" b="0" i="1">
+              <a:rPr sz="1800" b="0" i="0">
                 <a:solidFill>
                   <a:srgbClr val="CCD6E0"/>
                 </a:solidFill>
               </a:rPr>
-              <a:t>Data flow: photos processed transiently in customer cloud  ·  AI model called via API — no photo stored  ·  Results written to customer-owned DB only</a:t>
+              <a:t>Duplicate-photo detection fingerprints every image. If a contractor reuses the same photo across jobs, the system catches the original, the copy, and all job IDs it was submitted to. In our pilot: ~600 duplicates detected automatically.</a:t>
             </a:r>
           </a:p>
         </p:txBody>
@@ -7899,7 +7664,7 @@
                   <a:srgbClr val="00A8E8"/>
                 </a:solidFill>
               </a:rPr>
-              <a:t>COMPLIANCE &amp; GDPR</a:t>
+              <a:t>BUSINESS VALUE</a:t>
             </a:r>
           </a:p>
         </p:txBody>
@@ -7928,12 +7693,12 @@
           <a:p>
             <a:pPr algn="l"/>
             <a:r>
-              <a:rPr sz="3200" b="1" i="0">
+              <a:rPr sz="2900" b="1" i="0">
                 <a:solidFill>
                   <a:srgbClr val="FFFFFF"/>
                 </a:solidFill>
               </a:rPr>
-              <a:t>Regulatory Compliance Baked In — Not Bolted On</a:t>
+              <a:t>The Numbers Speak for Themselves</a:t>
             </a:r>
           </a:p>
         </p:txBody>
@@ -7947,7 +7712,7 @@
         <p:spPr>
           <a:xfrm>
             <a:off x="365760" y="1371600"/>
-            <a:ext cx="5303520" cy="2286000"/>
+            <a:ext cx="11430000" cy="859536"/>
           </a:xfrm>
           <a:prstGeom prst="rect">
             <a:avLst/>
@@ -7983,44 +7748,35 @@
       </p:sp>
       <p:sp>
         <p:nvSpPr>
-          <p:cNvPr id="6" name="Rectangle 5"/>
-          <p:cNvSpPr/>
-          <p:nvPr/>
-        </p:nvSpPr>
-        <p:spPr>
-          <a:xfrm>
-            <a:off x="365760" y="1371600"/>
-            <a:ext cx="5303520" cy="91440"/>
-          </a:xfrm>
-          <a:prstGeom prst="rect">
-            <a:avLst/>
-          </a:prstGeom>
-          <a:solidFill>
-            <a:srgbClr val="00D47E"/>
-          </a:solidFill>
-          <a:ln>
-            <a:noFill/>
-          </a:ln>
-        </p:spPr>
-        <p:style>
-          <a:lnRef idx="1">
-            <a:schemeClr val="accent1"/>
-          </a:lnRef>
-          <a:fillRef idx="3">
-            <a:schemeClr val="accent1"/>
-          </a:fillRef>
-          <a:effectRef idx="2">
-            <a:schemeClr val="accent1"/>
-          </a:effectRef>
-          <a:fontRef idx="minor">
-            <a:schemeClr val="lt1"/>
-          </a:fontRef>
-        </p:style>
-        <p:txBody>
-          <a:bodyPr rtlCol="0" anchor="ctr"/>
-          <a:lstStyle/>
-          <a:p>
-            <a:pPr algn="ctr"/>
+          <p:cNvPr id="6" name="TextBox 5"/>
+          <p:cNvSpPr txBox="1"/>
+          <p:nvPr/>
+        </p:nvSpPr>
+        <p:spPr>
+          <a:xfrm>
+            <a:off x="548640" y="1463040"/>
+            <a:ext cx="1463040" cy="731520"/>
+          </a:xfrm>
+          <a:prstGeom prst="rect">
+            <a:avLst/>
+          </a:prstGeom>
+          <a:noFill/>
+        </p:spPr>
+        <p:txBody>
+          <a:bodyPr wrap="square">
+            <a:spAutoFit/>
+          </a:bodyPr>
+          <a:lstStyle/>
+          <a:p>
+            <a:pPr algn="ctr"/>
+            <a:r>
+              <a:rPr sz="3400" b="1" i="0">
+                <a:solidFill>
+                  <a:srgbClr val="00D47E"/>
+                </a:solidFill>
+              </a:rPr>
+              <a:t>€2.4M+</a:t>
+            </a:r>
           </a:p>
         </p:txBody>
       </p:sp>
@@ -8032,8 +7788,8 @@
         </p:nvSpPr>
         <p:spPr>
           <a:xfrm>
-            <a:off x="548640" y="1508760"/>
-            <a:ext cx="4937760" cy="685800"/>
+            <a:off x="2194560" y="1417320"/>
+            <a:ext cx="3657600" cy="457200"/>
           </a:xfrm>
           <a:prstGeom prst="rect">
             <a:avLst/>
@@ -8048,13 +7804,12 @@
           <a:p>
             <a:pPr algn="l"/>
             <a:r>
-              <a:rPr sz="1700" b="1" i="0">
-                <a:solidFill>
-                  <a:srgbClr val="00D47E"/>
-                </a:solidFill>
-              </a:rPr>
-              <a:t>GDPR / NIS2
-Compliant</a:t>
+              <a:rPr sz="1600" b="1" i="0">
+                <a:solidFill>
+                  <a:srgbClr val="FFFFFF"/>
+                </a:solidFill>
+              </a:rPr>
+              <a:t>5-year liability exposure eliminated</a:t>
             </a:r>
           </a:p>
         </p:txBody>
@@ -8067,8 +7822,8 @@
         </p:nvSpPr>
         <p:spPr>
           <a:xfrm>
-            <a:off x="548640" y="2240280"/>
-            <a:ext cx="4937760" cy="1280160"/>
+            <a:off x="2194560" y="1847088"/>
+            <a:ext cx="9144000" cy="384048"/>
           </a:xfrm>
           <a:prstGeom prst="rect">
             <a:avLst/>
@@ -8083,12 +7838,13 @@
           <a:p>
             <a:pPr algn="l"/>
             <a:r>
-              <a:rPr sz="1800" b="0" i="0">
+              <a:rPr sz="1700" b="0" i="1">
                 <a:solidFill>
                   <a:srgbClr val="CCD6E0"/>
                 </a:solidFill>
               </a:rPr>
-              <a:t>Faces and license plates detected in every photo before any reviewer sees them. Flagged images are withheld from the display grid and routed to a "needs retake" list. No personal data is ever shown, stored, or transmitted to our infrastructure.</a:t>
+              <a:t>by catching every defect before contractor sign-off
+(€120K/incident × ~30% miss rate)</a:t>
             </a:r>
           </a:p>
         </p:txBody>
@@ -8101,8 +7857,8 @@
         </p:nvSpPr>
         <p:spPr>
           <a:xfrm>
-            <a:off x="6309360" y="1371600"/>
-            <a:ext cx="5303520" cy="2286000"/>
+            <a:off x="365760" y="2286000"/>
+            <a:ext cx="11430000" cy="859536"/>
           </a:xfrm>
           <a:prstGeom prst="rect">
             <a:avLst/>
@@ -8138,44 +7894,35 @@
       </p:sp>
       <p:sp>
         <p:nvSpPr>
-          <p:cNvPr id="10" name="Rectangle 9"/>
-          <p:cNvSpPr/>
-          <p:nvPr/>
-        </p:nvSpPr>
-        <p:spPr>
-          <a:xfrm>
-            <a:off x="6309360" y="1371600"/>
-            <a:ext cx="5303520" cy="91440"/>
-          </a:xfrm>
-          <a:prstGeom prst="rect">
-            <a:avLst/>
-          </a:prstGeom>
-          <a:solidFill>
-            <a:srgbClr val="00A8E8"/>
-          </a:solidFill>
-          <a:ln>
-            <a:noFill/>
-          </a:ln>
-        </p:spPr>
-        <p:style>
-          <a:lnRef idx="1">
-            <a:schemeClr val="accent1"/>
-          </a:lnRef>
-          <a:fillRef idx="3">
-            <a:schemeClr val="accent1"/>
-          </a:fillRef>
-          <a:effectRef idx="2">
-            <a:schemeClr val="accent1"/>
-          </a:effectRef>
-          <a:fontRef idx="minor">
-            <a:schemeClr val="lt1"/>
-          </a:fontRef>
-        </p:style>
-        <p:txBody>
-          <a:bodyPr rtlCol="0" anchor="ctr"/>
-          <a:lstStyle/>
-          <a:p>
-            <a:pPr algn="ctr"/>
+          <p:cNvPr id="10" name="TextBox 9"/>
+          <p:cNvSpPr txBox="1"/>
+          <p:nvPr/>
+        </p:nvSpPr>
+        <p:spPr>
+          <a:xfrm>
+            <a:off x="548640" y="2377440"/>
+            <a:ext cx="1463040" cy="731520"/>
+          </a:xfrm>
+          <a:prstGeom prst="rect">
+            <a:avLst/>
+          </a:prstGeom>
+          <a:noFill/>
+        </p:spPr>
+        <p:txBody>
+          <a:bodyPr wrap="square">
+            <a:spAutoFit/>
+          </a:bodyPr>
+          <a:lstStyle/>
+          <a:p>
+            <a:pPr algn="ctr"/>
+            <a:r>
+              <a:rPr sz="3400" b="1" i="0">
+                <a:solidFill>
+                  <a:srgbClr val="00A8E8"/>
+                </a:solidFill>
+              </a:rPr>
+              <a:t>99%</a:t>
+            </a:r>
           </a:p>
         </p:txBody>
       </p:sp>
@@ -8187,8 +7934,8 @@
         </p:nvSpPr>
         <p:spPr>
           <a:xfrm>
-            <a:off x="6492240" y="1508760"/>
-            <a:ext cx="4937760" cy="685800"/>
+            <a:off x="2194560" y="2331720"/>
+            <a:ext cx="3657600" cy="457200"/>
           </a:xfrm>
           <a:prstGeom prst="rect">
             <a:avLst/>
@@ -8203,13 +7950,12 @@
           <a:p>
             <a:pPr algn="l"/>
             <a:r>
-              <a:rPr sz="1700" b="1" i="0">
-                <a:solidFill>
-                  <a:srgbClr val="00A8E8"/>
-                </a:solidFill>
-              </a:rPr>
-              <a:t>Zero Data
-Retention</a:t>
+              <a:rPr sz="1600" b="1" i="0">
+                <a:solidFill>
+                  <a:srgbClr val="FFFFFF"/>
+                </a:solidFill>
+              </a:rPr>
+              <a:t>faster review time</a:t>
             </a:r>
           </a:p>
         </p:txBody>
@@ -8222,8 +7968,8 @@
         </p:nvSpPr>
         <p:spPr>
           <a:xfrm>
-            <a:off x="6492240" y="2240280"/>
-            <a:ext cx="4937760" cy="1280160"/>
+            <a:off x="2194560" y="2761488"/>
+            <a:ext cx="9144000" cy="384048"/>
           </a:xfrm>
           <a:prstGeom prst="rect">
             <a:avLst/>
@@ -8238,12 +7984,13 @@
           <a:p>
             <a:pPr algn="l"/>
             <a:r>
-              <a:rPr sz="1800" b="0" i="0">
+              <a:rPr sz="1700" b="0" i="1">
                 <a:solidFill>
                   <a:srgbClr val="CCD6E0"/>
                 </a:solidFill>
               </a:rPr>
-              <a:t>Photos are processed transiently — held in memory for the duration of the AI call, then released. Nothing is persisted on our servers. All results (scores, logs) are written exclusively to the customer's own database.</a:t>
+              <a:t>3–5 days per section → &lt; 30 min for the full route
+(measured: 3,929 photos in 28 min)</a:t>
             </a:r>
           </a:p>
         </p:txBody>
@@ -8256,8 +8003,8 @@
         </p:nvSpPr>
         <p:spPr>
           <a:xfrm>
-            <a:off x="365760" y="3840480"/>
-            <a:ext cx="5303520" cy="2286000"/>
+            <a:off x="365760" y="3200400"/>
+            <a:ext cx="11430000" cy="859536"/>
           </a:xfrm>
           <a:prstGeom prst="rect">
             <a:avLst/>
@@ -8293,44 +8040,35 @@
       </p:sp>
       <p:sp>
         <p:nvSpPr>
-          <p:cNvPr id="14" name="Rectangle 13"/>
-          <p:cNvSpPr/>
-          <p:nvPr/>
-        </p:nvSpPr>
-        <p:spPr>
-          <a:xfrm>
-            <a:off x="365760" y="3840480"/>
-            <a:ext cx="5303520" cy="91440"/>
-          </a:xfrm>
-          <a:prstGeom prst="rect">
-            <a:avLst/>
-          </a:prstGeom>
-          <a:solidFill>
-            <a:srgbClr val="FFC107"/>
-          </a:solidFill>
-          <a:ln>
-            <a:noFill/>
-          </a:ln>
-        </p:spPr>
-        <p:style>
-          <a:lnRef idx="1">
-            <a:schemeClr val="accent1"/>
-          </a:lnRef>
-          <a:fillRef idx="3">
-            <a:schemeClr val="accent1"/>
-          </a:fillRef>
-          <a:effectRef idx="2">
-            <a:schemeClr val="accent1"/>
-          </a:effectRef>
-          <a:fontRef idx="minor">
-            <a:schemeClr val="lt1"/>
-          </a:fontRef>
-        </p:style>
-        <p:txBody>
-          <a:bodyPr rtlCol="0" anchor="ctr"/>
-          <a:lstStyle/>
-          <a:p>
-            <a:pPr algn="ctr"/>
+          <p:cNvPr id="14" name="TextBox 13"/>
+          <p:cNvSpPr txBox="1"/>
+          <p:nvPr/>
+        </p:nvSpPr>
+        <p:spPr>
+          <a:xfrm>
+            <a:off x="548640" y="3291840"/>
+            <a:ext cx="1463040" cy="731520"/>
+          </a:xfrm>
+          <a:prstGeom prst="rect">
+            <a:avLst/>
+          </a:prstGeom>
+          <a:noFill/>
+        </p:spPr>
+        <p:txBody>
+          <a:bodyPr wrap="square">
+            <a:spAutoFit/>
+          </a:bodyPr>
+          <a:lstStyle/>
+          <a:p>
+            <a:pPr algn="ctr"/>
+            <a:r>
+              <a:rPr sz="3400" b="1" i="0">
+                <a:solidFill>
+                  <a:srgbClr val="00D47E"/>
+                </a:solidFill>
+              </a:rPr>
+              <a:t>100%</a:t>
+            </a:r>
           </a:p>
         </p:txBody>
       </p:sp>
@@ -8342,8 +8080,8 @@
         </p:nvSpPr>
         <p:spPr>
           <a:xfrm>
-            <a:off x="548640" y="3977640"/>
-            <a:ext cx="4937760" cy="685800"/>
+            <a:off x="2194560" y="3246120"/>
+            <a:ext cx="3657600" cy="457200"/>
           </a:xfrm>
           <a:prstGeom prst="rect">
             <a:avLst/>
@@ -8358,13 +8096,12 @@
           <a:p>
             <a:pPr algn="l"/>
             <a:r>
-              <a:rPr sz="1700" b="1" i="0">
-                <a:solidFill>
-                  <a:srgbClr val="FFC107"/>
-                </a:solidFill>
-              </a:rPr>
-              <a:t>Full Audit
-Trail</a:t>
+              <a:rPr sz="1600" b="1" i="0">
+                <a:solidFill>
+                  <a:srgbClr val="FFFFFF"/>
+                </a:solidFill>
+              </a:rPr>
+              <a:t>segment coverage</a:t>
             </a:r>
           </a:p>
         </p:txBody>
@@ -8377,8 +8114,8 @@
         </p:nvSpPr>
         <p:spPr>
           <a:xfrm>
-            <a:off x="548640" y="4709160"/>
-            <a:ext cx="4937760" cy="1280160"/>
+            <a:off x="2194560" y="3675888"/>
+            <a:ext cx="9144000" cy="384048"/>
           </a:xfrm>
           <a:prstGeom prst="rect">
             <a:avLst/>
@@ -8393,12 +8130,13 @@
           <a:p>
             <a:pPr algn="l"/>
             <a:r>
-              <a:rPr sz="1800" b="0" i="0">
+              <a:rPr sz="1700" b="0" i="1">
                 <a:solidFill>
                   <a:srgbClr val="CCD6E0"/>
                 </a:solidFill>
               </a:rPr>
-              <a:t>Every check result is logged with: photo ID · trench segment · GPS coordinates · timestamp · pass/fail per check. The export is a court-admissible evidence trail, not just a summary report.</a:t>
+              <a:t>zero trench meters go unreviewed
+(photo-per-5 m rule across all 2,983 segments)</a:t>
             </a:r>
           </a:p>
         </p:txBody>
@@ -8411,8 +8149,8 @@
         </p:nvSpPr>
         <p:spPr>
           <a:xfrm>
-            <a:off x="6309360" y="3840480"/>
-            <a:ext cx="5303520" cy="2286000"/>
+            <a:off x="365760" y="4114800"/>
+            <a:ext cx="11430000" cy="859536"/>
           </a:xfrm>
           <a:prstGeom prst="rect">
             <a:avLst/>
@@ -8448,20 +8186,123 @@
       </p:sp>
       <p:sp>
         <p:nvSpPr>
-          <p:cNvPr id="18" name="Rectangle 17"/>
+          <p:cNvPr id="18" name="TextBox 17"/>
+          <p:cNvSpPr txBox="1"/>
+          <p:nvPr/>
+        </p:nvSpPr>
+        <p:spPr>
+          <a:xfrm>
+            <a:off x="548640" y="4206240"/>
+            <a:ext cx="1463040" cy="731520"/>
+          </a:xfrm>
+          <a:prstGeom prst="rect">
+            <a:avLst/>
+          </a:prstGeom>
+          <a:noFill/>
+        </p:spPr>
+        <p:txBody>
+          <a:bodyPr wrap="square">
+            <a:spAutoFit/>
+          </a:bodyPr>
+          <a:lstStyle/>
+          <a:p>
+            <a:pPr algn="ctr"/>
+            <a:r>
+              <a:rPr sz="3400" b="1" i="0">
+                <a:solidFill>
+                  <a:srgbClr val="00D47E"/>
+                </a:solidFill>
+              </a:rPr>
+              <a:t>100%</a:t>
+            </a:r>
+          </a:p>
+        </p:txBody>
+      </p:sp>
+      <p:sp>
+        <p:nvSpPr>
+          <p:cNvPr id="19" name="TextBox 18"/>
+          <p:cNvSpPr txBox="1"/>
+          <p:nvPr/>
+        </p:nvSpPr>
+        <p:spPr>
+          <a:xfrm>
+            <a:off x="2194560" y="4160520"/>
+            <a:ext cx="3657600" cy="457200"/>
+          </a:xfrm>
+          <a:prstGeom prst="rect">
+            <a:avLst/>
+          </a:prstGeom>
+          <a:noFill/>
+        </p:spPr>
+        <p:txBody>
+          <a:bodyPr wrap="square">
+            <a:spAutoFit/>
+          </a:bodyPr>
+          <a:lstStyle/>
+          <a:p>
+            <a:pPr algn="l"/>
+            <a:r>
+              <a:rPr sz="1600" b="1" i="0">
+                <a:solidFill>
+                  <a:srgbClr val="FFFFFF"/>
+                </a:solidFill>
+              </a:rPr>
+              <a:t>audit transparency</a:t>
+            </a:r>
+          </a:p>
+        </p:txBody>
+      </p:sp>
+      <p:sp>
+        <p:nvSpPr>
+          <p:cNvPr id="20" name="TextBox 19"/>
+          <p:cNvSpPr txBox="1"/>
+          <p:nvPr/>
+        </p:nvSpPr>
+        <p:spPr>
+          <a:xfrm>
+            <a:off x="2194560" y="4590288"/>
+            <a:ext cx="9144000" cy="384048"/>
+          </a:xfrm>
+          <a:prstGeom prst="rect">
+            <a:avLst/>
+          </a:prstGeom>
+          <a:noFill/>
+        </p:spPr>
+        <p:txBody>
+          <a:bodyPr wrap="square">
+            <a:spAutoFit/>
+          </a:bodyPr>
+          <a:lstStyle/>
+          <a:p>
+            <a:pPr algn="l"/>
+            <a:r>
+              <a:rPr sz="1700" b="0" i="1">
+                <a:solidFill>
+                  <a:srgbClr val="CCD6E0"/>
+                </a:solidFill>
+              </a:rPr>
+              <a:t>every check logged per photo · per meter · per timestamp
+(exportable CSV/PDF, court-admissible)</a:t>
+            </a:r>
+          </a:p>
+        </p:txBody>
+      </p:sp>
+      <p:sp>
+        <p:nvSpPr>
+          <p:cNvPr id="21" name="Rectangle 20"/>
           <p:cNvSpPr/>
           <p:nvPr/>
         </p:nvSpPr>
         <p:spPr>
           <a:xfrm>
-            <a:off x="6309360" y="3840480"/>
-            <a:ext cx="5303520" cy="91440"/>
+            <a:off x="365760" y="5029200"/>
+            <a:ext cx="11430000" cy="859536"/>
           </a:xfrm>
           <a:prstGeom prst="rect">
             <a:avLst/>
           </a:prstGeom>
           <a:solidFill>
-            <a:srgbClr val="FFFFFF"/>
+            <a:srgbClr val="122636"/>
           </a:solidFill>
           <a:ln>
             <a:noFill/>
@@ -8491,14 +8332,48 @@
       </p:sp>
       <p:sp>
         <p:nvSpPr>
-          <p:cNvPr id="19" name="TextBox 18"/>
-          <p:cNvSpPr txBox="1"/>
-          <p:nvPr/>
-        </p:nvSpPr>
-        <p:spPr>
-          <a:xfrm>
-            <a:off x="6492240" y="3977640"/>
-            <a:ext cx="4937760" cy="685800"/>
+          <p:cNvPr id="22" name="TextBox 21"/>
+          <p:cNvSpPr txBox="1"/>
+          <p:nvPr/>
+        </p:nvSpPr>
+        <p:spPr>
+          <a:xfrm>
+            <a:off x="548640" y="5120640"/>
+            <a:ext cx="1463040" cy="731520"/>
+          </a:xfrm>
+          <a:prstGeom prst="rect">
+            <a:avLst/>
+          </a:prstGeom>
+          <a:noFill/>
+        </p:spPr>
+        <p:txBody>
+          <a:bodyPr wrap="square">
+            <a:spAutoFit/>
+          </a:bodyPr>
+          <a:lstStyle/>
+          <a:p>
+            <a:pPr algn="ctr"/>
+            <a:r>
+              <a:rPr sz="3400" b="1" i="0">
+                <a:solidFill>
+                  <a:srgbClr val="00D47E"/>
+                </a:solidFill>
+              </a:rPr>
+              <a:t>0%</a:t>
+            </a:r>
+          </a:p>
+        </p:txBody>
+      </p:sp>
+      <p:sp>
+        <p:nvSpPr>
+          <p:cNvPr id="23" name="TextBox 22"/>
+          <p:cNvSpPr txBox="1"/>
+          <p:nvPr/>
+        </p:nvSpPr>
+        <p:spPr>
+          <a:xfrm>
+            <a:off x="2194560" y="5074920"/>
+            <a:ext cx="3657600" cy="457200"/>
           </a:xfrm>
           <a:prstGeom prst="rect">
             <a:avLst/>
@@ -8513,27 +8388,26 @@
           <a:p>
             <a:pPr algn="l"/>
             <a:r>
-              <a:rPr sz="1700" b="1" i="0">
+              <a:rPr sz="1600" b="1" i="0">
                 <a:solidFill>
                   <a:srgbClr val="FFFFFF"/>
                 </a:solidFill>
               </a:rPr>
-              <a:t>Contractor
-Accountability</a:t>
-            </a:r>
-          </a:p>
-        </p:txBody>
-      </p:sp>
-      <p:sp>
-        <p:nvSpPr>
-          <p:cNvPr id="20" name="TextBox 19"/>
-          <p:cNvSpPr txBox="1"/>
-          <p:nvPr/>
-        </p:nvSpPr>
-        <p:spPr>
-          <a:xfrm>
-            <a:off x="6492240" y="4709160"/>
-            <a:ext cx="4937760" cy="1280160"/>
+              <a:t>hidden GDPR risk</a:t>
+            </a:r>
+          </a:p>
+        </p:txBody>
+      </p:sp>
+      <p:sp>
+        <p:nvSpPr>
+          <p:cNvPr id="24" name="TextBox 23"/>
+          <p:cNvSpPr txBox="1"/>
+          <p:nvPr/>
+        </p:nvSpPr>
+        <p:spPr>
+          <a:xfrm>
+            <a:off x="2194560" y="5504688"/>
+            <a:ext cx="9144000" cy="384048"/>
           </a:xfrm>
           <a:prstGeom prst="rect">
             <a:avLst/>
@@ -8548,12 +8422,90 @@
           <a:p>
             <a:pPr algn="l"/>
             <a:r>
-              <a:rPr sz="1800" b="0" i="0">
+              <a:rPr sz="1700" b="0" i="1">
                 <a:solidFill>
                   <a:srgbClr val="CCD6E0"/>
                 </a:solidFill>
               </a:rPr>
-              <a:t>Duplicate-photo detection fingerprints every image. If a contractor reuses the same photo across jobs, the system catches the original, the copy, and all job IDs it was submitted to. In our pilot: ~600 duplicates detected automatically.</a:t>
+              <a:t>faces &amp; plates flagged and withheld before any reviewer sees them
+(NIS2/GDPR checks run on 100% of photos)</a:t>
+            </a:r>
+          </a:p>
+        </p:txBody>
+      </p:sp>
+      <p:sp>
+        <p:nvSpPr>
+          <p:cNvPr id="25" name="Rectangle 24"/>
+          <p:cNvSpPr/>
+          <p:nvPr/>
+        </p:nvSpPr>
+        <p:spPr>
+          <a:xfrm>
+            <a:off x="365760" y="6080760"/>
+            <a:ext cx="11430000" cy="594360"/>
+          </a:xfrm>
+          <a:prstGeom prst="rect">
+            <a:avLst/>
+          </a:prstGeom>
+          <a:solidFill>
+            <a:srgbClr val="003A20"/>
+          </a:solidFill>
+          <a:ln>
+            <a:noFill/>
+          </a:ln>
+        </p:spPr>
+        <p:style>
+          <a:lnRef idx="1">
+            <a:schemeClr val="accent1"/>
+          </a:lnRef>
+          <a:fillRef idx="3">
+            <a:schemeClr val="accent1"/>
+          </a:fillRef>
+          <a:effectRef idx="2">
+            <a:schemeClr val="accent1"/>
+          </a:effectRef>
+          <a:fontRef idx="minor">
+            <a:schemeClr val="lt1"/>
+          </a:fontRef>
+        </p:style>
+        <p:txBody>
+          <a:bodyPr rtlCol="0" anchor="ctr"/>
+          <a:lstStyle/>
+          <a:p>
+            <a:pPr algn="ctr"/>
+          </a:p>
+        </p:txBody>
+      </p:sp>
+      <p:sp>
+        <p:nvSpPr>
+          <p:cNvPr id="26" name="TextBox 25"/>
+          <p:cNvSpPr txBox="1"/>
+          <p:nvPr/>
+        </p:nvSpPr>
+        <p:spPr>
+          <a:xfrm>
+            <a:off x="548640" y="6126480"/>
+            <a:ext cx="11155680" cy="502920"/>
+          </a:xfrm>
+          <a:prstGeom prst="rect">
+            <a:avLst/>
+          </a:prstGeom>
+          <a:noFill/>
+        </p:spPr>
+        <p:txBody>
+          <a:bodyPr wrap="square">
+            <a:spAutoFit/>
+          </a:bodyPr>
+          <a:lstStyle/>
+          <a:p>
+            <a:pPr algn="ctr"/>
+            <a:r>
+              <a:rPr sz="1400" b="1" i="0">
+                <a:solidFill>
+                  <a:srgbClr val="00D47E"/>
+                </a:solidFill>
+              </a:rPr>
+              <a:t>28 minutes end-to-end  ·  3,929 photos  ·  2,983 segments scored  ·  ~600 duplicates caught</a:t>
             </a:r>
           </a:p>
         </p:txBody>
@@ -8592,7 +8544,50 @@
         </p:nvSpPr>
         <p:spPr>
           <a:xfrm>
-            <a:off x="0" y="109728"/>
+            <a:off x="0" y="0"/>
+            <a:ext cx="12188952" cy="73152"/>
+          </a:xfrm>
+          <a:prstGeom prst="rect">
+            <a:avLst/>
+          </a:prstGeom>
+          <a:solidFill>
+            <a:srgbClr val="00A8E8"/>
+          </a:solidFill>
+          <a:ln>
+            <a:noFill/>
+          </a:ln>
+        </p:spPr>
+        <p:style>
+          <a:lnRef idx="1">
+            <a:schemeClr val="accent1"/>
+          </a:lnRef>
+          <a:fillRef idx="3">
+            <a:schemeClr val="accent1"/>
+          </a:fillRef>
+          <a:effectRef idx="2">
+            <a:schemeClr val="accent1"/>
+          </a:effectRef>
+          <a:fontRef idx="minor">
+            <a:schemeClr val="lt1"/>
+          </a:fontRef>
+        </p:style>
+        <p:txBody>
+          <a:bodyPr rtlCol="0" anchor="ctr"/>
+          <a:lstStyle/>
+          <a:p>
+            <a:pPr algn="ctr"/>
+          </a:p>
+        </p:txBody>
+      </p:sp>
+      <p:sp>
+        <p:nvSpPr>
+          <p:cNvPr id="3" name="Rectangle 2"/>
+          <p:cNvSpPr/>
+          <p:nvPr/>
+        </p:nvSpPr>
+        <p:spPr>
+          <a:xfrm>
+            <a:off x="0" y="6766560"/>
             <a:ext cx="12188952" cy="73152"/>
           </a:xfrm>
           <a:prstGeom prst="rect">
@@ -8629,68 +8624,35 @@
       </p:sp>
       <p:sp>
         <p:nvSpPr>
-          <p:cNvPr id="3" name="TextBox 2"/>
-          <p:cNvSpPr txBox="1"/>
-          <p:nvPr/>
-        </p:nvSpPr>
-        <p:spPr>
-          <a:xfrm>
-            <a:off x="457200" y="228600"/>
-            <a:ext cx="10972800" cy="365760"/>
-          </a:xfrm>
-          <a:prstGeom prst="rect">
-            <a:avLst/>
-          </a:prstGeom>
-          <a:noFill/>
-        </p:spPr>
-        <p:txBody>
-          <a:bodyPr wrap="square">
-            <a:spAutoFit/>
-          </a:bodyPr>
-          <a:lstStyle/>
-          <a:p>
-            <a:pPr algn="l"/>
-            <a:r>
-              <a:rPr sz="900" b="1" i="0">
-                <a:solidFill>
-                  <a:srgbClr val="00A8E8"/>
-                </a:solidFill>
-              </a:rPr>
-              <a:t>BUSINESS VALUE</a:t>
-            </a:r>
-          </a:p>
-        </p:txBody>
-      </p:sp>
-      <p:sp>
-        <p:nvSpPr>
           <p:cNvPr id="4" name="TextBox 3"/>
           <p:cNvSpPr txBox="1"/>
           <p:nvPr/>
         </p:nvSpPr>
         <p:spPr>
           <a:xfrm>
-            <a:off x="457200" y="502920"/>
-            <a:ext cx="10972800" cy="640080"/>
-          </a:xfrm>
-          <a:prstGeom prst="rect">
-            <a:avLst/>
-          </a:prstGeom>
-          <a:noFill/>
-        </p:spPr>
-        <p:txBody>
-          <a:bodyPr wrap="square">
-            <a:spAutoFit/>
-          </a:bodyPr>
-          <a:lstStyle/>
-          <a:p>
-            <a:pPr algn="l"/>
-            <a:r>
-              <a:rPr sz="3200" b="1" i="0">
+            <a:off x="640080" y="548640"/>
+            <a:ext cx="10515600" cy="822960"/>
+          </a:xfrm>
+          <a:prstGeom prst="rect">
+            <a:avLst/>
+          </a:prstGeom>
+          <a:noFill/>
+        </p:spPr>
+        <p:txBody>
+          <a:bodyPr wrap="square">
+            <a:spAutoFit/>
+          </a:bodyPr>
+          <a:lstStyle/>
+          <a:p>
+            <a:pPr algn="ctr"/>
+            <a:r>
+              <a:rPr sz="2800" b="1" i="0">
                 <a:solidFill>
                   <a:srgbClr val="FFFFFF"/>
                 </a:solidFill>
               </a:rPr>
-              <a:t>The Numbers Speak for Themselves</a:t>
+              <a:t>Every Unreviewed Meter Is a Liability.
+We Close That Gap — Automatically.</a:t>
             </a:r>
           </a:p>
         </p:txBody>
@@ -8703,8 +8665,8 @@
         </p:nvSpPr>
         <p:spPr>
           <a:xfrm>
-            <a:off x="365760" y="1371600"/>
-            <a:ext cx="11430000" cy="859536"/>
+            <a:off x="868680" y="1600200"/>
+            <a:ext cx="3291840" cy="3840480"/>
           </a:xfrm>
           <a:prstGeom prst="rect">
             <a:avLst/>
@@ -8740,35 +8702,44 @@
       </p:sp>
       <p:sp>
         <p:nvSpPr>
-          <p:cNvPr id="6" name="TextBox 5"/>
-          <p:cNvSpPr txBox="1"/>
-          <p:nvPr/>
-        </p:nvSpPr>
-        <p:spPr>
-          <a:xfrm>
-            <a:off x="548640" y="1463040"/>
-            <a:ext cx="1463040" cy="731520"/>
-          </a:xfrm>
-          <a:prstGeom prst="rect">
-            <a:avLst/>
-          </a:prstGeom>
-          <a:noFill/>
-        </p:spPr>
-        <p:txBody>
-          <a:bodyPr wrap="square">
-            <a:spAutoFit/>
-          </a:bodyPr>
-          <a:lstStyle/>
-          <a:p>
-            <a:pPr algn="ctr"/>
-            <a:r>
-              <a:rPr sz="3400" b="1" i="0">
-                <a:solidFill>
-                  <a:srgbClr val="00D47E"/>
-                </a:solidFill>
-              </a:rPr>
-              <a:t>€2.4M+</a:t>
-            </a:r>
+          <p:cNvPr id="6" name="Rectangle 5"/>
+          <p:cNvSpPr/>
+          <p:nvPr/>
+        </p:nvSpPr>
+        <p:spPr>
+          <a:xfrm>
+            <a:off x="868680" y="1600200"/>
+            <a:ext cx="3291840" cy="137160"/>
+          </a:xfrm>
+          <a:prstGeom prst="rect">
+            <a:avLst/>
+          </a:prstGeom>
+          <a:solidFill>
+            <a:srgbClr val="00A8E8"/>
+          </a:solidFill>
+          <a:ln>
+            <a:noFill/>
+          </a:ln>
+        </p:spPr>
+        <p:style>
+          <a:lnRef idx="1">
+            <a:schemeClr val="accent1"/>
+          </a:lnRef>
+          <a:fillRef idx="3">
+            <a:schemeClr val="accent1"/>
+          </a:fillRef>
+          <a:effectRef idx="2">
+            <a:schemeClr val="accent1"/>
+          </a:effectRef>
+          <a:fontRef idx="minor">
+            <a:schemeClr val="lt1"/>
+          </a:fontRef>
+        </p:style>
+        <p:txBody>
+          <a:bodyPr rtlCol="0" anchor="ctr"/>
+          <a:lstStyle/>
+          <a:p>
+            <a:pPr algn="ctr"/>
           </a:p>
         </p:txBody>
       </p:sp>
@@ -8780,77 +8751,112 @@
         </p:nvSpPr>
         <p:spPr>
           <a:xfrm>
-            <a:off x="2194560" y="1417320"/>
-            <a:ext cx="3657600" cy="457200"/>
-          </a:xfrm>
-          <a:prstGeom prst="rect">
-            <a:avLst/>
-          </a:prstGeom>
-          <a:noFill/>
-        </p:spPr>
-        <p:txBody>
-          <a:bodyPr wrap="square">
-            <a:spAutoFit/>
-          </a:bodyPr>
-          <a:lstStyle/>
-          <a:p>
-            <a:pPr algn="l"/>
-            <a:r>
-              <a:rPr sz="1600" b="1" i="0">
+            <a:off x="868680" y="1828800"/>
+            <a:ext cx="3291840" cy="594360"/>
+          </a:xfrm>
+          <a:prstGeom prst="rect">
+            <a:avLst/>
+          </a:prstGeom>
+          <a:noFill/>
+        </p:spPr>
+        <p:txBody>
+          <a:bodyPr wrap="square">
+            <a:spAutoFit/>
+          </a:bodyPr>
+          <a:lstStyle/>
+          <a:p>
+            <a:pPr algn="ctr"/>
+            <a:r>
+              <a:rPr sz="3000" b="1" i="0">
+                <a:solidFill>
+                  <a:srgbClr val="00A8E8"/>
+                </a:solidFill>
+              </a:rPr>
+              <a:t>01</a:t>
+            </a:r>
+          </a:p>
+        </p:txBody>
+      </p:sp>
+      <p:sp>
+        <p:nvSpPr>
+          <p:cNvPr id="8" name="TextBox 7"/>
+          <p:cNvSpPr txBox="1"/>
+          <p:nvPr/>
+        </p:nvSpPr>
+        <p:spPr>
+          <a:xfrm>
+            <a:off x="868680" y="2468880"/>
+            <a:ext cx="3291840" cy="594360"/>
+          </a:xfrm>
+          <a:prstGeom prst="rect">
+            <a:avLst/>
+          </a:prstGeom>
+          <a:noFill/>
+        </p:spPr>
+        <p:txBody>
+          <a:bodyPr wrap="square">
+            <a:spAutoFit/>
+          </a:bodyPr>
+          <a:lstStyle/>
+          <a:p>
+            <a:pPr algn="ctr"/>
+            <a:r>
+              <a:rPr sz="2000" b="1" i="0">
                 <a:solidFill>
                   <a:srgbClr val="FFFFFF"/>
                 </a:solidFill>
               </a:rPr>
-              <a:t>5-year liability exposure eliminated</a:t>
-            </a:r>
-          </a:p>
-        </p:txBody>
-      </p:sp>
-      <p:sp>
-        <p:nvSpPr>
-          <p:cNvPr id="8" name="TextBox 7"/>
-          <p:cNvSpPr txBox="1"/>
-          <p:nvPr/>
-        </p:nvSpPr>
-        <p:spPr>
-          <a:xfrm>
-            <a:off x="2194560" y="1847088"/>
-            <a:ext cx="9144000" cy="384048"/>
-          </a:xfrm>
-          <a:prstGeom prst="rect">
-            <a:avLst/>
-          </a:prstGeom>
-          <a:noFill/>
-        </p:spPr>
-        <p:txBody>
-          <a:bodyPr wrap="square">
-            <a:spAutoFit/>
-          </a:bodyPr>
-          <a:lstStyle/>
-          <a:p>
-            <a:pPr algn="l"/>
-            <a:r>
-              <a:rPr sz="1700" b="0" i="1">
+              <a:t>Approve Pilot</a:t>
+            </a:r>
+          </a:p>
+        </p:txBody>
+      </p:sp>
+      <p:sp>
+        <p:nvSpPr>
+          <p:cNvPr id="9" name="TextBox 8"/>
+          <p:cNvSpPr txBox="1"/>
+          <p:nvPr/>
+        </p:nvSpPr>
+        <p:spPr>
+          <a:xfrm>
+            <a:off x="1051560" y="3200400"/>
+            <a:ext cx="2926080" cy="2011680"/>
+          </a:xfrm>
+          <a:prstGeom prst="rect">
+            <a:avLst/>
+          </a:prstGeom>
+          <a:noFill/>
+        </p:spPr>
+        <p:txBody>
+          <a:bodyPr wrap="square">
+            <a:spAutoFit/>
+          </a:bodyPr>
+          <a:lstStyle/>
+          <a:p>
+            <a:pPr algn="ctr"/>
+            <a:r>
+              <a:rPr sz="1600" b="0" i="0">
                 <a:solidFill>
                   <a:srgbClr val="CCD6E0"/>
                 </a:solidFill>
               </a:rPr>
-              <a:t>by catching every defect before contractor sign-off
-(€120K/incident × ~30% miss rate)</a:t>
-            </a:r>
-          </a:p>
-        </p:txBody>
-      </p:sp>
-      <p:sp>
-        <p:nvSpPr>
-          <p:cNvPr id="9" name="Rectangle 8"/>
+              <a:t>Authorise the TrenchVerify AI pilot
+for the current Klosterneuburg
+route build</a:t>
+            </a:r>
+          </a:p>
+        </p:txBody>
+      </p:sp>
+      <p:sp>
+        <p:nvSpPr>
+          <p:cNvPr id="10" name="Rectangle 9"/>
           <p:cNvSpPr/>
           <p:nvPr/>
         </p:nvSpPr>
         <p:spPr>
           <a:xfrm>
-            <a:off x="365760" y="2286000"/>
-            <a:ext cx="11430000" cy="859536"/>
+            <a:off x="4617720" y="1600200"/>
+            <a:ext cx="3291840" cy="3840480"/>
           </a:xfrm>
           <a:prstGeom prst="rect">
             <a:avLst/>
@@ -8886,117 +8892,161 @@
       </p:sp>
       <p:sp>
         <p:nvSpPr>
-          <p:cNvPr id="10" name="TextBox 9"/>
-          <p:cNvSpPr txBox="1"/>
-          <p:nvPr/>
-        </p:nvSpPr>
-        <p:spPr>
-          <a:xfrm>
-            <a:off x="548640" y="2377440"/>
-            <a:ext cx="1463040" cy="731520"/>
-          </a:xfrm>
-          <a:prstGeom prst="rect">
-            <a:avLst/>
-          </a:prstGeom>
-          <a:noFill/>
-        </p:spPr>
-        <p:txBody>
-          <a:bodyPr wrap="square">
-            <a:spAutoFit/>
-          </a:bodyPr>
-          <a:lstStyle/>
-          <a:p>
-            <a:pPr algn="ctr"/>
-            <a:r>
-              <a:rPr sz="3400" b="1" i="0">
-                <a:solidFill>
-                  <a:srgbClr val="00A8E8"/>
-                </a:solidFill>
-              </a:rPr>
-              <a:t>99%</a:t>
-            </a:r>
-          </a:p>
-        </p:txBody>
-      </p:sp>
-      <p:sp>
-        <p:nvSpPr>
-          <p:cNvPr id="11" name="TextBox 10"/>
-          <p:cNvSpPr txBox="1"/>
-          <p:nvPr/>
-        </p:nvSpPr>
-        <p:spPr>
-          <a:xfrm>
-            <a:off x="2194560" y="2331720"/>
-            <a:ext cx="3657600" cy="457200"/>
-          </a:xfrm>
-          <a:prstGeom prst="rect">
-            <a:avLst/>
-          </a:prstGeom>
-          <a:noFill/>
-        </p:spPr>
-        <p:txBody>
-          <a:bodyPr wrap="square">
-            <a:spAutoFit/>
-          </a:bodyPr>
-          <a:lstStyle/>
-          <a:p>
-            <a:pPr algn="l"/>
-            <a:r>
-              <a:rPr sz="1600" b="1" i="0">
+          <p:cNvPr id="11" name="Rectangle 10"/>
+          <p:cNvSpPr/>
+          <p:nvPr/>
+        </p:nvSpPr>
+        <p:spPr>
+          <a:xfrm>
+            <a:off x="4617720" y="1600200"/>
+            <a:ext cx="3291840" cy="137160"/>
+          </a:xfrm>
+          <a:prstGeom prst="rect">
+            <a:avLst/>
+          </a:prstGeom>
+          <a:solidFill>
+            <a:srgbClr val="FFC107"/>
+          </a:solidFill>
+          <a:ln>
+            <a:noFill/>
+          </a:ln>
+        </p:spPr>
+        <p:style>
+          <a:lnRef idx="1">
+            <a:schemeClr val="accent1"/>
+          </a:lnRef>
+          <a:fillRef idx="3">
+            <a:schemeClr val="accent1"/>
+          </a:fillRef>
+          <a:effectRef idx="2">
+            <a:schemeClr val="accent1"/>
+          </a:effectRef>
+          <a:fontRef idx="minor">
+            <a:schemeClr val="lt1"/>
+          </a:fontRef>
+        </p:style>
+        <p:txBody>
+          <a:bodyPr rtlCol="0" anchor="ctr"/>
+          <a:lstStyle/>
+          <a:p>
+            <a:pPr algn="ctr"/>
+          </a:p>
+        </p:txBody>
+      </p:sp>
+      <p:sp>
+        <p:nvSpPr>
+          <p:cNvPr id="12" name="TextBox 11"/>
+          <p:cNvSpPr txBox="1"/>
+          <p:nvPr/>
+        </p:nvSpPr>
+        <p:spPr>
+          <a:xfrm>
+            <a:off x="4617720" y="1828800"/>
+            <a:ext cx="3291840" cy="594360"/>
+          </a:xfrm>
+          <a:prstGeom prst="rect">
+            <a:avLst/>
+          </a:prstGeom>
+          <a:noFill/>
+        </p:spPr>
+        <p:txBody>
+          <a:bodyPr wrap="square">
+            <a:spAutoFit/>
+          </a:bodyPr>
+          <a:lstStyle/>
+          <a:p>
+            <a:pPr algn="ctr"/>
+            <a:r>
+              <a:rPr sz="3000" b="1" i="0">
+                <a:solidFill>
+                  <a:srgbClr val="FFC107"/>
+                </a:solidFill>
+              </a:rPr>
+              <a:t>02</a:t>
+            </a:r>
+          </a:p>
+        </p:txBody>
+      </p:sp>
+      <p:sp>
+        <p:nvSpPr>
+          <p:cNvPr id="13" name="TextBox 12"/>
+          <p:cNvSpPr txBox="1"/>
+          <p:nvPr/>
+        </p:nvSpPr>
+        <p:spPr>
+          <a:xfrm>
+            <a:off x="4617720" y="2468880"/>
+            <a:ext cx="3291840" cy="594360"/>
+          </a:xfrm>
+          <a:prstGeom prst="rect">
+            <a:avLst/>
+          </a:prstGeom>
+          <a:noFill/>
+        </p:spPr>
+        <p:txBody>
+          <a:bodyPr wrap="square">
+            <a:spAutoFit/>
+          </a:bodyPr>
+          <a:lstStyle/>
+          <a:p>
+            <a:pPr algn="ctr"/>
+            <a:r>
+              <a:rPr sz="2000" b="1" i="0">
                 <a:solidFill>
                   <a:srgbClr val="FFFFFF"/>
                 </a:solidFill>
               </a:rPr>
-              <a:t>faster review time</a:t>
-            </a:r>
-          </a:p>
-        </p:txBody>
-      </p:sp>
-      <p:sp>
-        <p:nvSpPr>
-          <p:cNvPr id="12" name="TextBox 11"/>
-          <p:cNvSpPr txBox="1"/>
-          <p:nvPr/>
-        </p:nvSpPr>
-        <p:spPr>
-          <a:xfrm>
-            <a:off x="2194560" y="2761488"/>
-            <a:ext cx="9144000" cy="384048"/>
-          </a:xfrm>
-          <a:prstGeom prst="rect">
-            <a:avLst/>
-          </a:prstGeom>
-          <a:noFill/>
-        </p:spPr>
-        <p:txBody>
-          <a:bodyPr wrap="square">
-            <a:spAutoFit/>
-          </a:bodyPr>
-          <a:lstStyle/>
-          <a:p>
-            <a:pPr algn="l"/>
-            <a:r>
-              <a:rPr sz="1700" b="0" i="1">
+              <a:t>Define KPIs</a:t>
+            </a:r>
+          </a:p>
+        </p:txBody>
+      </p:sp>
+      <p:sp>
+        <p:nvSpPr>
+          <p:cNvPr id="14" name="TextBox 13"/>
+          <p:cNvSpPr txBox="1"/>
+          <p:nvPr/>
+        </p:nvSpPr>
+        <p:spPr>
+          <a:xfrm>
+            <a:off x="4800600" y="3200400"/>
+            <a:ext cx="2926080" cy="2011680"/>
+          </a:xfrm>
+          <a:prstGeom prst="rect">
+            <a:avLst/>
+          </a:prstGeom>
+          <a:noFill/>
+        </p:spPr>
+        <p:txBody>
+          <a:bodyPr wrap="square">
+            <a:spAutoFit/>
+          </a:bodyPr>
+          <a:lstStyle/>
+          <a:p>
+            <a:pPr algn="ctr"/>
+            <a:r>
+              <a:rPr sz="1600" b="0" i="0">
                 <a:solidFill>
                   <a:srgbClr val="CCD6E0"/>
                 </a:solidFill>
               </a:rPr>
-              <a:t>3–5 days per section → &lt; 30 min for the full route
-(measured: 3,929 photos in 28 min)</a:t>
-            </a:r>
-          </a:p>
-        </p:txBody>
-      </p:sp>
-      <p:sp>
-        <p:nvSpPr>
-          <p:cNvPr id="13" name="Rectangle 12"/>
+              <a:t>Set acceptance thresholds:
+coverage %, photo compliance rate,
+time-to-report</a:t>
+            </a:r>
+          </a:p>
+        </p:txBody>
+      </p:sp>
+      <p:sp>
+        <p:nvSpPr>
+          <p:cNvPr id="15" name="Rectangle 14"/>
           <p:cNvSpPr/>
           <p:nvPr/>
         </p:nvSpPr>
         <p:spPr>
           <a:xfrm>
-            <a:off x="365760" y="3200400"/>
-            <a:ext cx="11430000" cy="859536"/>
+            <a:off x="8366760" y="1600200"/>
+            <a:ext cx="3291840" cy="3840480"/>
           </a:xfrm>
           <a:prstGeom prst="rect">
             <a:avLst/>
@@ -9032,123 +9082,20 @@
       </p:sp>
       <p:sp>
         <p:nvSpPr>
-          <p:cNvPr id="14" name="TextBox 13"/>
-          <p:cNvSpPr txBox="1"/>
-          <p:nvPr/>
-        </p:nvSpPr>
-        <p:spPr>
-          <a:xfrm>
-            <a:off x="548640" y="3291840"/>
-            <a:ext cx="1463040" cy="731520"/>
-          </a:xfrm>
-          <a:prstGeom prst="rect">
-            <a:avLst/>
-          </a:prstGeom>
-          <a:noFill/>
-        </p:spPr>
-        <p:txBody>
-          <a:bodyPr wrap="square">
-            <a:spAutoFit/>
-          </a:bodyPr>
-          <a:lstStyle/>
-          <a:p>
-            <a:pPr algn="ctr"/>
-            <a:r>
-              <a:rPr sz="3400" b="1" i="0">
-                <a:solidFill>
-                  <a:srgbClr val="00D47E"/>
-                </a:solidFill>
-              </a:rPr>
-              <a:t>100%</a:t>
-            </a:r>
-          </a:p>
-        </p:txBody>
-      </p:sp>
-      <p:sp>
-        <p:nvSpPr>
-          <p:cNvPr id="15" name="TextBox 14"/>
-          <p:cNvSpPr txBox="1"/>
-          <p:nvPr/>
-        </p:nvSpPr>
-        <p:spPr>
-          <a:xfrm>
-            <a:off x="2194560" y="3246120"/>
-            <a:ext cx="3657600" cy="457200"/>
-          </a:xfrm>
-          <a:prstGeom prst="rect">
-            <a:avLst/>
-          </a:prstGeom>
-          <a:noFill/>
-        </p:spPr>
-        <p:txBody>
-          <a:bodyPr wrap="square">
-            <a:spAutoFit/>
-          </a:bodyPr>
-          <a:lstStyle/>
-          <a:p>
-            <a:pPr algn="l"/>
-            <a:r>
-              <a:rPr sz="1600" b="1" i="0">
-                <a:solidFill>
-                  <a:srgbClr val="FFFFFF"/>
-                </a:solidFill>
-              </a:rPr>
-              <a:t>segment coverage</a:t>
-            </a:r>
-          </a:p>
-        </p:txBody>
-      </p:sp>
-      <p:sp>
-        <p:nvSpPr>
-          <p:cNvPr id="16" name="TextBox 15"/>
-          <p:cNvSpPr txBox="1"/>
-          <p:nvPr/>
-        </p:nvSpPr>
-        <p:spPr>
-          <a:xfrm>
-            <a:off x="2194560" y="3675888"/>
-            <a:ext cx="9144000" cy="384048"/>
-          </a:xfrm>
-          <a:prstGeom prst="rect">
-            <a:avLst/>
-          </a:prstGeom>
-          <a:noFill/>
-        </p:spPr>
-        <p:txBody>
-          <a:bodyPr wrap="square">
-            <a:spAutoFit/>
-          </a:bodyPr>
-          <a:lstStyle/>
-          <a:p>
-            <a:pPr algn="l"/>
-            <a:r>
-              <a:rPr sz="1700" b="0" i="1">
-                <a:solidFill>
-                  <a:srgbClr val="CCD6E0"/>
-                </a:solidFill>
-              </a:rPr>
-              <a:t>zero trench meters go unreviewed
-(photo-per-5 m rule across all 2,983 segments)</a:t>
-            </a:r>
-          </a:p>
-        </p:txBody>
-      </p:sp>
-      <p:sp>
-        <p:nvSpPr>
-          <p:cNvPr id="17" name="Rectangle 16"/>
+          <p:cNvPr id="16" name="Rectangle 15"/>
           <p:cNvSpPr/>
           <p:nvPr/>
         </p:nvSpPr>
         <p:spPr>
           <a:xfrm>
-            <a:off x="365760" y="4114800"/>
-            <a:ext cx="11430000" cy="859536"/>
+            <a:off x="8366760" y="1600200"/>
+            <a:ext cx="3291840" cy="137160"/>
           </a:xfrm>
           <a:prstGeom prst="rect">
             <a:avLst/>
           </a:prstGeom>
           <a:solidFill>
-            <a:srgbClr val="122636"/>
+            <a:srgbClr val="00D47E"/>
           </a:solidFill>
           <a:ln>
             <a:noFill/>
@@ -9178,326 +9125,138 @@
       </p:sp>
       <p:sp>
         <p:nvSpPr>
+          <p:cNvPr id="17" name="TextBox 16"/>
+          <p:cNvSpPr txBox="1"/>
+          <p:nvPr/>
+        </p:nvSpPr>
+        <p:spPr>
+          <a:xfrm>
+            <a:off x="8366760" y="1828800"/>
+            <a:ext cx="3291840" cy="594360"/>
+          </a:xfrm>
+          <a:prstGeom prst="rect">
+            <a:avLst/>
+          </a:prstGeom>
+          <a:noFill/>
+        </p:spPr>
+        <p:txBody>
+          <a:bodyPr wrap="square">
+            <a:spAutoFit/>
+          </a:bodyPr>
+          <a:lstStyle/>
+          <a:p>
+            <a:pPr algn="ctr"/>
+            <a:r>
+              <a:rPr sz="3000" b="1" i="0">
+                <a:solidFill>
+                  <a:srgbClr val="00D47E"/>
+                </a:solidFill>
+              </a:rPr>
+              <a:t>03</a:t>
+            </a:r>
+          </a:p>
+        </p:txBody>
+      </p:sp>
+      <p:sp>
+        <p:nvSpPr>
           <p:cNvPr id="18" name="TextBox 17"/>
           <p:cNvSpPr txBox="1"/>
           <p:nvPr/>
         </p:nvSpPr>
         <p:spPr>
           <a:xfrm>
-            <a:off x="548640" y="4206240"/>
-            <a:ext cx="1463040" cy="731520"/>
-          </a:xfrm>
-          <a:prstGeom prst="rect">
-            <a:avLst/>
-          </a:prstGeom>
-          <a:noFill/>
-        </p:spPr>
-        <p:txBody>
-          <a:bodyPr wrap="square">
-            <a:spAutoFit/>
-          </a:bodyPr>
-          <a:lstStyle/>
-          <a:p>
-            <a:pPr algn="ctr"/>
-            <a:r>
-              <a:rPr sz="3400" b="1" i="0">
+            <a:off x="8366760" y="2468880"/>
+            <a:ext cx="3291840" cy="594360"/>
+          </a:xfrm>
+          <a:prstGeom prst="rect">
+            <a:avLst/>
+          </a:prstGeom>
+          <a:noFill/>
+        </p:spPr>
+        <p:txBody>
+          <a:bodyPr wrap="square">
+            <a:spAutoFit/>
+          </a:bodyPr>
+          <a:lstStyle/>
+          <a:p>
+            <a:pPr algn="ctr"/>
+            <a:r>
+              <a:rPr sz="2000" b="1" i="0">
+                <a:solidFill>
+                  <a:srgbClr val="FFFFFF"/>
+                </a:solidFill>
+              </a:rPr>
+              <a:t>Scale</a:t>
+            </a:r>
+          </a:p>
+        </p:txBody>
+      </p:sp>
+      <p:sp>
+        <p:nvSpPr>
+          <p:cNvPr id="19" name="TextBox 18"/>
+          <p:cNvSpPr txBox="1"/>
+          <p:nvPr/>
+        </p:nvSpPr>
+        <p:spPr>
+          <a:xfrm>
+            <a:off x="8549640" y="3200400"/>
+            <a:ext cx="2926080" cy="2011680"/>
+          </a:xfrm>
+          <a:prstGeom prst="rect">
+            <a:avLst/>
+          </a:prstGeom>
+          <a:noFill/>
+        </p:spPr>
+        <p:txBody>
+          <a:bodyPr wrap="square">
+            <a:spAutoFit/>
+          </a:bodyPr>
+          <a:lstStyle/>
+          <a:p>
+            <a:pPr algn="ctr"/>
+            <a:r>
+              <a:rPr sz="1600" b="0" i="0">
+                <a:solidFill>
+                  <a:srgbClr val="CCD6E0"/>
+                </a:solidFill>
+              </a:rPr>
+              <a:t>Roll out across all future APG
+construction phases — protect
+the full network</a:t>
+            </a:r>
+          </a:p>
+        </p:txBody>
+      </p:sp>
+      <p:sp>
+        <p:nvSpPr>
+          <p:cNvPr id="20" name="TextBox 19"/>
+          <p:cNvSpPr txBox="1"/>
+          <p:nvPr/>
+        </p:nvSpPr>
+        <p:spPr>
+          <a:xfrm>
+            <a:off x="457200" y="5623560"/>
+            <a:ext cx="11247120" cy="594360"/>
+          </a:xfrm>
+          <a:prstGeom prst="rect">
+            <a:avLst/>
+          </a:prstGeom>
+          <a:noFill/>
+        </p:spPr>
+        <p:txBody>
+          <a:bodyPr wrap="square">
+            <a:spAutoFit/>
+          </a:bodyPr>
+          <a:lstStyle/>
+          <a:p>
+            <a:pPr algn="ctr"/>
+            <a:r>
+              <a:rPr sz="1700" b="1" i="0">
                 <a:solidFill>
                   <a:srgbClr val="00D47E"/>
                 </a:solidFill>
               </a:rPr>
-              <a:t>100%</a:t>
-            </a:r>
-          </a:p>
-        </p:txBody>
-      </p:sp>
-      <p:sp>
-        <p:nvSpPr>
-          <p:cNvPr id="19" name="TextBox 18"/>
-          <p:cNvSpPr txBox="1"/>
-          <p:nvPr/>
-        </p:nvSpPr>
-        <p:spPr>
-          <a:xfrm>
-            <a:off x="2194560" y="4160520"/>
-            <a:ext cx="3657600" cy="457200"/>
-          </a:xfrm>
-          <a:prstGeom prst="rect">
-            <a:avLst/>
-          </a:prstGeom>
-          <a:noFill/>
-        </p:spPr>
-        <p:txBody>
-          <a:bodyPr wrap="square">
-            <a:spAutoFit/>
-          </a:bodyPr>
-          <a:lstStyle/>
-          <a:p>
-            <a:pPr algn="l"/>
-            <a:r>
-              <a:rPr sz="1600" b="1" i="0">
-                <a:solidFill>
-                  <a:srgbClr val="FFFFFF"/>
-                </a:solidFill>
-              </a:rPr>
-              <a:t>audit transparency</a:t>
-            </a:r>
-          </a:p>
-        </p:txBody>
-      </p:sp>
-      <p:sp>
-        <p:nvSpPr>
-          <p:cNvPr id="20" name="TextBox 19"/>
-          <p:cNvSpPr txBox="1"/>
-          <p:nvPr/>
-        </p:nvSpPr>
-        <p:spPr>
-          <a:xfrm>
-            <a:off x="2194560" y="4590288"/>
-            <a:ext cx="9144000" cy="384048"/>
-          </a:xfrm>
-          <a:prstGeom prst="rect">
-            <a:avLst/>
-          </a:prstGeom>
-          <a:noFill/>
-        </p:spPr>
-        <p:txBody>
-          <a:bodyPr wrap="square">
-            <a:spAutoFit/>
-          </a:bodyPr>
-          <a:lstStyle/>
-          <a:p>
-            <a:pPr algn="l"/>
-            <a:r>
-              <a:rPr sz="1700" b="0" i="1">
-                <a:solidFill>
-                  <a:srgbClr val="CCD6E0"/>
-                </a:solidFill>
-              </a:rPr>
-              <a:t>every check logged per photo · per meter · per timestamp
-(exportable CSV/HTML, court-admissible)</a:t>
-            </a:r>
-          </a:p>
-        </p:txBody>
-      </p:sp>
-      <p:sp>
-        <p:nvSpPr>
-          <p:cNvPr id="21" name="Rectangle 20"/>
-          <p:cNvSpPr/>
-          <p:nvPr/>
-        </p:nvSpPr>
-        <p:spPr>
-          <a:xfrm>
-            <a:off x="365760" y="5029200"/>
-            <a:ext cx="11430000" cy="859536"/>
-          </a:xfrm>
-          <a:prstGeom prst="rect">
-            <a:avLst/>
-          </a:prstGeom>
-          <a:solidFill>
-            <a:srgbClr val="122636"/>
-          </a:solidFill>
-          <a:ln>
-            <a:noFill/>
-          </a:ln>
-        </p:spPr>
-        <p:style>
-          <a:lnRef idx="1">
-            <a:schemeClr val="accent1"/>
-          </a:lnRef>
-          <a:fillRef idx="3">
-            <a:schemeClr val="accent1"/>
-          </a:fillRef>
-          <a:effectRef idx="2">
-            <a:schemeClr val="accent1"/>
-          </a:effectRef>
-          <a:fontRef idx="minor">
-            <a:schemeClr val="lt1"/>
-          </a:fontRef>
-        </p:style>
-        <p:txBody>
-          <a:bodyPr rtlCol="0" anchor="ctr"/>
-          <a:lstStyle/>
-          <a:p>
-            <a:pPr algn="ctr"/>
-          </a:p>
-        </p:txBody>
-      </p:sp>
-      <p:sp>
-        <p:nvSpPr>
-          <p:cNvPr id="22" name="TextBox 21"/>
-          <p:cNvSpPr txBox="1"/>
-          <p:nvPr/>
-        </p:nvSpPr>
-        <p:spPr>
-          <a:xfrm>
-            <a:off x="548640" y="5120640"/>
-            <a:ext cx="1463040" cy="731520"/>
-          </a:xfrm>
-          <a:prstGeom prst="rect">
-            <a:avLst/>
-          </a:prstGeom>
-          <a:noFill/>
-        </p:spPr>
-        <p:txBody>
-          <a:bodyPr wrap="square">
-            <a:spAutoFit/>
-          </a:bodyPr>
-          <a:lstStyle/>
-          <a:p>
-            <a:pPr algn="ctr"/>
-            <a:r>
-              <a:rPr sz="3400" b="1" i="0">
-                <a:solidFill>
-                  <a:srgbClr val="00D47E"/>
-                </a:solidFill>
-              </a:rPr>
-              <a:t>0%</a:t>
-            </a:r>
-          </a:p>
-        </p:txBody>
-      </p:sp>
-      <p:sp>
-        <p:nvSpPr>
-          <p:cNvPr id="23" name="TextBox 22"/>
-          <p:cNvSpPr txBox="1"/>
-          <p:nvPr/>
-        </p:nvSpPr>
-        <p:spPr>
-          <a:xfrm>
-            <a:off x="2194560" y="5074920"/>
-            <a:ext cx="3657600" cy="457200"/>
-          </a:xfrm>
-          <a:prstGeom prst="rect">
-            <a:avLst/>
-          </a:prstGeom>
-          <a:noFill/>
-        </p:spPr>
-        <p:txBody>
-          <a:bodyPr wrap="square">
-            <a:spAutoFit/>
-          </a:bodyPr>
-          <a:lstStyle/>
-          <a:p>
-            <a:pPr algn="l"/>
-            <a:r>
-              <a:rPr sz="1600" b="1" i="0">
-                <a:solidFill>
-                  <a:srgbClr val="FFFFFF"/>
-                </a:solidFill>
-              </a:rPr>
-              <a:t>hidden GDPR risk</a:t>
-            </a:r>
-          </a:p>
-        </p:txBody>
-      </p:sp>
-      <p:sp>
-        <p:nvSpPr>
-          <p:cNvPr id="24" name="TextBox 23"/>
-          <p:cNvSpPr txBox="1"/>
-          <p:nvPr/>
-        </p:nvSpPr>
-        <p:spPr>
-          <a:xfrm>
-            <a:off x="2194560" y="5504688"/>
-            <a:ext cx="9144000" cy="384048"/>
-          </a:xfrm>
-          <a:prstGeom prst="rect">
-            <a:avLst/>
-          </a:prstGeom>
-          <a:noFill/>
-        </p:spPr>
-        <p:txBody>
-          <a:bodyPr wrap="square">
-            <a:spAutoFit/>
-          </a:bodyPr>
-          <a:lstStyle/>
-          <a:p>
-            <a:pPr algn="l"/>
-            <a:r>
-              <a:rPr sz="1700" b="0" i="1">
-                <a:solidFill>
-                  <a:srgbClr val="CCD6E0"/>
-                </a:solidFill>
-              </a:rPr>
-              <a:t>faces &amp; plates flagged and withheld before any reviewer sees them
-(NIS2/GDPR checks run on 100% of photos)</a:t>
-            </a:r>
-          </a:p>
-        </p:txBody>
-      </p:sp>
-      <p:sp>
-        <p:nvSpPr>
-          <p:cNvPr id="25" name="Rectangle 24"/>
-          <p:cNvSpPr/>
-          <p:nvPr/>
-        </p:nvSpPr>
-        <p:spPr>
-          <a:xfrm>
-            <a:off x="365760" y="6080760"/>
-            <a:ext cx="11430000" cy="594360"/>
-          </a:xfrm>
-          <a:prstGeom prst="rect">
-            <a:avLst/>
-          </a:prstGeom>
-          <a:solidFill>
-            <a:srgbClr val="003A20"/>
-          </a:solidFill>
-          <a:ln>
-            <a:noFill/>
-          </a:ln>
-        </p:spPr>
-        <p:style>
-          <a:lnRef idx="1">
-            <a:schemeClr val="accent1"/>
-          </a:lnRef>
-          <a:fillRef idx="3">
-            <a:schemeClr val="accent1"/>
-          </a:fillRef>
-          <a:effectRef idx="2">
-            <a:schemeClr val="accent1"/>
-          </a:effectRef>
-          <a:fontRef idx="minor">
-            <a:schemeClr val="lt1"/>
-          </a:fontRef>
-        </p:style>
-        <p:txBody>
-          <a:bodyPr rtlCol="0" anchor="ctr"/>
-          <a:lstStyle/>
-          <a:p>
-            <a:pPr algn="ctr"/>
-          </a:p>
-        </p:txBody>
-      </p:sp>
-      <p:sp>
-        <p:nvSpPr>
-          <p:cNvPr id="26" name="TextBox 25"/>
-          <p:cNvSpPr txBox="1"/>
-          <p:nvPr/>
-        </p:nvSpPr>
-        <p:spPr>
-          <a:xfrm>
-            <a:off x="548640" y="6126480"/>
-            <a:ext cx="11155680" cy="502920"/>
-          </a:xfrm>
-          <a:prstGeom prst="rect">
-            <a:avLst/>
-          </a:prstGeom>
-          <a:noFill/>
-        </p:spPr>
-        <p:txBody>
-          <a:bodyPr wrap="square">
-            <a:spAutoFit/>
-          </a:bodyPr>
-          <a:lstStyle/>
-          <a:p>
-            <a:pPr algn="ctr"/>
-            <a:r>
-              <a:rPr sz="1400" b="1" i="0">
-                <a:solidFill>
-                  <a:srgbClr val="00D47E"/>
-                </a:solidFill>
-              </a:rPr>
-              <a:t>$15 in AI cost  ·  28 minutes end-to-end  ·  3,929 photos  ·  2,983 segments scored  ·  ~600 duplicates caught</a:t>
+              <a:t>Protect €42M+ in infrastructure.  Secure the 50-year network lifespan.  Act today.</a:t>
             </a:r>
           </a:p>
         </p:txBody>
@@ -9622,116 +9381,97 @@
         </p:nvSpPr>
         <p:spPr>
           <a:xfrm>
-            <a:off x="640080" y="548640"/>
-            <a:ext cx="10515600" cy="822960"/>
-          </a:xfrm>
-          <a:prstGeom prst="rect">
-            <a:avLst/>
-          </a:prstGeom>
-          <a:noFill/>
-        </p:spPr>
-        <p:txBody>
-          <a:bodyPr wrap="square">
-            <a:spAutoFit/>
-          </a:bodyPr>
-          <a:lstStyle/>
-          <a:p>
-            <a:pPr algn="ctr"/>
-            <a:r>
-              <a:rPr sz="2800" b="1" i="0">
+            <a:off x="457200" y="1645920"/>
+            <a:ext cx="11247120" cy="1645920"/>
+          </a:xfrm>
+          <a:prstGeom prst="rect">
+            <a:avLst/>
+          </a:prstGeom>
+          <a:noFill/>
+        </p:spPr>
+        <p:txBody>
+          <a:bodyPr wrap="square">
+            <a:spAutoFit/>
+          </a:bodyPr>
+          <a:lstStyle/>
+          <a:p>
+            <a:pPr algn="ctr"/>
+            <a:r>
+              <a:rPr sz="8000" b="1" i="0">
                 <a:solidFill>
                   <a:srgbClr val="FFFFFF"/>
                 </a:solidFill>
               </a:rPr>
-              <a:t>Every Unreviewed Meter Is a Liability.
-We Close That Gap — Automatically.</a:t>
-            </a:r>
-          </a:p>
-        </p:txBody>
-      </p:sp>
-      <p:sp>
-        <p:nvSpPr>
-          <p:cNvPr id="5" name="Rectangle 4"/>
-          <p:cNvSpPr/>
-          <p:nvPr/>
-        </p:nvSpPr>
-        <p:spPr>
-          <a:xfrm>
-            <a:off x="868680" y="1600200"/>
-            <a:ext cx="3291840" cy="3840480"/>
-          </a:xfrm>
-          <a:prstGeom prst="rect">
-            <a:avLst/>
-          </a:prstGeom>
-          <a:solidFill>
-            <a:srgbClr val="122636"/>
-          </a:solidFill>
-          <a:ln>
-            <a:noFill/>
-          </a:ln>
-        </p:spPr>
-        <p:style>
-          <a:lnRef idx="1">
-            <a:schemeClr val="accent1"/>
-          </a:lnRef>
-          <a:fillRef idx="3">
-            <a:schemeClr val="accent1"/>
-          </a:fillRef>
-          <a:effectRef idx="2">
-            <a:schemeClr val="accent1"/>
-          </a:effectRef>
-          <a:fontRef idx="minor">
-            <a:schemeClr val="lt1"/>
-          </a:fontRef>
-        </p:style>
-        <p:txBody>
-          <a:bodyPr rtlCol="0" anchor="ctr"/>
-          <a:lstStyle/>
-          <a:p>
-            <a:pPr algn="ctr"/>
-          </a:p>
-        </p:txBody>
-      </p:sp>
-      <p:sp>
-        <p:nvSpPr>
-          <p:cNvPr id="6" name="Rectangle 5"/>
-          <p:cNvSpPr/>
-          <p:nvPr/>
-        </p:nvSpPr>
-        <p:spPr>
-          <a:xfrm>
-            <a:off x="868680" y="1600200"/>
-            <a:ext cx="3291840" cy="137160"/>
-          </a:xfrm>
-          <a:prstGeom prst="rect">
-            <a:avLst/>
-          </a:prstGeom>
-          <a:solidFill>
-            <a:srgbClr val="00A8E8"/>
-          </a:solidFill>
-          <a:ln>
-            <a:noFill/>
-          </a:ln>
-        </p:spPr>
-        <p:style>
-          <a:lnRef idx="1">
-            <a:schemeClr val="accent1"/>
-          </a:lnRef>
-          <a:fillRef idx="3">
-            <a:schemeClr val="accent1"/>
-          </a:fillRef>
-          <a:effectRef idx="2">
-            <a:schemeClr val="accent1"/>
-          </a:effectRef>
-          <a:fontRef idx="minor">
-            <a:schemeClr val="lt1"/>
-          </a:fontRef>
-        </p:style>
-        <p:txBody>
-          <a:bodyPr rtlCol="0" anchor="ctr"/>
-          <a:lstStyle/>
-          <a:p>
-            <a:pPr algn="ctr"/>
+              <a:t>Thank You</a:t>
+            </a:r>
+          </a:p>
+        </p:txBody>
+      </p:sp>
+      <p:sp>
+        <p:nvSpPr>
+          <p:cNvPr id="5" name="TextBox 4"/>
+          <p:cNvSpPr txBox="1"/>
+          <p:nvPr/>
+        </p:nvSpPr>
+        <p:spPr>
+          <a:xfrm>
+            <a:off x="457200" y="3383280"/>
+            <a:ext cx="11247120" cy="640080"/>
+          </a:xfrm>
+          <a:prstGeom prst="rect">
+            <a:avLst/>
+          </a:prstGeom>
+          <a:noFill/>
+        </p:spPr>
+        <p:txBody>
+          <a:bodyPr wrap="square">
+            <a:spAutoFit/>
+          </a:bodyPr>
+          <a:lstStyle/>
+          <a:p>
+            <a:pPr algn="ctr"/>
+            <a:r>
+              <a:rPr sz="3000" b="0" i="0">
+                <a:solidFill>
+                  <a:srgbClr val="00A8E8"/>
+                </a:solidFill>
+              </a:rPr>
+              <a:t>Questions welcome</a:t>
+            </a:r>
+          </a:p>
+        </p:txBody>
+      </p:sp>
+      <p:sp>
+        <p:nvSpPr>
+          <p:cNvPr id="6" name="TextBox 5"/>
+          <p:cNvSpPr txBox="1"/>
+          <p:nvPr/>
+        </p:nvSpPr>
+        <p:spPr>
+          <a:xfrm>
+            <a:off x="457200" y="4206240"/>
+            <a:ext cx="11247120" cy="502920"/>
+          </a:xfrm>
+          <a:prstGeom prst="rect">
+            <a:avLst/>
+          </a:prstGeom>
+          <a:noFill/>
+        </p:spPr>
+        <p:txBody>
+          <a:bodyPr wrap="square">
+            <a:spAutoFit/>
+          </a:bodyPr>
+          <a:lstStyle/>
+          <a:p>
+            <a:pPr algn="ctr"/>
+            <a:r>
+              <a:rPr sz="1600" b="0" i="0">
+                <a:solidFill>
+                  <a:srgbClr val="CCD6E0"/>
+                </a:solidFill>
+              </a:rPr>
+              <a:t>TrenchVerify — From Site Photo to Compliance Audit — Automatically</a:t>
+            </a:r>
           </a:p>
         </p:txBody>
       </p:sp>
@@ -9743,28 +9483,28 @@
         </p:nvSpPr>
         <p:spPr>
           <a:xfrm>
-            <a:off x="868680" y="1828800"/>
-            <a:ext cx="3291840" cy="594360"/>
-          </a:xfrm>
-          <a:prstGeom prst="rect">
-            <a:avLst/>
-          </a:prstGeom>
-          <a:noFill/>
-        </p:spPr>
-        <p:txBody>
-          <a:bodyPr wrap="square">
-            <a:spAutoFit/>
-          </a:bodyPr>
-          <a:lstStyle/>
-          <a:p>
-            <a:pPr algn="ctr"/>
-            <a:r>
-              <a:rPr sz="3000" b="1" i="0">
-                <a:solidFill>
-                  <a:srgbClr val="00A8E8"/>
-                </a:solidFill>
-              </a:rPr>
-              <a:t>01</a:t>
+            <a:off x="457200" y="4754880"/>
+            <a:ext cx="11247120" cy="457200"/>
+          </a:xfrm>
+          <a:prstGeom prst="rect">
+            <a:avLst/>
+          </a:prstGeom>
+          <a:noFill/>
+        </p:spPr>
+        <p:txBody>
+          <a:bodyPr wrap="square">
+            <a:spAutoFit/>
+          </a:bodyPr>
+          <a:lstStyle/>
+          <a:p>
+            <a:pPr algn="ctr"/>
+            <a:r>
+              <a:rPr sz="1500" b="0" i="0">
+                <a:solidFill>
+                  <a:srgbClr val="CCD6E0"/>
+                </a:solidFill>
+              </a:rPr>
+              <a:t>Team: [Name 1]  ·  [Name 2]  ·  [Name 3]</a:t>
             </a:r>
           </a:p>
         </p:txBody>
@@ -9777,478 +9517,28 @@
         </p:nvSpPr>
         <p:spPr>
           <a:xfrm>
-            <a:off x="868680" y="2468880"/>
-            <a:ext cx="3291840" cy="594360"/>
-          </a:xfrm>
-          <a:prstGeom prst="rect">
-            <a:avLst/>
-          </a:prstGeom>
-          <a:noFill/>
-        </p:spPr>
-        <p:txBody>
-          <a:bodyPr wrap="square">
-            <a:spAutoFit/>
-          </a:bodyPr>
-          <a:lstStyle/>
-          <a:p>
-            <a:pPr algn="ctr"/>
-            <a:r>
-              <a:rPr sz="2000" b="1" i="0">
-                <a:solidFill>
-                  <a:srgbClr val="FFFFFF"/>
-                </a:solidFill>
-              </a:rPr>
-              <a:t>Approve Pilot</a:t>
-            </a:r>
-          </a:p>
-        </p:txBody>
-      </p:sp>
-      <p:sp>
-        <p:nvSpPr>
-          <p:cNvPr id="9" name="TextBox 8"/>
-          <p:cNvSpPr txBox="1"/>
-          <p:nvPr/>
-        </p:nvSpPr>
-        <p:spPr>
-          <a:xfrm>
-            <a:off x="1051560" y="3200400"/>
-            <a:ext cx="2926080" cy="2011680"/>
-          </a:xfrm>
-          <a:prstGeom prst="rect">
-            <a:avLst/>
-          </a:prstGeom>
-          <a:noFill/>
-        </p:spPr>
-        <p:txBody>
-          <a:bodyPr wrap="square">
-            <a:spAutoFit/>
-          </a:bodyPr>
-          <a:lstStyle/>
-          <a:p>
-            <a:pPr algn="ctr"/>
-            <a:r>
-              <a:rPr sz="1600" b="0" i="0">
-                <a:solidFill>
-                  <a:srgbClr val="CCD6E0"/>
-                </a:solidFill>
-              </a:rPr>
-              <a:t>Authorise the TrenchVerify AI pilot
-for the current Klosterneuburg
-route build</a:t>
-            </a:r>
-          </a:p>
-        </p:txBody>
-      </p:sp>
-      <p:sp>
-        <p:nvSpPr>
-          <p:cNvPr id="10" name="Rectangle 9"/>
-          <p:cNvSpPr/>
-          <p:nvPr/>
-        </p:nvSpPr>
-        <p:spPr>
-          <a:xfrm>
-            <a:off x="4617720" y="1600200"/>
-            <a:ext cx="3291840" cy="3840480"/>
-          </a:xfrm>
-          <a:prstGeom prst="rect">
-            <a:avLst/>
-          </a:prstGeom>
-          <a:solidFill>
-            <a:srgbClr val="122636"/>
-          </a:solidFill>
-          <a:ln>
-            <a:noFill/>
-          </a:ln>
-        </p:spPr>
-        <p:style>
-          <a:lnRef idx="1">
-            <a:schemeClr val="accent1"/>
-          </a:lnRef>
-          <a:fillRef idx="3">
-            <a:schemeClr val="accent1"/>
-          </a:fillRef>
-          <a:effectRef idx="2">
-            <a:schemeClr val="accent1"/>
-          </a:effectRef>
-          <a:fontRef idx="minor">
-            <a:schemeClr val="lt1"/>
-          </a:fontRef>
-        </p:style>
-        <p:txBody>
-          <a:bodyPr rtlCol="0" anchor="ctr"/>
-          <a:lstStyle/>
-          <a:p>
-            <a:pPr algn="ctr"/>
-          </a:p>
-        </p:txBody>
-      </p:sp>
-      <p:sp>
-        <p:nvSpPr>
-          <p:cNvPr id="11" name="Rectangle 10"/>
-          <p:cNvSpPr/>
-          <p:nvPr/>
-        </p:nvSpPr>
-        <p:spPr>
-          <a:xfrm>
-            <a:off x="4617720" y="1600200"/>
-            <a:ext cx="3291840" cy="137160"/>
-          </a:xfrm>
-          <a:prstGeom prst="rect">
-            <a:avLst/>
-          </a:prstGeom>
-          <a:solidFill>
-            <a:srgbClr val="FFC107"/>
-          </a:solidFill>
-          <a:ln>
-            <a:noFill/>
-          </a:ln>
-        </p:spPr>
-        <p:style>
-          <a:lnRef idx="1">
-            <a:schemeClr val="accent1"/>
-          </a:lnRef>
-          <a:fillRef idx="3">
-            <a:schemeClr val="accent1"/>
-          </a:fillRef>
-          <a:effectRef idx="2">
-            <a:schemeClr val="accent1"/>
-          </a:effectRef>
-          <a:fontRef idx="minor">
-            <a:schemeClr val="lt1"/>
-          </a:fontRef>
-        </p:style>
-        <p:txBody>
-          <a:bodyPr rtlCol="0" anchor="ctr"/>
-          <a:lstStyle/>
-          <a:p>
-            <a:pPr algn="ctr"/>
-          </a:p>
-        </p:txBody>
-      </p:sp>
-      <p:sp>
-        <p:nvSpPr>
-          <p:cNvPr id="12" name="TextBox 11"/>
-          <p:cNvSpPr txBox="1"/>
-          <p:nvPr/>
-        </p:nvSpPr>
-        <p:spPr>
-          <a:xfrm>
-            <a:off x="4617720" y="1828800"/>
-            <a:ext cx="3291840" cy="594360"/>
-          </a:xfrm>
-          <a:prstGeom prst="rect">
-            <a:avLst/>
-          </a:prstGeom>
-          <a:noFill/>
-        </p:spPr>
-        <p:txBody>
-          <a:bodyPr wrap="square">
-            <a:spAutoFit/>
-          </a:bodyPr>
-          <a:lstStyle/>
-          <a:p>
-            <a:pPr algn="ctr"/>
-            <a:r>
-              <a:rPr sz="3000" b="1" i="0">
-                <a:solidFill>
-                  <a:srgbClr val="FFC107"/>
-                </a:solidFill>
-              </a:rPr>
-              <a:t>02</a:t>
-            </a:r>
-          </a:p>
-        </p:txBody>
-      </p:sp>
-      <p:sp>
-        <p:nvSpPr>
-          <p:cNvPr id="13" name="TextBox 12"/>
-          <p:cNvSpPr txBox="1"/>
-          <p:nvPr/>
-        </p:nvSpPr>
-        <p:spPr>
-          <a:xfrm>
-            <a:off x="4617720" y="2468880"/>
-            <a:ext cx="3291840" cy="594360"/>
-          </a:xfrm>
-          <a:prstGeom prst="rect">
-            <a:avLst/>
-          </a:prstGeom>
-          <a:noFill/>
-        </p:spPr>
-        <p:txBody>
-          <a:bodyPr wrap="square">
-            <a:spAutoFit/>
-          </a:bodyPr>
-          <a:lstStyle/>
-          <a:p>
-            <a:pPr algn="ctr"/>
-            <a:r>
-              <a:rPr sz="2000" b="1" i="0">
-                <a:solidFill>
-                  <a:srgbClr val="FFFFFF"/>
-                </a:solidFill>
-              </a:rPr>
-              <a:t>Define KPIs</a:t>
-            </a:r>
-          </a:p>
-        </p:txBody>
-      </p:sp>
-      <p:sp>
-        <p:nvSpPr>
-          <p:cNvPr id="14" name="TextBox 13"/>
-          <p:cNvSpPr txBox="1"/>
-          <p:nvPr/>
-        </p:nvSpPr>
-        <p:spPr>
-          <a:xfrm>
-            <a:off x="4800600" y="3200400"/>
-            <a:ext cx="2926080" cy="2011680"/>
-          </a:xfrm>
-          <a:prstGeom prst="rect">
-            <a:avLst/>
-          </a:prstGeom>
-          <a:noFill/>
-        </p:spPr>
-        <p:txBody>
-          <a:bodyPr wrap="square">
-            <a:spAutoFit/>
-          </a:bodyPr>
-          <a:lstStyle/>
-          <a:p>
-            <a:pPr algn="ctr"/>
-            <a:r>
-              <a:rPr sz="1600" b="0" i="0">
-                <a:solidFill>
-                  <a:srgbClr val="CCD6E0"/>
-                </a:solidFill>
-              </a:rPr>
-              <a:t>Set acceptance thresholds:
-coverage %, photo compliance rate,
-time-to-report</a:t>
-            </a:r>
-          </a:p>
-        </p:txBody>
-      </p:sp>
-      <p:sp>
-        <p:nvSpPr>
-          <p:cNvPr id="15" name="Rectangle 14"/>
-          <p:cNvSpPr/>
-          <p:nvPr/>
-        </p:nvSpPr>
-        <p:spPr>
-          <a:xfrm>
-            <a:off x="8366760" y="1600200"/>
-            <a:ext cx="3291840" cy="3840480"/>
-          </a:xfrm>
-          <a:prstGeom prst="rect">
-            <a:avLst/>
-          </a:prstGeom>
-          <a:solidFill>
-            <a:srgbClr val="122636"/>
-          </a:solidFill>
-          <a:ln>
-            <a:noFill/>
-          </a:ln>
-        </p:spPr>
-        <p:style>
-          <a:lnRef idx="1">
-            <a:schemeClr val="accent1"/>
-          </a:lnRef>
-          <a:fillRef idx="3">
-            <a:schemeClr val="accent1"/>
-          </a:fillRef>
-          <a:effectRef idx="2">
-            <a:schemeClr val="accent1"/>
-          </a:effectRef>
-          <a:fontRef idx="minor">
-            <a:schemeClr val="lt1"/>
-          </a:fontRef>
-        </p:style>
-        <p:txBody>
-          <a:bodyPr rtlCol="0" anchor="ctr"/>
-          <a:lstStyle/>
-          <a:p>
-            <a:pPr algn="ctr"/>
-          </a:p>
-        </p:txBody>
-      </p:sp>
-      <p:sp>
-        <p:nvSpPr>
-          <p:cNvPr id="16" name="Rectangle 15"/>
-          <p:cNvSpPr/>
-          <p:nvPr/>
-        </p:nvSpPr>
-        <p:spPr>
-          <a:xfrm>
-            <a:off x="8366760" y="1600200"/>
-            <a:ext cx="3291840" cy="137160"/>
-          </a:xfrm>
-          <a:prstGeom prst="rect">
-            <a:avLst/>
-          </a:prstGeom>
-          <a:solidFill>
-            <a:srgbClr val="00D47E"/>
-          </a:solidFill>
-          <a:ln>
-            <a:noFill/>
-          </a:ln>
-        </p:spPr>
-        <p:style>
-          <a:lnRef idx="1">
-            <a:schemeClr val="accent1"/>
-          </a:lnRef>
-          <a:fillRef idx="3">
-            <a:schemeClr val="accent1"/>
-          </a:fillRef>
-          <a:effectRef idx="2">
-            <a:schemeClr val="accent1"/>
-          </a:effectRef>
-          <a:fontRef idx="minor">
-            <a:schemeClr val="lt1"/>
-          </a:fontRef>
-        </p:style>
-        <p:txBody>
-          <a:bodyPr rtlCol="0" anchor="ctr"/>
-          <a:lstStyle/>
-          <a:p>
-            <a:pPr algn="ctr"/>
-          </a:p>
-        </p:txBody>
-      </p:sp>
-      <p:sp>
-        <p:nvSpPr>
-          <p:cNvPr id="17" name="TextBox 16"/>
-          <p:cNvSpPr txBox="1"/>
-          <p:nvPr/>
-        </p:nvSpPr>
-        <p:spPr>
-          <a:xfrm>
-            <a:off x="8366760" y="1828800"/>
-            <a:ext cx="3291840" cy="594360"/>
-          </a:xfrm>
-          <a:prstGeom prst="rect">
-            <a:avLst/>
-          </a:prstGeom>
-          <a:noFill/>
-        </p:spPr>
-        <p:txBody>
-          <a:bodyPr wrap="square">
-            <a:spAutoFit/>
-          </a:bodyPr>
-          <a:lstStyle/>
-          <a:p>
-            <a:pPr algn="ctr"/>
-            <a:r>
-              <a:rPr sz="3000" b="1" i="0">
-                <a:solidFill>
-                  <a:srgbClr val="00D47E"/>
-                </a:solidFill>
-              </a:rPr>
-              <a:t>03</a:t>
-            </a:r>
-          </a:p>
-        </p:txBody>
-      </p:sp>
-      <p:sp>
-        <p:nvSpPr>
-          <p:cNvPr id="18" name="TextBox 17"/>
-          <p:cNvSpPr txBox="1"/>
-          <p:nvPr/>
-        </p:nvSpPr>
-        <p:spPr>
-          <a:xfrm>
-            <a:off x="8366760" y="2468880"/>
-            <a:ext cx="3291840" cy="594360"/>
-          </a:xfrm>
-          <a:prstGeom prst="rect">
-            <a:avLst/>
-          </a:prstGeom>
-          <a:noFill/>
-        </p:spPr>
-        <p:txBody>
-          <a:bodyPr wrap="square">
-            <a:spAutoFit/>
-          </a:bodyPr>
-          <a:lstStyle/>
-          <a:p>
-            <a:pPr algn="ctr"/>
-            <a:r>
-              <a:rPr sz="2000" b="1" i="0">
-                <a:solidFill>
-                  <a:srgbClr val="FFFFFF"/>
-                </a:solidFill>
-              </a:rPr>
-              <a:t>Scale</a:t>
-            </a:r>
-          </a:p>
-        </p:txBody>
-      </p:sp>
-      <p:sp>
-        <p:nvSpPr>
-          <p:cNvPr id="19" name="TextBox 18"/>
-          <p:cNvSpPr txBox="1"/>
-          <p:nvPr/>
-        </p:nvSpPr>
-        <p:spPr>
-          <a:xfrm>
-            <a:off x="8549640" y="3200400"/>
-            <a:ext cx="2926080" cy="2011680"/>
-          </a:xfrm>
-          <a:prstGeom prst="rect">
-            <a:avLst/>
-          </a:prstGeom>
-          <a:noFill/>
-        </p:spPr>
-        <p:txBody>
-          <a:bodyPr wrap="square">
-            <a:spAutoFit/>
-          </a:bodyPr>
-          <a:lstStyle/>
-          <a:p>
-            <a:pPr algn="ctr"/>
-            <a:r>
-              <a:rPr sz="1600" b="0" i="0">
-                <a:solidFill>
-                  <a:srgbClr val="CCD6E0"/>
-                </a:solidFill>
-              </a:rPr>
-              <a:t>Roll out across all future APG
-construction phases — protect
-the full network</a:t>
-            </a:r>
-          </a:p>
-        </p:txBody>
-      </p:sp>
-      <p:sp>
-        <p:nvSpPr>
-          <p:cNvPr id="20" name="TextBox 19"/>
-          <p:cNvSpPr txBox="1"/>
-          <p:nvPr/>
-        </p:nvSpPr>
-        <p:spPr>
-          <a:xfrm>
-            <a:off x="457200" y="5623560"/>
-            <a:ext cx="11247120" cy="594360"/>
-          </a:xfrm>
-          <a:prstGeom prst="rect">
-            <a:avLst/>
-          </a:prstGeom>
-          <a:noFill/>
-        </p:spPr>
-        <p:txBody>
-          <a:bodyPr wrap="square">
-            <a:spAutoFit/>
-          </a:bodyPr>
-          <a:lstStyle/>
-          <a:p>
-            <a:pPr algn="ctr"/>
-            <a:r>
-              <a:rPr sz="1700" b="1" i="0">
-                <a:solidFill>
-                  <a:srgbClr val="00D47E"/>
-                </a:solidFill>
-              </a:rPr>
-              <a:t>Protect €42M+ in infrastructure.  Secure the 50-year network lifespan.  Act today.</a:t>
+            <a:off x="457200" y="5989320"/>
+            <a:ext cx="11247120" cy="365760"/>
+          </a:xfrm>
+          <a:prstGeom prst="rect">
+            <a:avLst/>
+          </a:prstGeom>
+          <a:noFill/>
+        </p:spPr>
+        <p:txBody>
+          <a:bodyPr wrap="square">
+            <a:spAutoFit/>
+          </a:bodyPr>
+          <a:lstStyle/>
+          <a:p>
+            <a:pPr algn="ctr"/>
+            <a:r>
+              <a:rPr sz="1100" b="0" i="1">
+                <a:solidFill>
+                  <a:srgbClr val="445566"/>
+                </a:solidFill>
+              </a:rPr>
+              <a:t>Built at Vienna UP 2026  ·  All pilot data from APG partner dataset</a:t>
             </a:r>
           </a:p>
         </p:txBody>

--- a/APG_TrenchVerify_Pitch.pptx
+++ b/APG_TrenchVerify_Pitch.pptx
@@ -5,17 +5,16 @@
     <p:sldMasterId id="2147483648" r:id="rId1"/>
   </p:sldMasterIdLst>
   <p:sldIdLst>
-    <p:sldId id="256" r:id="rId7"/>
-    <p:sldId id="257" r:id="rId8"/>
-    <p:sldId id="258" r:id="rId9"/>
-    <p:sldId id="259" r:id="rId10"/>
-    <p:sldId id="260" r:id="rId11"/>
-    <p:sldId id="261" r:id="rId12"/>
-    <p:sldId id="262" r:id="rId13"/>
-    <p:sldId id="263" r:id="rId14"/>
-    <p:sldId id="264" r:id="rId15"/>
+    <p:sldId id="256" r:id="rId2"/>
+    <p:sldId id="257" r:id="rId3"/>
+    <p:sldId id="258" r:id="rId4"/>
+    <p:sldId id="259" r:id="rId5"/>
+    <p:sldId id="260" r:id="rId6"/>
+    <p:sldId id="261" r:id="rId7"/>
+    <p:sldId id="263" r:id="rId8"/>
+    <p:sldId id="264" r:id="rId9"/>
   </p:sldIdLst>
-  <p:sldSz cx="12188952" cy="6858000" type="screen4x3"/>
+  <p:sldSz cx="12188825" cy="6858000"/>
   <p:notesSz cx="6858000" cy="9144000"/>
   <p:defaultTextStyle>
     <a:defPPr>
@@ -112,6 +111,22 @@
       </a:defRPr>
     </a:lvl9pPr>
   </p:defaultTextStyle>
+  <p:extLst>
+    <p:ext uri="{EFAFB233-063F-42B5-8137-9DF3F51BA10A}">
+      <p15:sldGuideLst xmlns:p15="http://schemas.microsoft.com/office/powerpoint/2012/main">
+        <p15:guide id="1" orient="horz" pos="2160">
+          <p15:clr>
+            <a:srgbClr val="A4A3A4"/>
+          </p15:clr>
+        </p15:guide>
+        <p15:guide id="2" pos="2880">
+          <p15:clr>
+            <a:srgbClr val="A4A3A4"/>
+          </p15:clr>
+        </p15:guide>
+      </p15:sldGuideLst>
+    </p:ext>
+  </p:extLst>
 </p:presentation>
 </file>
 
@@ -296,7 +311,7 @@
           <a:p>
             <a:fld id="{5BCAD085-E8A6-8845-BD4E-CB4CCA059FC4}" type="datetimeFigureOut">
               <a:rPr lang="en-US" smtClean="0"/>
-              <a:t>1/27/13</a:t>
+              <a:t>5/16/2026</a:t>
             </a:fld>
             <a:endParaRPr lang="en-US"/>
           </a:p>
@@ -466,7 +481,7 @@
           <a:p>
             <a:fld id="{5BCAD085-E8A6-8845-BD4E-CB4CCA059FC4}" type="datetimeFigureOut">
               <a:rPr lang="en-US" smtClean="0"/>
-              <a:t>1/27/13</a:t>
+              <a:t>5/16/2026</a:t>
             </a:fld>
             <a:endParaRPr lang="en-US"/>
           </a:p>
@@ -646,7 +661,7 @@
           <a:p>
             <a:fld id="{5BCAD085-E8A6-8845-BD4E-CB4CCA059FC4}" type="datetimeFigureOut">
               <a:rPr lang="en-US" smtClean="0"/>
-              <a:t>1/27/13</a:t>
+              <a:t>5/16/2026</a:t>
             </a:fld>
             <a:endParaRPr lang="en-US"/>
           </a:p>
@@ -816,7 +831,7 @@
           <a:p>
             <a:fld id="{5BCAD085-E8A6-8845-BD4E-CB4CCA059FC4}" type="datetimeFigureOut">
               <a:rPr lang="en-US" smtClean="0"/>
-              <a:t>1/27/13</a:t>
+              <a:t>5/16/2026</a:t>
             </a:fld>
             <a:endParaRPr lang="en-US"/>
           </a:p>
@@ -1062,7 +1077,7 @@
           <a:p>
             <a:fld id="{5BCAD085-E8A6-8845-BD4E-CB4CCA059FC4}" type="datetimeFigureOut">
               <a:rPr lang="en-US" smtClean="0"/>
-              <a:t>1/27/13</a:t>
+              <a:t>5/16/2026</a:t>
             </a:fld>
             <a:endParaRPr lang="en-US"/>
           </a:p>
@@ -1350,7 +1365,7 @@
           <a:p>
             <a:fld id="{5BCAD085-E8A6-8845-BD4E-CB4CCA059FC4}" type="datetimeFigureOut">
               <a:rPr lang="en-US" smtClean="0"/>
-              <a:t>1/27/13</a:t>
+              <a:t>5/16/2026</a:t>
             </a:fld>
             <a:endParaRPr lang="en-US"/>
           </a:p>
@@ -1772,7 +1787,7 @@
           <a:p>
             <a:fld id="{5BCAD085-E8A6-8845-BD4E-CB4CCA059FC4}" type="datetimeFigureOut">
               <a:rPr lang="en-US" smtClean="0"/>
-              <a:t>1/27/13</a:t>
+              <a:t>5/16/2026</a:t>
             </a:fld>
             <a:endParaRPr lang="en-US"/>
           </a:p>
@@ -1890,7 +1905,7 @@
           <a:p>
             <a:fld id="{5BCAD085-E8A6-8845-BD4E-CB4CCA059FC4}" type="datetimeFigureOut">
               <a:rPr lang="en-US" smtClean="0"/>
-              <a:t>1/27/13</a:t>
+              <a:t>5/16/2026</a:t>
             </a:fld>
             <a:endParaRPr lang="en-US"/>
           </a:p>
@@ -1985,7 +2000,7 @@
           <a:p>
             <a:fld id="{5BCAD085-E8A6-8845-BD4E-CB4CCA059FC4}" type="datetimeFigureOut">
               <a:rPr lang="en-US" smtClean="0"/>
-              <a:t>1/27/13</a:t>
+              <a:t>5/16/2026</a:t>
             </a:fld>
             <a:endParaRPr lang="en-US"/>
           </a:p>
@@ -2262,7 +2277,7 @@
           <a:p>
             <a:fld id="{5BCAD085-E8A6-8845-BD4E-CB4CCA059FC4}" type="datetimeFigureOut">
               <a:rPr lang="en-US" smtClean="0"/>
-              <a:t>1/27/13</a:t>
+              <a:t>5/16/2026</a:t>
             </a:fld>
             <a:endParaRPr lang="en-US"/>
           </a:p>
@@ -2515,7 +2530,7 @@
           <a:p>
             <a:fld id="{5BCAD085-E8A6-8845-BD4E-CB4CCA059FC4}" type="datetimeFigureOut">
               <a:rPr lang="en-US" smtClean="0"/>
-              <a:t>1/27/13</a:t>
+              <a:t>5/16/2026</a:t>
             </a:fld>
             <a:endParaRPr lang="en-US"/>
           </a:p>
@@ -2728,7 +2743,7 @@
           <a:p>
             <a:fld id="{5BCAD085-E8A6-8845-BD4E-CB4CCA059FC4}" type="datetimeFigureOut">
               <a:rPr lang="en-US" smtClean="0"/>
-              <a:t>1/27/13</a:t>
+              <a:t>5/16/2026</a:t>
             </a:fld>
             <a:endParaRPr lang="en-US"/>
           </a:p>
@@ -3087,7 +3102,7 @@
 </file>
 
 <file path=ppt/slides/slide1.xml><?xml version="1.0" encoding="utf-8"?>
-<p:sld xmlns:a="http://schemas.openxmlformats.org/drawingml/2006/main" xmlns:p="http://schemas.openxmlformats.org/presentationml/2006/main" xmlns:r="http://schemas.openxmlformats.org/officeDocument/2006/relationships">
+<p:sld xmlns:a="http://schemas.openxmlformats.org/drawingml/2006/main" xmlns:r="http://schemas.openxmlformats.org/officeDocument/2006/relationships" xmlns:p="http://schemas.openxmlformats.org/presentationml/2006/main">
   <p:cSld>
     <p:bg>
       <p:bgPr>
@@ -3103,7 +3118,14 @@
         <p:cNvGrpSpPr/>
         <p:nvPr/>
       </p:nvGrpSpPr>
-      <p:grpSpPr/>
+      <p:grpSpPr>
+        <a:xfrm>
+          <a:off x="0" y="0"/>
+          <a:ext cx="0" cy="0"/>
+          <a:chOff x="0" y="0"/>
+          <a:chExt cx="0" cy="0"/>
+        </a:xfrm>
+      </p:grpSpPr>
       <p:sp>
         <p:nvSpPr>
           <p:cNvPr id="2" name="Rectangle 1"/>
@@ -3144,6 +3166,7 @@
           <a:lstStyle/>
           <a:p>
             <a:pPr algn="ctr"/>
+            <a:endParaRPr/>
           </a:p>
         </p:txBody>
       </p:sp>
@@ -3187,6 +3210,7 @@
           <a:lstStyle/>
           <a:p>
             <a:pPr algn="ctr"/>
+            <a:endParaRPr/>
           </a:p>
         </p:txBody>
       </p:sp>
@@ -3267,7 +3291,7 @@
         <p:spPr>
           <a:xfrm>
             <a:off x="640080" y="3566160"/>
-            <a:ext cx="10515600" cy="457200"/>
+            <a:ext cx="10515600" cy="307777"/>
           </a:xfrm>
           <a:prstGeom prst="rect">
             <a:avLst/>
@@ -3282,13 +3306,26 @@
           <a:p>
             <a:pPr algn="l"/>
             <a:r>
-              <a:rPr sz="1400" b="0" i="0">
+              <a:rPr sz="1400" b="0" i="0" dirty="0">
                 <a:solidFill>
                   <a:srgbClr val="CCD6E0"/>
                 </a:solidFill>
               </a:rPr>
-              <a:t>AI-powered photo review  ·  Full audit trail  ·  GDPR-compliant  ·  Zero data retained</a:t>
-            </a:r>
+              <a:t>AI-powered photo review  ·  Full audit trail  ·  </a:t>
+            </a:r>
+            <a:r>
+              <a:rPr sz="1400" b="0" i="0" dirty="0" smtClean="0">
+                <a:solidFill>
+                  <a:srgbClr val="CCD6E0"/>
+                </a:solidFill>
+              </a:rPr>
+              <a:t>GDPR-compliant</a:t>
+            </a:r>
+            <a:endParaRPr sz="1400" b="0" i="0" dirty="0">
+              <a:solidFill>
+                <a:srgbClr val="CCD6E0"/>
+              </a:solidFill>
+            </a:endParaRPr>
           </a:p>
         </p:txBody>
       </p:sp>
@@ -3301,7 +3338,7 @@
         <p:spPr>
           <a:xfrm>
             <a:off x="640080" y="5852160"/>
-            <a:ext cx="7315200" cy="457200"/>
+            <a:ext cx="7315200" cy="292388"/>
           </a:xfrm>
           <a:prstGeom prst="rect">
             <a:avLst/>
@@ -3314,15 +3351,155 @@
           </a:bodyPr>
           <a:lstStyle/>
           <a:p>
-            <a:pPr algn="l"/>
-            <a:r>
-              <a:rPr sz="1300" b="0" i="0">
+            <a:r>
+              <a:rPr sz="1300" b="0" i="0" dirty="0">
                 <a:solidFill>
                   <a:srgbClr val="CCD6E0"/>
                 </a:solidFill>
               </a:rPr>
-              <a:t>Team: [Name 1]  ·  [Name 2]  ·  [Name 3]</a:t>
-            </a:r>
+              <a:t>Team: </a:t>
+            </a:r>
+            <a:r>
+              <a:rPr lang="en-US" sz="1300" dirty="0">
+                <a:solidFill>
+                  <a:srgbClr val="CCD6E0"/>
+                </a:solidFill>
+              </a:rPr>
+              <a:t>42 </a:t>
+            </a:r>
+            <a:r>
+              <a:rPr lang="en-US" sz="1300" dirty="0" err="1">
+                <a:solidFill>
+                  <a:srgbClr val="CCD6E0"/>
+                </a:solidFill>
+              </a:rPr>
+              <a:t>Claudettes</a:t>
+            </a:r>
+            <a:r>
+              <a:rPr lang="en-US" sz="1300" dirty="0">
+                <a:solidFill>
+                  <a:srgbClr val="CCD6E0"/>
+                </a:solidFill>
+              </a:rPr>
+              <a:t> </a:t>
+            </a:r>
+            <a:r>
+              <a:rPr lang="en-US" sz="1300" dirty="0" smtClean="0">
+                <a:solidFill>
+                  <a:srgbClr val="CCD6E0"/>
+                </a:solidFill>
+              </a:rPr>
+              <a:t>: </a:t>
+            </a:r>
+            <a:r>
+              <a:rPr sz="1300" b="0" i="0" dirty="0" smtClean="0">
+                <a:solidFill>
+                  <a:srgbClr val="CCD6E0"/>
+                </a:solidFill>
+              </a:rPr>
+              <a:t>[</a:t>
+            </a:r>
+            <a:r>
+              <a:rPr lang="en-US" sz="1300" b="0" i="0" dirty="0" smtClean="0">
+                <a:solidFill>
+                  <a:srgbClr val="CCD6E0"/>
+                </a:solidFill>
+              </a:rPr>
+              <a:t>Ahmad</a:t>
+            </a:r>
+            <a:r>
+              <a:rPr sz="1300" b="0" i="0" dirty="0" smtClean="0">
+                <a:solidFill>
+                  <a:srgbClr val="CCD6E0"/>
+                </a:solidFill>
+              </a:rPr>
+              <a:t>]  </a:t>
+            </a:r>
+            <a:r>
+              <a:rPr sz="1300" b="0" i="0" dirty="0">
+                <a:solidFill>
+                  <a:srgbClr val="CCD6E0"/>
+                </a:solidFill>
+              </a:rPr>
+              <a:t>·  </a:t>
+            </a:r>
+            <a:r>
+              <a:rPr sz="1300" b="0" i="0" dirty="0" smtClean="0">
+                <a:solidFill>
+                  <a:srgbClr val="CCD6E0"/>
+                </a:solidFill>
+              </a:rPr>
+              <a:t>[</a:t>
+            </a:r>
+            <a:r>
+              <a:rPr lang="en-US" sz="1300" b="0" i="0" dirty="0" err="1" smtClean="0">
+                <a:solidFill>
+                  <a:srgbClr val="CCD6E0"/>
+                </a:solidFill>
+              </a:rPr>
+              <a:t>Tino</a:t>
+            </a:r>
+            <a:r>
+              <a:rPr sz="1300" b="0" i="0" dirty="0" smtClean="0">
+                <a:solidFill>
+                  <a:srgbClr val="CCD6E0"/>
+                </a:solidFill>
+              </a:rPr>
+              <a:t>]  </a:t>
+            </a:r>
+            <a:r>
+              <a:rPr sz="1300" b="0" i="0" dirty="0">
+                <a:solidFill>
+                  <a:srgbClr val="CCD6E0"/>
+                </a:solidFill>
+              </a:rPr>
+              <a:t>·  </a:t>
+            </a:r>
+            <a:r>
+              <a:rPr sz="1300" b="0" i="0" dirty="0" smtClean="0">
+                <a:solidFill>
+                  <a:srgbClr val="CCD6E0"/>
+                </a:solidFill>
+              </a:rPr>
+              <a:t>[</a:t>
+            </a:r>
+            <a:r>
+              <a:rPr lang="en-US" sz="1300" dirty="0">
+                <a:solidFill>
+                  <a:srgbClr val="CCD6E0"/>
+                </a:solidFill>
+              </a:rPr>
+              <a:t>Evgenii]  ·  </a:t>
+            </a:r>
+            <a:r>
+              <a:rPr lang="en-US" sz="1300" dirty="0" smtClean="0">
+                <a:solidFill>
+                  <a:srgbClr val="CCD6E0"/>
+                </a:solidFill>
+              </a:rPr>
+              <a:t>[</a:t>
+            </a:r>
+            <a:r>
+              <a:rPr lang="en-US" sz="1300" dirty="0" err="1" smtClean="0">
+                <a:solidFill>
+                  <a:srgbClr val="CCD6E0"/>
+                </a:solidFill>
+              </a:rPr>
+              <a:t>Himani</a:t>
+            </a:r>
+            <a:r>
+              <a:rPr lang="en-US" sz="1300" dirty="0" smtClean="0">
+                <a:solidFill>
+                  <a:srgbClr val="CCD6E0"/>
+                </a:solidFill>
+              </a:rPr>
+              <a:t>]</a:t>
+            </a:r>
+            <a:endParaRPr lang="en-US" sz="1300" dirty="0">
+              <a:solidFill>
+                <a:srgbClr val="CCD6E0"/>
+              </a:solidFill>
+            </a:endParaRPr>
           </a:p>
         </p:txBody>
       </p:sp>
@@ -3369,7 +3546,7 @@
 </file>
 
 <file path=ppt/slides/slide2.xml><?xml version="1.0" encoding="utf-8"?>
-<p:sld xmlns:a="http://schemas.openxmlformats.org/drawingml/2006/main" xmlns:p="http://schemas.openxmlformats.org/presentationml/2006/main" xmlns:r="http://schemas.openxmlformats.org/officeDocument/2006/relationships">
+<p:sld xmlns:a="http://schemas.openxmlformats.org/drawingml/2006/main" xmlns:r="http://schemas.openxmlformats.org/officeDocument/2006/relationships" xmlns:p="http://schemas.openxmlformats.org/presentationml/2006/main">
   <p:cSld>
     <p:bg>
       <p:bgPr>
@@ -3385,7 +3562,14 @@
         <p:cNvGrpSpPr/>
         <p:nvPr/>
       </p:nvGrpSpPr>
-      <p:grpSpPr/>
+      <p:grpSpPr>
+        <a:xfrm>
+          <a:off x="0" y="0"/>
+          <a:ext cx="0" cy="0"/>
+          <a:chOff x="0" y="0"/>
+          <a:chExt cx="0" cy="0"/>
+        </a:xfrm>
+      </p:grpSpPr>
       <p:sp>
         <p:nvSpPr>
           <p:cNvPr id="2" name="Rectangle 1"/>
@@ -3426,6 +3610,7 @@
           <a:lstStyle/>
           <a:p>
             <a:pPr algn="ctr"/>
+            <a:endParaRPr/>
           </a:p>
         </p:txBody>
       </p:sp>
@@ -3537,6 +3722,7 @@
           <a:lstStyle/>
           <a:p>
             <a:pPr algn="ctr"/>
+            <a:endParaRPr/>
           </a:p>
         </p:txBody>
       </p:sp>
@@ -3650,6 +3836,7 @@
           <a:lstStyle/>
           <a:p>
             <a:pPr algn="ctr"/>
+            <a:endParaRPr/>
           </a:p>
         </p:txBody>
       </p:sp>
@@ -3763,6 +3950,7 @@
           <a:lstStyle/>
           <a:p>
             <a:pPr algn="ctr"/>
+            <a:endParaRPr/>
           </a:p>
         </p:txBody>
       </p:sp>
@@ -3810,7 +3998,7 @@
         <p:spPr>
           <a:xfrm>
             <a:off x="8321040" y="2423160"/>
-            <a:ext cx="3200400" cy="3657600"/>
+            <a:ext cx="3200400" cy="3170099"/>
           </a:xfrm>
           <a:prstGeom prst="rect">
             <a:avLst/>
@@ -3825,14 +4013,249 @@
           <a:p>
             <a:pPr algn="l"/>
             <a:r>
-              <a:rPr sz="2000" b="0" i="0">
+              <a:rPr lang="en-US" sz="2000" dirty="0">
                 <a:solidFill>
                   <a:srgbClr val="CCD6E0"/>
                 </a:solidFill>
               </a:rPr>
-              <a:t>3–5 days per section × 9 sections × 100× backlog = thousands of person-days of review.
-Result: Review gets skipped. Problems surface years later via excavator damage.</a:t>
-            </a:r>
+              <a:t>1</a:t>
+            </a:r>
+            <a:r>
+              <a:rPr sz="2000" b="0" i="0" dirty="0" smtClean="0">
+                <a:solidFill>
+                  <a:srgbClr val="CCD6E0"/>
+                </a:solidFill>
+              </a:rPr>
+              <a:t>–</a:t>
+            </a:r>
+            <a:r>
+              <a:rPr lang="en-US" sz="2000" b="0" i="0" dirty="0" smtClean="0">
+                <a:solidFill>
+                  <a:srgbClr val="CCD6E0"/>
+                </a:solidFill>
+              </a:rPr>
+              <a:t>2</a:t>
+            </a:r>
+            <a:r>
+              <a:rPr sz="2000" b="0" i="0" dirty="0" smtClean="0">
+                <a:solidFill>
+                  <a:srgbClr val="CCD6E0"/>
+                </a:solidFill>
+              </a:rPr>
+              <a:t> </a:t>
+            </a:r>
+            <a:r>
+              <a:rPr lang="en-US" sz="2000" b="0" i="0" dirty="0" smtClean="0">
+                <a:solidFill>
+                  <a:srgbClr val="CCD6E0"/>
+                </a:solidFill>
+              </a:rPr>
+              <a:t>minutes</a:t>
+            </a:r>
+            <a:r>
+              <a:rPr sz="2000" b="0" i="0" dirty="0" smtClean="0">
+                <a:solidFill>
+                  <a:srgbClr val="CCD6E0"/>
+                </a:solidFill>
+              </a:rPr>
+              <a:t> </a:t>
+            </a:r>
+            <a:r>
+              <a:rPr sz="2000" b="0" i="0" dirty="0">
+                <a:solidFill>
+                  <a:srgbClr val="CCD6E0"/>
+                </a:solidFill>
+              </a:rPr>
+              <a:t>per </a:t>
+            </a:r>
+            <a:r>
+              <a:rPr lang="en-US" sz="2000" b="0" i="0" dirty="0" smtClean="0">
+                <a:solidFill>
+                  <a:srgbClr val="CCD6E0"/>
+                </a:solidFill>
+              </a:rPr>
+              <a:t>image</a:t>
+            </a:r>
+            <a:br>
+              <a:rPr lang="en-US" sz="2000" b="0" i="0" dirty="0" smtClean="0">
+                <a:solidFill>
+                  <a:srgbClr val="CCD6E0"/>
+                </a:solidFill>
+              </a:rPr>
+            </a:br>
+            <a:r>
+              <a:rPr sz="2000" b="0" i="0" dirty="0" smtClean="0">
+                <a:solidFill>
+                  <a:srgbClr val="CCD6E0"/>
+                </a:solidFill>
+              </a:rPr>
+              <a:t>× </a:t>
+            </a:r>
+            <a:r>
+              <a:rPr lang="en-US" sz="2000" dirty="0">
+                <a:solidFill>
+                  <a:srgbClr val="CCD6E0"/>
+                </a:solidFill>
+              </a:rPr>
+              <a:t>6</a:t>
+            </a:r>
+            <a:r>
+              <a:rPr lang="en-US" sz="2000" b="0" i="0" dirty="0" smtClean="0">
+                <a:solidFill>
+                  <a:srgbClr val="CCD6E0"/>
+                </a:solidFill>
+              </a:rPr>
+              <a:t>0</a:t>
+            </a:r>
+            <a:r>
+              <a:rPr sz="2000" b="0" i="0" dirty="0" smtClean="0">
+                <a:solidFill>
+                  <a:srgbClr val="CCD6E0"/>
+                </a:solidFill>
+              </a:rPr>
+              <a:t> </a:t>
+            </a:r>
+            <a:r>
+              <a:rPr lang="en-US" sz="2000" b="0" i="0" dirty="0" smtClean="0">
+                <a:solidFill>
+                  <a:srgbClr val="CCD6E0"/>
+                </a:solidFill>
+              </a:rPr>
+              <a:t>images per section</a:t>
+            </a:r>
+            <a:br>
+              <a:rPr lang="en-US" sz="2000" b="0" i="0" dirty="0" smtClean="0">
+                <a:solidFill>
+                  <a:srgbClr val="CCD6E0"/>
+                </a:solidFill>
+              </a:rPr>
+            </a:br>
+            <a:r>
+              <a:rPr sz="2000" b="0" i="0" dirty="0" smtClean="0">
+                <a:solidFill>
+                  <a:srgbClr val="CCD6E0"/>
+                </a:solidFill>
+              </a:rPr>
+              <a:t>× 10</a:t>
+            </a:r>
+            <a:r>
+              <a:rPr lang="en-US" sz="2000" b="0" i="0" dirty="0" smtClean="0">
+                <a:solidFill>
+                  <a:srgbClr val="CCD6E0"/>
+                </a:solidFill>
+              </a:rPr>
+              <a:t> sections per project</a:t>
+            </a:r>
+            <a:r>
+              <a:rPr sz="2000" b="0" i="0" dirty="0" smtClean="0">
+                <a:solidFill>
+                  <a:srgbClr val="CCD6E0"/>
+                </a:solidFill>
+              </a:rPr>
+              <a:t> </a:t>
+            </a:r>
+            <a:r>
+              <a:rPr sz="2000" b="0" i="0" dirty="0">
+                <a:solidFill>
+                  <a:srgbClr val="CCD6E0"/>
+                </a:solidFill>
+              </a:rPr>
+              <a:t>= thousands of person-days of </a:t>
+            </a:r>
+            <a:r>
+              <a:rPr sz="2000" b="0" i="0" dirty="0" smtClean="0">
+                <a:solidFill>
+                  <a:srgbClr val="CCD6E0"/>
+                </a:solidFill>
+              </a:rPr>
+              <a:t>revie</a:t>
+            </a:r>
+            <a:r>
+              <a:rPr lang="en-US" sz="2000" b="0" i="0" dirty="0" smtClean="0">
+                <a:solidFill>
+                  <a:srgbClr val="CCD6E0"/>
+                </a:solidFill>
+              </a:rPr>
+              <a:t>w</a:t>
+            </a:r>
+            <a:r>
+              <a:rPr sz="2000" b="0" i="0" dirty="0">
+                <a:solidFill>
+                  <a:srgbClr val="CCD6E0"/>
+                </a:solidFill>
+              </a:rPr>
+              <a:t>
+Result: </a:t>
+            </a:r>
+            <a:r>
+              <a:rPr lang="en-US" sz="2000" dirty="0" smtClean="0">
+                <a:solidFill>
+                  <a:srgbClr val="CCD6E0"/>
+                </a:solidFill>
+              </a:rPr>
+              <a:t>“expensive” or low-quality r</a:t>
+            </a:r>
+            <a:r>
+              <a:rPr sz="2000" b="0" i="0" dirty="0" smtClean="0">
+                <a:solidFill>
+                  <a:srgbClr val="CCD6E0"/>
+                </a:solidFill>
+              </a:rPr>
+              <a:t>eview</a:t>
+            </a:r>
+            <a:r>
+              <a:rPr lang="en-US" sz="2000" b="0" i="0" dirty="0" smtClean="0">
+                <a:solidFill>
+                  <a:srgbClr val="CCD6E0"/>
+                </a:solidFill>
+              </a:rPr>
+              <a:t> (p</a:t>
+            </a:r>
+            <a:r>
+              <a:rPr sz="2000" b="0" i="0" dirty="0" smtClean="0">
+                <a:solidFill>
+                  <a:srgbClr val="CCD6E0"/>
+                </a:solidFill>
+              </a:rPr>
+              <a:t>roblems </a:t>
+            </a:r>
+            <a:r>
+              <a:rPr sz="2000" b="0" i="0" dirty="0">
+                <a:solidFill>
+                  <a:srgbClr val="CCD6E0"/>
+                </a:solidFill>
+              </a:rPr>
+              <a:t>surface years later via excavator </a:t>
+            </a:r>
+            <a:r>
+              <a:rPr sz="2000" b="0" i="0" dirty="0" smtClean="0">
+                <a:solidFill>
+                  <a:srgbClr val="CCD6E0"/>
+                </a:solidFill>
+              </a:rPr>
+              <a:t>damage</a:t>
+            </a:r>
+            <a:r>
+              <a:rPr lang="en-US" sz="2000" b="0" i="0" dirty="0" smtClean="0">
+                <a:solidFill>
+                  <a:srgbClr val="CCD6E0"/>
+                </a:solidFill>
+              </a:rPr>
+              <a:t>)</a:t>
+            </a:r>
+            <a:r>
+              <a:rPr sz="2000" b="0" i="0" dirty="0" smtClean="0">
+                <a:solidFill>
+                  <a:srgbClr val="CCD6E0"/>
+                </a:solidFill>
+              </a:rPr>
+              <a:t>.</a:t>
+            </a:r>
+            <a:endParaRPr sz="2000" b="0" i="0" dirty="0">
+              <a:solidFill>
+                <a:srgbClr val="CCD6E0"/>
+              </a:solidFill>
+            </a:endParaRPr>
           </a:p>
         </p:txBody>
       </p:sp>
@@ -3845,7 +4268,7 @@
 </file>
 
 <file path=ppt/slides/slide3.xml><?xml version="1.0" encoding="utf-8"?>
-<p:sld xmlns:a="http://schemas.openxmlformats.org/drawingml/2006/main" xmlns:p="http://schemas.openxmlformats.org/presentationml/2006/main" xmlns:r="http://schemas.openxmlformats.org/officeDocument/2006/relationships">
+<p:sld xmlns:a="http://schemas.openxmlformats.org/drawingml/2006/main" xmlns:r="http://schemas.openxmlformats.org/officeDocument/2006/relationships" xmlns:p="http://schemas.openxmlformats.org/presentationml/2006/main">
   <p:cSld>
     <p:bg>
       <p:bgPr>
@@ -3861,7 +4284,14 @@
         <p:cNvGrpSpPr/>
         <p:nvPr/>
       </p:nvGrpSpPr>
-      <p:grpSpPr/>
+      <p:grpSpPr>
+        <a:xfrm>
+          <a:off x="0" y="0"/>
+          <a:ext cx="0" cy="0"/>
+          <a:chOff x="0" y="0"/>
+          <a:chExt cx="0" cy="0"/>
+        </a:xfrm>
+      </p:grpSpPr>
       <p:sp>
         <p:nvSpPr>
           <p:cNvPr id="2" name="Rectangle 1"/>
@@ -3902,6 +4332,7 @@
           <a:lstStyle/>
           <a:p>
             <a:pPr algn="ctr"/>
+            <a:endParaRPr/>
           </a:p>
         </p:txBody>
       </p:sp>
@@ -4013,6 +4444,7 @@
           <a:lstStyle/>
           <a:p>
             <a:pPr algn="ctr"/>
+            <a:endParaRPr/>
           </a:p>
         </p:txBody>
       </p:sp>
@@ -4125,6 +4557,7 @@
           <a:lstStyle/>
           <a:p>
             <a:pPr algn="ctr"/>
+            <a:endParaRPr/>
           </a:p>
         </p:txBody>
       </p:sp>
@@ -4237,6 +4670,7 @@
           <a:lstStyle/>
           <a:p>
             <a:pPr algn="ctr"/>
+            <a:endParaRPr/>
           </a:p>
         </p:txBody>
       </p:sp>
@@ -4349,6 +4783,7 @@
           <a:lstStyle/>
           <a:p>
             <a:pPr algn="ctr"/>
+            <a:endParaRPr/>
           </a:p>
         </p:txBody>
       </p:sp>
@@ -4499,7 +4934,7 @@
 </file>
 
 <file path=ppt/slides/slide4.xml><?xml version="1.0" encoding="utf-8"?>
-<p:sld xmlns:a="http://schemas.openxmlformats.org/drawingml/2006/main" xmlns:p="http://schemas.openxmlformats.org/presentationml/2006/main" xmlns:r="http://schemas.openxmlformats.org/officeDocument/2006/relationships">
+<p:sld xmlns:a="http://schemas.openxmlformats.org/drawingml/2006/main" xmlns:r="http://schemas.openxmlformats.org/officeDocument/2006/relationships" xmlns:p="http://schemas.openxmlformats.org/presentationml/2006/main">
   <p:cSld>
     <p:bg>
       <p:bgPr>
@@ -4515,7 +4950,14 @@
         <p:cNvGrpSpPr/>
         <p:nvPr/>
       </p:nvGrpSpPr>
-      <p:grpSpPr/>
+      <p:grpSpPr>
+        <a:xfrm>
+          <a:off x="0" y="0"/>
+          <a:ext cx="0" cy="0"/>
+          <a:chOff x="0" y="0"/>
+          <a:chExt cx="0" cy="0"/>
+        </a:xfrm>
+      </p:grpSpPr>
       <p:sp>
         <p:nvSpPr>
           <p:cNvPr id="2" name="Rectangle 1"/>
@@ -4556,6 +4998,7 @@
           <a:lstStyle/>
           <a:p>
             <a:pPr algn="ctr"/>
+            <a:endParaRPr/>
           </a:p>
         </p:txBody>
       </p:sp>
@@ -4667,6 +5110,7 @@
           <a:lstStyle/>
           <a:p>
             <a:pPr algn="ctr"/>
+            <a:endParaRPr/>
           </a:p>
         </p:txBody>
       </p:sp>
@@ -4710,6 +5154,7 @@
           <a:lstStyle/>
           <a:p>
             <a:pPr algn="ctr"/>
+            <a:endParaRPr/>
           </a:p>
         </p:txBody>
       </p:sp>
@@ -4823,6 +5268,7 @@
           <a:lstStyle/>
           <a:p>
             <a:pPr algn="ctr"/>
+            <a:endParaRPr/>
           </a:p>
         </p:txBody>
       </p:sp>
@@ -4866,6 +5312,7 @@
           <a:lstStyle/>
           <a:p>
             <a:pPr algn="ctr"/>
+            <a:endParaRPr/>
           </a:p>
         </p:txBody>
       </p:sp>
@@ -4979,6 +5426,7 @@
           <a:lstStyle/>
           <a:p>
             <a:pPr algn="ctr"/>
+            <a:endParaRPr/>
           </a:p>
         </p:txBody>
       </p:sp>
@@ -5022,6 +5470,7 @@
           <a:lstStyle/>
           <a:p>
             <a:pPr algn="ctr"/>
+            <a:endParaRPr/>
           </a:p>
         </p:txBody>
       </p:sp>
@@ -5135,6 +5584,7 @@
           <a:lstStyle/>
           <a:p>
             <a:pPr algn="ctr"/>
+            <a:endParaRPr/>
           </a:p>
         </p:txBody>
       </p:sp>
@@ -5178,6 +5628,7 @@
           <a:lstStyle/>
           <a:p>
             <a:pPr algn="ctr"/>
+            <a:endParaRPr/>
           </a:p>
         </p:txBody>
       </p:sp>
@@ -5240,7 +5691,7 @@
           <a:p>
             <a:pPr algn="ctr"/>
             <a:r>
-              <a:rPr sz="2000" b="0" i="0">
+              <a:rPr sz="2000" b="0" i="0" dirty="0">
                 <a:solidFill>
                   <a:srgbClr val="CCD6E0"/>
                 </a:solidFill>
@@ -5260,7 +5711,7 @@
 </file>
 
 <file path=ppt/slides/slide5.xml><?xml version="1.0" encoding="utf-8"?>
-<p:sld xmlns:a="http://schemas.openxmlformats.org/drawingml/2006/main" xmlns:p="http://schemas.openxmlformats.org/presentationml/2006/main" xmlns:r="http://schemas.openxmlformats.org/officeDocument/2006/relationships">
+<p:sld xmlns:a="http://schemas.openxmlformats.org/drawingml/2006/main" xmlns:r="http://schemas.openxmlformats.org/officeDocument/2006/relationships" xmlns:p="http://schemas.openxmlformats.org/presentationml/2006/main">
   <p:cSld>
     <p:bg>
       <p:bgPr>
@@ -5276,7 +5727,14 @@
         <p:cNvGrpSpPr/>
         <p:nvPr/>
       </p:nvGrpSpPr>
-      <p:grpSpPr/>
+      <p:grpSpPr>
+        <a:xfrm>
+          <a:off x="0" y="0"/>
+          <a:ext cx="0" cy="0"/>
+          <a:chOff x="0" y="0"/>
+          <a:chExt cx="0" cy="0"/>
+        </a:xfrm>
+      </p:grpSpPr>
       <p:sp>
         <p:nvSpPr>
           <p:cNvPr id="2" name="Rectangle 1"/>
@@ -5317,6 +5775,7 @@
           <a:lstStyle/>
           <a:p>
             <a:pPr algn="ctr"/>
+            <a:endParaRPr/>
           </a:p>
         </p:txBody>
       </p:sp>
@@ -5428,6 +5887,7 @@
           <a:lstStyle/>
           <a:p>
             <a:pPr algn="ctr"/>
+            <a:endParaRPr/>
           </a:p>
         </p:txBody>
       </p:sp>
@@ -5471,6 +5931,7 @@
           <a:lstStyle/>
           <a:p>
             <a:pPr algn="ctr"/>
+            <a:endParaRPr/>
           </a:p>
         </p:txBody>
       </p:sp>
@@ -5652,6 +6113,7 @@
           <a:lstStyle/>
           <a:p>
             <a:pPr algn="ctr"/>
+            <a:endParaRPr/>
           </a:p>
         </p:txBody>
       </p:sp>
@@ -5695,6 +6157,7 @@
           <a:lstStyle/>
           <a:p>
             <a:pPr algn="ctr"/>
+            <a:endParaRPr/>
           </a:p>
         </p:txBody>
       </p:sp>
@@ -5876,6 +6339,7 @@
           <a:lstStyle/>
           <a:p>
             <a:pPr algn="ctr"/>
+            <a:endParaRPr/>
           </a:p>
         </p:txBody>
       </p:sp>
@@ -5919,6 +6383,7 @@
           <a:lstStyle/>
           <a:p>
             <a:pPr algn="ctr"/>
+            <a:endParaRPr/>
           </a:p>
         </p:txBody>
       </p:sp>
@@ -6100,6 +6565,7 @@
           <a:lstStyle/>
           <a:p>
             <a:pPr algn="ctr"/>
+            <a:endParaRPr/>
           </a:p>
         </p:txBody>
       </p:sp>
@@ -6143,6 +6609,7 @@
           <a:lstStyle/>
           <a:p>
             <a:pPr algn="ctr"/>
+            <a:endParaRPr/>
           </a:p>
         </p:txBody>
       </p:sp>
@@ -6324,6 +6791,7 @@
           <a:lstStyle/>
           <a:p>
             <a:pPr algn="ctr"/>
+            <a:endParaRPr/>
           </a:p>
         </p:txBody>
       </p:sp>
@@ -6367,6 +6835,7 @@
           <a:lstStyle/>
           <a:p>
             <a:pPr algn="ctr"/>
+            <a:endParaRPr/>
           </a:p>
         </p:txBody>
       </p:sp>
@@ -6548,6 +7017,7 @@
           <a:lstStyle/>
           <a:p>
             <a:pPr algn="ctr"/>
+            <a:endParaRPr/>
           </a:p>
         </p:txBody>
       </p:sp>
@@ -6591,6 +7061,7 @@
           <a:lstStyle/>
           <a:p>
             <a:pPr algn="ctr"/>
+            <a:endParaRPr/>
           </a:p>
         </p:txBody>
       </p:sp>
@@ -6772,6 +7243,7 @@
           <a:lstStyle/>
           <a:p>
             <a:pPr algn="ctr"/>
+            <a:endParaRPr/>
           </a:p>
         </p:txBody>
       </p:sp>
@@ -6818,7 +7290,7 @@
 </file>
 
 <file path=ppt/slides/slide6.xml><?xml version="1.0" encoding="utf-8"?>
-<p:sld xmlns:a="http://schemas.openxmlformats.org/drawingml/2006/main" xmlns:p="http://schemas.openxmlformats.org/presentationml/2006/main" xmlns:r="http://schemas.openxmlformats.org/officeDocument/2006/relationships">
+<p:sld xmlns:a="http://schemas.openxmlformats.org/drawingml/2006/main" xmlns:r="http://schemas.openxmlformats.org/officeDocument/2006/relationships" xmlns:p="http://schemas.openxmlformats.org/presentationml/2006/main">
   <p:cSld>
     <p:bg>
       <p:bgPr>
@@ -6834,7 +7306,14 @@
         <p:cNvGrpSpPr/>
         <p:nvPr/>
       </p:nvGrpSpPr>
-      <p:grpSpPr/>
+      <p:grpSpPr>
+        <a:xfrm>
+          <a:off x="0" y="0"/>
+          <a:ext cx="0" cy="0"/>
+          <a:chOff x="0" y="0"/>
+          <a:chExt cx="0" cy="0"/>
+        </a:xfrm>
+      </p:grpSpPr>
       <p:sp>
         <p:nvSpPr>
           <p:cNvPr id="2" name="Rectangle 1"/>
@@ -6875,6 +7354,7 @@
           <a:lstStyle/>
           <a:p>
             <a:pPr algn="ctr"/>
+            <a:endParaRPr/>
           </a:p>
         </p:txBody>
       </p:sp>
@@ -6986,6 +7466,7 @@
           <a:lstStyle/>
           <a:p>
             <a:pPr algn="ctr"/>
+            <a:endParaRPr/>
           </a:p>
         </p:txBody>
       </p:sp>
@@ -7029,6 +7510,7 @@
           <a:lstStyle/>
           <a:p>
             <a:pPr algn="ctr"/>
+            <a:endParaRPr/>
           </a:p>
         </p:txBody>
       </p:sp>
@@ -7075,8 +7557,8 @@
         </p:nvSpPr>
         <p:spPr>
           <a:xfrm>
-            <a:off x="548640" y="2240280"/>
-            <a:ext cx="4937760" cy="1280160"/>
+            <a:off x="548640" y="2140131"/>
+            <a:ext cx="4937760" cy="1200329"/>
           </a:xfrm>
           <a:prstGeom prst="rect">
             <a:avLst/>
@@ -7091,12 +7573,12 @@
           <a:p>
             <a:pPr algn="l"/>
             <a:r>
-              <a:rPr sz="1800" b="0" i="0">
+              <a:rPr sz="1800" b="0" i="0" dirty="0">
                 <a:solidFill>
                   <a:srgbClr val="CCD6E0"/>
                 </a:solidFill>
               </a:rPr>
-              <a:t>Faces and license plates detected in every photo before any reviewer sees them. Flagged images are withheld from the display grid and routed to a "needs retake" list. No personal data is ever shown, stored, or transmitted to our infrastructure.</a:t>
+              <a:t>Faces and license plates detected in every photo before any reviewer sees them. Flagged images are withheld from the display grid and routed to a "needs retake" list. </a:t>
             </a:r>
           </a:p>
         </p:txBody>
@@ -7141,6 +7623,7 @@
           <a:lstStyle/>
           <a:p>
             <a:pPr algn="ctr"/>
+            <a:endParaRPr/>
           </a:p>
         </p:txBody>
       </p:sp>
@@ -7184,6 +7667,7 @@
           <a:lstStyle/>
           <a:p>
             <a:pPr algn="ctr"/>
+            <a:endParaRPr/>
           </a:p>
         </p:txBody>
       </p:sp>
@@ -7230,7 +7714,7 @@
         </p:nvSpPr>
         <p:spPr>
           <a:xfrm>
-            <a:off x="6492240" y="2240280"/>
+            <a:off x="6492240" y="2140131"/>
             <a:ext cx="4937760" cy="1280160"/>
           </a:xfrm>
           <a:prstGeom prst="rect">
@@ -7246,7 +7730,7 @@
           <a:p>
             <a:pPr algn="l"/>
             <a:r>
-              <a:rPr sz="1800" b="0" i="0">
+              <a:rPr sz="1800" b="0" i="0" dirty="0">
                 <a:solidFill>
                   <a:srgbClr val="CCD6E0"/>
                 </a:solidFill>
@@ -7296,6 +7780,7 @@
           <a:lstStyle/>
           <a:p>
             <a:pPr algn="ctr"/>
+            <a:endParaRPr/>
           </a:p>
         </p:txBody>
       </p:sp>
@@ -7339,6 +7824,7 @@
           <a:lstStyle/>
           <a:p>
             <a:pPr algn="ctr"/>
+            <a:endParaRPr/>
           </a:p>
         </p:txBody>
       </p:sp>
@@ -7451,6 +7937,7 @@
           <a:lstStyle/>
           <a:p>
             <a:pPr algn="ctr"/>
+            <a:endParaRPr/>
           </a:p>
         </p:txBody>
       </p:sp>
@@ -7494,6 +7981,7 @@
           <a:lstStyle/>
           <a:p>
             <a:pPr algn="ctr"/>
+            <a:endParaRPr/>
           </a:p>
         </p:txBody>
       </p:sp>
@@ -7575,7 +8063,7 @@
 </file>
 
 <file path=ppt/slides/slide7.xml><?xml version="1.0" encoding="utf-8"?>
-<p:sld xmlns:a="http://schemas.openxmlformats.org/drawingml/2006/main" xmlns:p="http://schemas.openxmlformats.org/presentationml/2006/main" xmlns:r="http://schemas.openxmlformats.org/officeDocument/2006/relationships">
+<p:sld xmlns:a="http://schemas.openxmlformats.org/drawingml/2006/main" xmlns:r="http://schemas.openxmlformats.org/officeDocument/2006/relationships" xmlns:p="http://schemas.openxmlformats.org/presentationml/2006/main">
   <p:cSld>
     <p:bg>
       <p:bgPr>
@@ -7591,7 +8079,14 @@
         <p:cNvGrpSpPr/>
         <p:nvPr/>
       </p:nvGrpSpPr>
-      <p:grpSpPr/>
+      <p:grpSpPr>
+        <a:xfrm>
+          <a:off x="0" y="0"/>
+          <a:ext cx="0" cy="0"/>
+          <a:chOff x="0" y="0"/>
+          <a:chExt cx="0" cy="0"/>
+        </a:xfrm>
+      </p:grpSpPr>
       <p:sp>
         <p:nvSpPr>
           <p:cNvPr id="2" name="Rectangle 1"/>
@@ -7600,7 +8095,51 @@
         </p:nvSpPr>
         <p:spPr>
           <a:xfrm>
-            <a:off x="0" y="109728"/>
+            <a:off x="0" y="0"/>
+            <a:ext cx="12188952" cy="73152"/>
+          </a:xfrm>
+          <a:prstGeom prst="rect">
+            <a:avLst/>
+          </a:prstGeom>
+          <a:solidFill>
+            <a:srgbClr val="00A8E8"/>
+          </a:solidFill>
+          <a:ln>
+            <a:noFill/>
+          </a:ln>
+        </p:spPr>
+        <p:style>
+          <a:lnRef idx="1">
+            <a:schemeClr val="accent1"/>
+          </a:lnRef>
+          <a:fillRef idx="3">
+            <a:schemeClr val="accent1"/>
+          </a:fillRef>
+          <a:effectRef idx="2">
+            <a:schemeClr val="accent1"/>
+          </a:effectRef>
+          <a:fontRef idx="minor">
+            <a:schemeClr val="lt1"/>
+          </a:fontRef>
+        </p:style>
+        <p:txBody>
+          <a:bodyPr rtlCol="0" anchor="ctr"/>
+          <a:lstStyle/>
+          <a:p>
+            <a:pPr algn="ctr"/>
+            <a:endParaRPr/>
+          </a:p>
+        </p:txBody>
+      </p:sp>
+      <p:sp>
+        <p:nvSpPr>
+          <p:cNvPr id="3" name="Rectangle 2"/>
+          <p:cNvSpPr/>
+          <p:nvPr/>
+        </p:nvSpPr>
+        <p:spPr>
+          <a:xfrm>
+            <a:off x="0" y="6766560"/>
             <a:ext cx="12188952" cy="73152"/>
           </a:xfrm>
           <a:prstGeom prst="rect">
@@ -7632,19 +8171,20 @@
           <a:lstStyle/>
           <a:p>
             <a:pPr algn="ctr"/>
-          </a:p>
-        </p:txBody>
-      </p:sp>
-      <p:sp>
-        <p:nvSpPr>
-          <p:cNvPr id="3" name="TextBox 2"/>
+            <a:endParaRPr/>
+          </a:p>
+        </p:txBody>
+      </p:sp>
+      <p:sp>
+        <p:nvSpPr>
+          <p:cNvPr id="4" name="TextBox 3"/>
           <p:cNvSpPr txBox="1"/>
           <p:nvPr/>
         </p:nvSpPr>
         <p:spPr>
           <a:xfrm>
-            <a:off x="457200" y="228600"/>
-            <a:ext cx="10972800" cy="365760"/>
+            <a:off x="640080" y="548640"/>
+            <a:ext cx="10515600" cy="822960"/>
           </a:xfrm>
           <a:prstGeom prst="rect">
             <a:avLst/>
@@ -7657,48 +8197,15 @@
           </a:bodyPr>
           <a:lstStyle/>
           <a:p>
-            <a:pPr algn="l"/>
-            <a:r>
-              <a:rPr sz="900" b="1" i="0">
-                <a:solidFill>
-                  <a:srgbClr val="00A8E8"/>
-                </a:solidFill>
-              </a:rPr>
-              <a:t>BUSINESS VALUE</a:t>
-            </a:r>
-          </a:p>
-        </p:txBody>
-      </p:sp>
-      <p:sp>
-        <p:nvSpPr>
-          <p:cNvPr id="4" name="TextBox 3"/>
-          <p:cNvSpPr txBox="1"/>
-          <p:nvPr/>
-        </p:nvSpPr>
-        <p:spPr>
-          <a:xfrm>
-            <a:off x="457200" y="502920"/>
-            <a:ext cx="10972800" cy="640080"/>
-          </a:xfrm>
-          <a:prstGeom prst="rect">
-            <a:avLst/>
-          </a:prstGeom>
-          <a:noFill/>
-        </p:spPr>
-        <p:txBody>
-          <a:bodyPr wrap="square">
-            <a:spAutoFit/>
-          </a:bodyPr>
-          <a:lstStyle/>
-          <a:p>
-            <a:pPr algn="l"/>
-            <a:r>
-              <a:rPr sz="2900" b="1" i="0">
+            <a:pPr algn="ctr"/>
+            <a:r>
+              <a:rPr sz="2800" b="1" i="0">
                 <a:solidFill>
                   <a:srgbClr val="FFFFFF"/>
                 </a:solidFill>
               </a:rPr>
-              <a:t>The Numbers Speak for Themselves</a:t>
+              <a:t>Every Unreviewed Meter Is a Liability.
+We Close That Gap — Automatically.</a:t>
             </a:r>
           </a:p>
         </p:txBody>
@@ -7711,8 +8218,8 @@
         </p:nvSpPr>
         <p:spPr>
           <a:xfrm>
-            <a:off x="365760" y="1371600"/>
-            <a:ext cx="11430000" cy="859536"/>
+            <a:off x="868680" y="1600200"/>
+            <a:ext cx="3291840" cy="3840480"/>
           </a:xfrm>
           <a:prstGeom prst="rect">
             <a:avLst/>
@@ -7743,19 +8250,64 @@
           <a:lstStyle/>
           <a:p>
             <a:pPr algn="ctr"/>
-          </a:p>
-        </p:txBody>
-      </p:sp>
-      <p:sp>
-        <p:nvSpPr>
-          <p:cNvPr id="6" name="TextBox 5"/>
+            <a:endParaRPr/>
+          </a:p>
+        </p:txBody>
+      </p:sp>
+      <p:sp>
+        <p:nvSpPr>
+          <p:cNvPr id="6" name="Rectangle 5"/>
+          <p:cNvSpPr/>
+          <p:nvPr/>
+        </p:nvSpPr>
+        <p:spPr>
+          <a:xfrm>
+            <a:off x="868680" y="1600200"/>
+            <a:ext cx="3291840" cy="137160"/>
+          </a:xfrm>
+          <a:prstGeom prst="rect">
+            <a:avLst/>
+          </a:prstGeom>
+          <a:solidFill>
+            <a:srgbClr val="00A8E8"/>
+          </a:solidFill>
+          <a:ln>
+            <a:noFill/>
+          </a:ln>
+        </p:spPr>
+        <p:style>
+          <a:lnRef idx="1">
+            <a:schemeClr val="accent1"/>
+          </a:lnRef>
+          <a:fillRef idx="3">
+            <a:schemeClr val="accent1"/>
+          </a:fillRef>
+          <a:effectRef idx="2">
+            <a:schemeClr val="accent1"/>
+          </a:effectRef>
+          <a:fontRef idx="minor">
+            <a:schemeClr val="lt1"/>
+          </a:fontRef>
+        </p:style>
+        <p:txBody>
+          <a:bodyPr rtlCol="0" anchor="ctr"/>
+          <a:lstStyle/>
+          <a:p>
+            <a:pPr algn="ctr"/>
+            <a:endParaRPr/>
+          </a:p>
+        </p:txBody>
+      </p:sp>
+      <p:sp>
+        <p:nvSpPr>
+          <p:cNvPr id="7" name="TextBox 6"/>
           <p:cNvSpPr txBox="1"/>
           <p:nvPr/>
         </p:nvSpPr>
         <p:spPr>
           <a:xfrm>
-            <a:off x="548640" y="1463040"/>
-            <a:ext cx="1463040" cy="731520"/>
+            <a:off x="868680" y="1828800"/>
+            <a:ext cx="3291840" cy="594360"/>
           </a:xfrm>
           <a:prstGeom prst="rect">
             <a:avLst/>
@@ -7770,26 +8322,26 @@
           <a:p>
             <a:pPr algn="ctr"/>
             <a:r>
-              <a:rPr sz="3400" b="1" i="0">
-                <a:solidFill>
-                  <a:srgbClr val="00D47E"/>
-                </a:solidFill>
-              </a:rPr>
-              <a:t>€2.4M+</a:t>
-            </a:r>
-          </a:p>
-        </p:txBody>
-      </p:sp>
-      <p:sp>
-        <p:nvSpPr>
-          <p:cNvPr id="7" name="TextBox 6"/>
+              <a:rPr sz="3000" b="1" i="0">
+                <a:solidFill>
+                  <a:srgbClr val="00A8E8"/>
+                </a:solidFill>
+              </a:rPr>
+              <a:t>01</a:t>
+            </a:r>
+          </a:p>
+        </p:txBody>
+      </p:sp>
+      <p:sp>
+        <p:nvSpPr>
+          <p:cNvPr id="8" name="TextBox 7"/>
           <p:cNvSpPr txBox="1"/>
           <p:nvPr/>
         </p:nvSpPr>
         <p:spPr>
           <a:xfrm>
-            <a:off x="2194560" y="1417320"/>
-            <a:ext cx="3657600" cy="457200"/>
+            <a:off x="868680" y="2468880"/>
+            <a:ext cx="3291840" cy="594360"/>
           </a:xfrm>
           <a:prstGeom prst="rect">
             <a:avLst/>
@@ -7802,28 +8354,28 @@
           </a:bodyPr>
           <a:lstStyle/>
           <a:p>
-            <a:pPr algn="l"/>
-            <a:r>
-              <a:rPr sz="1600" b="1" i="0">
+            <a:pPr algn="ctr"/>
+            <a:r>
+              <a:rPr sz="2000" b="1" i="0">
                 <a:solidFill>
                   <a:srgbClr val="FFFFFF"/>
                 </a:solidFill>
               </a:rPr>
-              <a:t>5-year liability exposure eliminated</a:t>
-            </a:r>
-          </a:p>
-        </p:txBody>
-      </p:sp>
-      <p:sp>
-        <p:nvSpPr>
-          <p:cNvPr id="8" name="TextBox 7"/>
+              <a:t>Approve Pilot</a:t>
+            </a:r>
+          </a:p>
+        </p:txBody>
+      </p:sp>
+      <p:sp>
+        <p:nvSpPr>
+          <p:cNvPr id="9" name="TextBox 8"/>
           <p:cNvSpPr txBox="1"/>
           <p:nvPr/>
         </p:nvSpPr>
         <p:spPr>
           <a:xfrm>
-            <a:off x="2194560" y="1847088"/>
-            <a:ext cx="9144000" cy="384048"/>
+            <a:off x="1051560" y="3200400"/>
+            <a:ext cx="2926080" cy="2011680"/>
           </a:xfrm>
           <a:prstGeom prst="rect">
             <a:avLst/>
@@ -7836,29 +8388,30 @@
           </a:bodyPr>
           <a:lstStyle/>
           <a:p>
-            <a:pPr algn="l"/>
-            <a:r>
-              <a:rPr sz="1700" b="0" i="1">
+            <a:pPr algn="ctr"/>
+            <a:r>
+              <a:rPr sz="1600" b="0" i="0">
                 <a:solidFill>
                   <a:srgbClr val="CCD6E0"/>
                 </a:solidFill>
               </a:rPr>
-              <a:t>by catching every defect before contractor sign-off
-(€120K/incident × ~30% miss rate)</a:t>
-            </a:r>
-          </a:p>
-        </p:txBody>
-      </p:sp>
-      <p:sp>
-        <p:nvSpPr>
-          <p:cNvPr id="9" name="Rectangle 8"/>
+              <a:t>Authorise the TrenchVerify AI pilot
+for the current Klosterneuburg
+route build</a:t>
+            </a:r>
+          </a:p>
+        </p:txBody>
+      </p:sp>
+      <p:sp>
+        <p:nvSpPr>
+          <p:cNvPr id="10" name="Rectangle 9"/>
           <p:cNvSpPr/>
           <p:nvPr/>
         </p:nvSpPr>
         <p:spPr>
           <a:xfrm>
-            <a:off x="365760" y="2286000"/>
-            <a:ext cx="11430000" cy="859536"/>
+            <a:off x="4617720" y="1600200"/>
+            <a:ext cx="3291840" cy="3840480"/>
           </a:xfrm>
           <a:prstGeom prst="rect">
             <a:avLst/>
@@ -7889,19 +8442,64 @@
           <a:lstStyle/>
           <a:p>
             <a:pPr algn="ctr"/>
-          </a:p>
-        </p:txBody>
-      </p:sp>
-      <p:sp>
-        <p:nvSpPr>
-          <p:cNvPr id="10" name="TextBox 9"/>
+            <a:endParaRPr/>
+          </a:p>
+        </p:txBody>
+      </p:sp>
+      <p:sp>
+        <p:nvSpPr>
+          <p:cNvPr id="11" name="Rectangle 10"/>
+          <p:cNvSpPr/>
+          <p:nvPr/>
+        </p:nvSpPr>
+        <p:spPr>
+          <a:xfrm>
+            <a:off x="4617720" y="1600200"/>
+            <a:ext cx="3291840" cy="137160"/>
+          </a:xfrm>
+          <a:prstGeom prst="rect">
+            <a:avLst/>
+          </a:prstGeom>
+          <a:solidFill>
+            <a:srgbClr val="FFC107"/>
+          </a:solidFill>
+          <a:ln>
+            <a:noFill/>
+          </a:ln>
+        </p:spPr>
+        <p:style>
+          <a:lnRef idx="1">
+            <a:schemeClr val="accent1"/>
+          </a:lnRef>
+          <a:fillRef idx="3">
+            <a:schemeClr val="accent1"/>
+          </a:fillRef>
+          <a:effectRef idx="2">
+            <a:schemeClr val="accent1"/>
+          </a:effectRef>
+          <a:fontRef idx="minor">
+            <a:schemeClr val="lt1"/>
+          </a:fontRef>
+        </p:style>
+        <p:txBody>
+          <a:bodyPr rtlCol="0" anchor="ctr"/>
+          <a:lstStyle/>
+          <a:p>
+            <a:pPr algn="ctr"/>
+            <a:endParaRPr/>
+          </a:p>
+        </p:txBody>
+      </p:sp>
+      <p:sp>
+        <p:nvSpPr>
+          <p:cNvPr id="12" name="TextBox 11"/>
           <p:cNvSpPr txBox="1"/>
           <p:nvPr/>
         </p:nvSpPr>
         <p:spPr>
           <a:xfrm>
-            <a:off x="548640" y="2377440"/>
-            <a:ext cx="1463040" cy="731520"/>
+            <a:off x="4617720" y="1828800"/>
+            <a:ext cx="3291840" cy="594360"/>
           </a:xfrm>
           <a:prstGeom prst="rect">
             <a:avLst/>
@@ -7916,26 +8514,26 @@
           <a:p>
             <a:pPr algn="ctr"/>
             <a:r>
-              <a:rPr sz="3400" b="1" i="0">
-                <a:solidFill>
-                  <a:srgbClr val="00A8E8"/>
-                </a:solidFill>
-              </a:rPr>
-              <a:t>99%</a:t>
-            </a:r>
-          </a:p>
-        </p:txBody>
-      </p:sp>
-      <p:sp>
-        <p:nvSpPr>
-          <p:cNvPr id="11" name="TextBox 10"/>
+              <a:rPr sz="3000" b="1" i="0">
+                <a:solidFill>
+                  <a:srgbClr val="FFC107"/>
+                </a:solidFill>
+              </a:rPr>
+              <a:t>02</a:t>
+            </a:r>
+          </a:p>
+        </p:txBody>
+      </p:sp>
+      <p:sp>
+        <p:nvSpPr>
+          <p:cNvPr id="13" name="TextBox 12"/>
           <p:cNvSpPr txBox="1"/>
           <p:nvPr/>
         </p:nvSpPr>
         <p:spPr>
           <a:xfrm>
-            <a:off x="2194560" y="2331720"/>
-            <a:ext cx="3657600" cy="457200"/>
+            <a:off x="4617720" y="2468880"/>
+            <a:ext cx="3291840" cy="594360"/>
           </a:xfrm>
           <a:prstGeom prst="rect">
             <a:avLst/>
@@ -7948,28 +8546,28 @@
           </a:bodyPr>
           <a:lstStyle/>
           <a:p>
-            <a:pPr algn="l"/>
-            <a:r>
-              <a:rPr sz="1600" b="1" i="0">
+            <a:pPr algn="ctr"/>
+            <a:r>
+              <a:rPr sz="2000" b="1" i="0">
                 <a:solidFill>
                   <a:srgbClr val="FFFFFF"/>
                 </a:solidFill>
               </a:rPr>
-              <a:t>faster review time</a:t>
-            </a:r>
-          </a:p>
-        </p:txBody>
-      </p:sp>
-      <p:sp>
-        <p:nvSpPr>
-          <p:cNvPr id="12" name="TextBox 11"/>
+              <a:t>Define KPIs</a:t>
+            </a:r>
+          </a:p>
+        </p:txBody>
+      </p:sp>
+      <p:sp>
+        <p:nvSpPr>
+          <p:cNvPr id="14" name="TextBox 13"/>
           <p:cNvSpPr txBox="1"/>
           <p:nvPr/>
         </p:nvSpPr>
         <p:spPr>
           <a:xfrm>
-            <a:off x="2194560" y="2761488"/>
-            <a:ext cx="9144000" cy="384048"/>
+            <a:off x="4800600" y="3200400"/>
+            <a:ext cx="2926080" cy="2011680"/>
           </a:xfrm>
           <a:prstGeom prst="rect">
             <a:avLst/>
@@ -7982,29 +8580,30 @@
           </a:bodyPr>
           <a:lstStyle/>
           <a:p>
-            <a:pPr algn="l"/>
-            <a:r>
-              <a:rPr sz="1700" b="0" i="1">
+            <a:pPr algn="ctr"/>
+            <a:r>
+              <a:rPr sz="1600" b="0" i="0">
                 <a:solidFill>
                   <a:srgbClr val="CCD6E0"/>
                 </a:solidFill>
               </a:rPr>
-              <a:t>3–5 days per section → &lt; 30 min for the full route
-(measured: 3,929 photos in 28 min)</a:t>
-            </a:r>
-          </a:p>
-        </p:txBody>
-      </p:sp>
-      <p:sp>
-        <p:nvSpPr>
-          <p:cNvPr id="13" name="Rectangle 12"/>
+              <a:t>Set acceptance thresholds:
+coverage %, photo compliance rate,
+time-to-report</a:t>
+            </a:r>
+          </a:p>
+        </p:txBody>
+      </p:sp>
+      <p:sp>
+        <p:nvSpPr>
+          <p:cNvPr id="15" name="Rectangle 14"/>
           <p:cNvSpPr/>
           <p:nvPr/>
         </p:nvSpPr>
         <p:spPr>
           <a:xfrm>
-            <a:off x="365760" y="3200400"/>
-            <a:ext cx="11430000" cy="859536"/>
+            <a:off x="8366760" y="1600200"/>
+            <a:ext cx="3291840" cy="3840480"/>
           </a:xfrm>
           <a:prstGeom prst="rect">
             <a:avLst/>
@@ -8035,128 +8634,26 @@
           <a:lstStyle/>
           <a:p>
             <a:pPr algn="ctr"/>
-          </a:p>
-        </p:txBody>
-      </p:sp>
-      <p:sp>
-        <p:nvSpPr>
-          <p:cNvPr id="14" name="TextBox 13"/>
-          <p:cNvSpPr txBox="1"/>
-          <p:nvPr/>
-        </p:nvSpPr>
-        <p:spPr>
-          <a:xfrm>
-            <a:off x="548640" y="3291840"/>
-            <a:ext cx="1463040" cy="731520"/>
-          </a:xfrm>
-          <a:prstGeom prst="rect">
-            <a:avLst/>
-          </a:prstGeom>
-          <a:noFill/>
-        </p:spPr>
-        <p:txBody>
-          <a:bodyPr wrap="square">
-            <a:spAutoFit/>
-          </a:bodyPr>
-          <a:lstStyle/>
-          <a:p>
-            <a:pPr algn="ctr"/>
-            <a:r>
-              <a:rPr sz="3400" b="1" i="0">
-                <a:solidFill>
-                  <a:srgbClr val="00D47E"/>
-                </a:solidFill>
-              </a:rPr>
-              <a:t>100%</a:t>
-            </a:r>
-          </a:p>
-        </p:txBody>
-      </p:sp>
-      <p:sp>
-        <p:nvSpPr>
-          <p:cNvPr id="15" name="TextBox 14"/>
-          <p:cNvSpPr txBox="1"/>
-          <p:nvPr/>
-        </p:nvSpPr>
-        <p:spPr>
-          <a:xfrm>
-            <a:off x="2194560" y="3246120"/>
-            <a:ext cx="3657600" cy="457200"/>
-          </a:xfrm>
-          <a:prstGeom prst="rect">
-            <a:avLst/>
-          </a:prstGeom>
-          <a:noFill/>
-        </p:spPr>
-        <p:txBody>
-          <a:bodyPr wrap="square">
-            <a:spAutoFit/>
-          </a:bodyPr>
-          <a:lstStyle/>
-          <a:p>
-            <a:pPr algn="l"/>
-            <a:r>
-              <a:rPr sz="1600" b="1" i="0">
-                <a:solidFill>
-                  <a:srgbClr val="FFFFFF"/>
-                </a:solidFill>
-              </a:rPr>
-              <a:t>segment coverage</a:t>
-            </a:r>
-          </a:p>
-        </p:txBody>
-      </p:sp>
-      <p:sp>
-        <p:nvSpPr>
-          <p:cNvPr id="16" name="TextBox 15"/>
-          <p:cNvSpPr txBox="1"/>
-          <p:nvPr/>
-        </p:nvSpPr>
-        <p:spPr>
-          <a:xfrm>
-            <a:off x="2194560" y="3675888"/>
-            <a:ext cx="9144000" cy="384048"/>
-          </a:xfrm>
-          <a:prstGeom prst="rect">
-            <a:avLst/>
-          </a:prstGeom>
-          <a:noFill/>
-        </p:spPr>
-        <p:txBody>
-          <a:bodyPr wrap="square">
-            <a:spAutoFit/>
-          </a:bodyPr>
-          <a:lstStyle/>
-          <a:p>
-            <a:pPr algn="l"/>
-            <a:r>
-              <a:rPr sz="1700" b="0" i="1">
-                <a:solidFill>
-                  <a:srgbClr val="CCD6E0"/>
-                </a:solidFill>
-              </a:rPr>
-              <a:t>zero trench meters go unreviewed
-(photo-per-5 m rule across all 2,983 segments)</a:t>
-            </a:r>
-          </a:p>
-        </p:txBody>
-      </p:sp>
-      <p:sp>
-        <p:nvSpPr>
-          <p:cNvPr id="17" name="Rectangle 16"/>
+            <a:endParaRPr/>
+          </a:p>
+        </p:txBody>
+      </p:sp>
+      <p:sp>
+        <p:nvSpPr>
+          <p:cNvPr id="16" name="Rectangle 15"/>
           <p:cNvSpPr/>
           <p:nvPr/>
         </p:nvSpPr>
         <p:spPr>
           <a:xfrm>
-            <a:off x="365760" y="4114800"/>
-            <a:ext cx="11430000" cy="859536"/>
+            <a:off x="8366760" y="1600200"/>
+            <a:ext cx="3291840" cy="137160"/>
           </a:xfrm>
           <a:prstGeom prst="rect">
             <a:avLst/>
           </a:prstGeom>
           <a:solidFill>
-            <a:srgbClr val="122636"/>
+            <a:srgbClr val="00D47E"/>
           </a:solidFill>
           <a:ln>
             <a:noFill/>
@@ -8181,19 +8678,20 @@
           <a:lstStyle/>
           <a:p>
             <a:pPr algn="ctr"/>
-          </a:p>
-        </p:txBody>
-      </p:sp>
-      <p:sp>
-        <p:nvSpPr>
-          <p:cNvPr id="18" name="TextBox 17"/>
+            <a:endParaRPr/>
+          </a:p>
+        </p:txBody>
+      </p:sp>
+      <p:sp>
+        <p:nvSpPr>
+          <p:cNvPr id="17" name="TextBox 16"/>
           <p:cNvSpPr txBox="1"/>
           <p:nvPr/>
         </p:nvSpPr>
         <p:spPr>
           <a:xfrm>
-            <a:off x="548640" y="4206240"/>
-            <a:ext cx="1463040" cy="731520"/>
+            <a:off x="8366760" y="1828800"/>
+            <a:ext cx="3291840" cy="594360"/>
           </a:xfrm>
           <a:prstGeom prst="rect">
             <a:avLst/>
@@ -8208,26 +8706,26 @@
           <a:p>
             <a:pPr algn="ctr"/>
             <a:r>
-              <a:rPr sz="3400" b="1" i="0">
+              <a:rPr sz="3000" b="1" i="0">
                 <a:solidFill>
                   <a:srgbClr val="00D47E"/>
                 </a:solidFill>
               </a:rPr>
-              <a:t>100%</a:t>
-            </a:r>
-          </a:p>
-        </p:txBody>
-      </p:sp>
-      <p:sp>
-        <p:nvSpPr>
-          <p:cNvPr id="19" name="TextBox 18"/>
+              <a:t>03</a:t>
+            </a:r>
+          </a:p>
+        </p:txBody>
+      </p:sp>
+      <p:sp>
+        <p:nvSpPr>
+          <p:cNvPr id="18" name="TextBox 17"/>
           <p:cNvSpPr txBox="1"/>
           <p:nvPr/>
         </p:nvSpPr>
         <p:spPr>
           <a:xfrm>
-            <a:off x="2194560" y="4160520"/>
-            <a:ext cx="3657600" cy="457200"/>
+            <a:off x="8366760" y="2468880"/>
+            <a:ext cx="3291840" cy="594360"/>
           </a:xfrm>
           <a:prstGeom prst="rect">
             <a:avLst/>
@@ -8240,28 +8738,28 @@
           </a:bodyPr>
           <a:lstStyle/>
           <a:p>
-            <a:pPr algn="l"/>
-            <a:r>
-              <a:rPr sz="1600" b="1" i="0">
+            <a:pPr algn="ctr"/>
+            <a:r>
+              <a:rPr sz="2000" b="1" i="0">
                 <a:solidFill>
                   <a:srgbClr val="FFFFFF"/>
                 </a:solidFill>
               </a:rPr>
-              <a:t>audit transparency</a:t>
-            </a:r>
-          </a:p>
-        </p:txBody>
-      </p:sp>
-      <p:sp>
-        <p:nvSpPr>
-          <p:cNvPr id="20" name="TextBox 19"/>
+              <a:t>Scale</a:t>
+            </a:r>
+          </a:p>
+        </p:txBody>
+      </p:sp>
+      <p:sp>
+        <p:nvSpPr>
+          <p:cNvPr id="19" name="TextBox 18"/>
           <p:cNvSpPr txBox="1"/>
           <p:nvPr/>
         </p:nvSpPr>
         <p:spPr>
           <a:xfrm>
-            <a:off x="2194560" y="4590288"/>
-            <a:ext cx="9144000" cy="384048"/>
+            <a:off x="8549640" y="3200400"/>
+            <a:ext cx="2926080" cy="2011680"/>
           </a:xfrm>
           <a:prstGeom prst="rect">
             <a:avLst/>
@@ -8274,72 +8772,30 @@
           </a:bodyPr>
           <a:lstStyle/>
           <a:p>
-            <a:pPr algn="l"/>
-            <a:r>
-              <a:rPr sz="1700" b="0" i="1">
+            <a:pPr algn="ctr"/>
+            <a:r>
+              <a:rPr sz="1600" b="0" i="0">
                 <a:solidFill>
                   <a:srgbClr val="CCD6E0"/>
                 </a:solidFill>
               </a:rPr>
-              <a:t>every check logged per photo · per meter · per timestamp
-(exportable CSV/PDF, court-admissible)</a:t>
-            </a:r>
-          </a:p>
-        </p:txBody>
-      </p:sp>
-      <p:sp>
-        <p:nvSpPr>
-          <p:cNvPr id="21" name="Rectangle 20"/>
-          <p:cNvSpPr/>
-          <p:nvPr/>
-        </p:nvSpPr>
-        <p:spPr>
-          <a:xfrm>
-            <a:off x="365760" y="5029200"/>
-            <a:ext cx="11430000" cy="859536"/>
-          </a:xfrm>
-          <a:prstGeom prst="rect">
-            <a:avLst/>
-          </a:prstGeom>
-          <a:solidFill>
-            <a:srgbClr val="122636"/>
-          </a:solidFill>
-          <a:ln>
-            <a:noFill/>
-          </a:ln>
-        </p:spPr>
-        <p:style>
-          <a:lnRef idx="1">
-            <a:schemeClr val="accent1"/>
-          </a:lnRef>
-          <a:fillRef idx="3">
-            <a:schemeClr val="accent1"/>
-          </a:fillRef>
-          <a:effectRef idx="2">
-            <a:schemeClr val="accent1"/>
-          </a:effectRef>
-          <a:fontRef idx="minor">
-            <a:schemeClr val="lt1"/>
-          </a:fontRef>
-        </p:style>
-        <p:txBody>
-          <a:bodyPr rtlCol="0" anchor="ctr"/>
-          <a:lstStyle/>
-          <a:p>
-            <a:pPr algn="ctr"/>
-          </a:p>
-        </p:txBody>
-      </p:sp>
-      <p:sp>
-        <p:nvSpPr>
-          <p:cNvPr id="22" name="TextBox 21"/>
+              <a:t>Roll out across all future APG
+construction phases — protect
+the full network</a:t>
+            </a:r>
+          </a:p>
+        </p:txBody>
+      </p:sp>
+      <p:sp>
+        <p:nvSpPr>
+          <p:cNvPr id="20" name="TextBox 19"/>
           <p:cNvSpPr txBox="1"/>
           <p:nvPr/>
         </p:nvSpPr>
         <p:spPr>
           <a:xfrm>
-            <a:off x="548640" y="5120640"/>
-            <a:ext cx="1463040" cy="731520"/>
+            <a:off x="457200" y="5623560"/>
+            <a:ext cx="11247120" cy="594360"/>
           </a:xfrm>
           <a:prstGeom prst="rect">
             <a:avLst/>
@@ -8354,158 +8810,12 @@
           <a:p>
             <a:pPr algn="ctr"/>
             <a:r>
-              <a:rPr sz="3400" b="1" i="0">
+              <a:rPr sz="1700" b="1" i="0">
                 <a:solidFill>
                   <a:srgbClr val="00D47E"/>
                 </a:solidFill>
               </a:rPr>
-              <a:t>0%</a:t>
-            </a:r>
-          </a:p>
-        </p:txBody>
-      </p:sp>
-      <p:sp>
-        <p:nvSpPr>
-          <p:cNvPr id="23" name="TextBox 22"/>
-          <p:cNvSpPr txBox="1"/>
-          <p:nvPr/>
-        </p:nvSpPr>
-        <p:spPr>
-          <a:xfrm>
-            <a:off x="2194560" y="5074920"/>
-            <a:ext cx="3657600" cy="457200"/>
-          </a:xfrm>
-          <a:prstGeom prst="rect">
-            <a:avLst/>
-          </a:prstGeom>
-          <a:noFill/>
-        </p:spPr>
-        <p:txBody>
-          <a:bodyPr wrap="square">
-            <a:spAutoFit/>
-          </a:bodyPr>
-          <a:lstStyle/>
-          <a:p>
-            <a:pPr algn="l"/>
-            <a:r>
-              <a:rPr sz="1600" b="1" i="0">
-                <a:solidFill>
-                  <a:srgbClr val="FFFFFF"/>
-                </a:solidFill>
-              </a:rPr>
-              <a:t>hidden GDPR risk</a:t>
-            </a:r>
-          </a:p>
-        </p:txBody>
-      </p:sp>
-      <p:sp>
-        <p:nvSpPr>
-          <p:cNvPr id="24" name="TextBox 23"/>
-          <p:cNvSpPr txBox="1"/>
-          <p:nvPr/>
-        </p:nvSpPr>
-        <p:spPr>
-          <a:xfrm>
-            <a:off x="2194560" y="5504688"/>
-            <a:ext cx="9144000" cy="384048"/>
-          </a:xfrm>
-          <a:prstGeom prst="rect">
-            <a:avLst/>
-          </a:prstGeom>
-          <a:noFill/>
-        </p:spPr>
-        <p:txBody>
-          <a:bodyPr wrap="square">
-            <a:spAutoFit/>
-          </a:bodyPr>
-          <a:lstStyle/>
-          <a:p>
-            <a:pPr algn="l"/>
-            <a:r>
-              <a:rPr sz="1700" b="0" i="1">
-                <a:solidFill>
-                  <a:srgbClr val="CCD6E0"/>
-                </a:solidFill>
-              </a:rPr>
-              <a:t>faces &amp; plates flagged and withheld before any reviewer sees them
-(NIS2/GDPR checks run on 100% of photos)</a:t>
-            </a:r>
-          </a:p>
-        </p:txBody>
-      </p:sp>
-      <p:sp>
-        <p:nvSpPr>
-          <p:cNvPr id="25" name="Rectangle 24"/>
-          <p:cNvSpPr/>
-          <p:nvPr/>
-        </p:nvSpPr>
-        <p:spPr>
-          <a:xfrm>
-            <a:off x="365760" y="6080760"/>
-            <a:ext cx="11430000" cy="594360"/>
-          </a:xfrm>
-          <a:prstGeom prst="rect">
-            <a:avLst/>
-          </a:prstGeom>
-          <a:solidFill>
-            <a:srgbClr val="003A20"/>
-          </a:solidFill>
-          <a:ln>
-            <a:noFill/>
-          </a:ln>
-        </p:spPr>
-        <p:style>
-          <a:lnRef idx="1">
-            <a:schemeClr val="accent1"/>
-          </a:lnRef>
-          <a:fillRef idx="3">
-            <a:schemeClr val="accent1"/>
-          </a:fillRef>
-          <a:effectRef idx="2">
-            <a:schemeClr val="accent1"/>
-          </a:effectRef>
-          <a:fontRef idx="minor">
-            <a:schemeClr val="lt1"/>
-          </a:fontRef>
-        </p:style>
-        <p:txBody>
-          <a:bodyPr rtlCol="0" anchor="ctr"/>
-          <a:lstStyle/>
-          <a:p>
-            <a:pPr algn="ctr"/>
-          </a:p>
-        </p:txBody>
-      </p:sp>
-      <p:sp>
-        <p:nvSpPr>
-          <p:cNvPr id="26" name="TextBox 25"/>
-          <p:cNvSpPr txBox="1"/>
-          <p:nvPr/>
-        </p:nvSpPr>
-        <p:spPr>
-          <a:xfrm>
-            <a:off x="548640" y="6126480"/>
-            <a:ext cx="11155680" cy="502920"/>
-          </a:xfrm>
-          <a:prstGeom prst="rect">
-            <a:avLst/>
-          </a:prstGeom>
-          <a:noFill/>
-        </p:spPr>
-        <p:txBody>
-          <a:bodyPr wrap="square">
-            <a:spAutoFit/>
-          </a:bodyPr>
-          <a:lstStyle/>
-          <a:p>
-            <a:pPr algn="ctr"/>
-            <a:r>
-              <a:rPr sz="1400" b="1" i="0">
-                <a:solidFill>
-                  <a:srgbClr val="00D47E"/>
-                </a:solidFill>
-              </a:rPr>
-              <a:t>28 minutes end-to-end  ·  3,929 photos  ·  2,983 segments scored  ·  ~600 duplicates caught</a:t>
+              <a:t>Protect €42M+ in infrastructure.  Secure the 50-year network lifespan.  Act today.</a:t>
             </a:r>
           </a:p>
         </p:txBody>
@@ -8519,7 +8829,7 @@
 </file>
 
 <file path=ppt/slides/slide8.xml><?xml version="1.0" encoding="utf-8"?>
-<p:sld xmlns:a="http://schemas.openxmlformats.org/drawingml/2006/main" xmlns:p="http://schemas.openxmlformats.org/presentationml/2006/main" xmlns:r="http://schemas.openxmlformats.org/officeDocument/2006/relationships">
+<p:sld xmlns:a="http://schemas.openxmlformats.org/drawingml/2006/main" xmlns:r="http://schemas.openxmlformats.org/officeDocument/2006/relationships" xmlns:p="http://schemas.openxmlformats.org/presentationml/2006/main">
   <p:cSld>
     <p:bg>
       <p:bgPr>
@@ -8535,7 +8845,14 @@
         <p:cNvGrpSpPr/>
         <p:nvPr/>
       </p:nvGrpSpPr>
-      <p:grpSpPr/>
+      <p:grpSpPr>
+        <a:xfrm>
+          <a:off x="0" y="0"/>
+          <a:ext cx="0" cy="0"/>
+          <a:chOff x="0" y="0"/>
+          <a:chExt cx="0" cy="0"/>
+        </a:xfrm>
+      </p:grpSpPr>
       <p:sp>
         <p:nvSpPr>
           <p:cNvPr id="2" name="Rectangle 1"/>
@@ -8576,6 +8893,7 @@
           <a:lstStyle/>
           <a:p>
             <a:pPr algn="ctr"/>
+            <a:endParaRPr/>
           </a:p>
         </p:txBody>
       </p:sp>
@@ -8619,6 +8937,7 @@
           <a:lstStyle/>
           <a:p>
             <a:pPr algn="ctr"/>
+            <a:endParaRPr/>
           </a:p>
         </p:txBody>
       </p:sp>
@@ -8630,8 +8949,8 @@
         </p:nvSpPr>
         <p:spPr>
           <a:xfrm>
-            <a:off x="640080" y="548640"/>
-            <a:ext cx="10515600" cy="822960"/>
+            <a:off x="457200" y="1645920"/>
+            <a:ext cx="11247120" cy="1645920"/>
           </a:xfrm>
           <a:prstGeom prst="rect">
             <a:avLst/>
@@ -8646,113 +8965,26 @@
           <a:p>
             <a:pPr algn="ctr"/>
             <a:r>
-              <a:rPr sz="2800" b="1" i="0">
+              <a:rPr sz="8000" b="1" i="0">
                 <a:solidFill>
                   <a:srgbClr val="FFFFFF"/>
                 </a:solidFill>
               </a:rPr>
-              <a:t>Every Unreviewed Meter Is a Liability.
-We Close That Gap — Automatically.</a:t>
-            </a:r>
-          </a:p>
-        </p:txBody>
-      </p:sp>
-      <p:sp>
-        <p:nvSpPr>
-          <p:cNvPr id="5" name="Rectangle 4"/>
-          <p:cNvSpPr/>
-          <p:nvPr/>
-        </p:nvSpPr>
-        <p:spPr>
-          <a:xfrm>
-            <a:off x="868680" y="1600200"/>
-            <a:ext cx="3291840" cy="3840480"/>
-          </a:xfrm>
-          <a:prstGeom prst="rect">
-            <a:avLst/>
-          </a:prstGeom>
-          <a:solidFill>
-            <a:srgbClr val="122636"/>
-          </a:solidFill>
-          <a:ln>
-            <a:noFill/>
-          </a:ln>
-        </p:spPr>
-        <p:style>
-          <a:lnRef idx="1">
-            <a:schemeClr val="accent1"/>
-          </a:lnRef>
-          <a:fillRef idx="3">
-            <a:schemeClr val="accent1"/>
-          </a:fillRef>
-          <a:effectRef idx="2">
-            <a:schemeClr val="accent1"/>
-          </a:effectRef>
-          <a:fontRef idx="minor">
-            <a:schemeClr val="lt1"/>
-          </a:fontRef>
-        </p:style>
-        <p:txBody>
-          <a:bodyPr rtlCol="0" anchor="ctr"/>
-          <a:lstStyle/>
-          <a:p>
-            <a:pPr algn="ctr"/>
-          </a:p>
-        </p:txBody>
-      </p:sp>
-      <p:sp>
-        <p:nvSpPr>
-          <p:cNvPr id="6" name="Rectangle 5"/>
-          <p:cNvSpPr/>
-          <p:nvPr/>
-        </p:nvSpPr>
-        <p:spPr>
-          <a:xfrm>
-            <a:off x="868680" y="1600200"/>
-            <a:ext cx="3291840" cy="137160"/>
-          </a:xfrm>
-          <a:prstGeom prst="rect">
-            <a:avLst/>
-          </a:prstGeom>
-          <a:solidFill>
-            <a:srgbClr val="00A8E8"/>
-          </a:solidFill>
-          <a:ln>
-            <a:noFill/>
-          </a:ln>
-        </p:spPr>
-        <p:style>
-          <a:lnRef idx="1">
-            <a:schemeClr val="accent1"/>
-          </a:lnRef>
-          <a:fillRef idx="3">
-            <a:schemeClr val="accent1"/>
-          </a:fillRef>
-          <a:effectRef idx="2">
-            <a:schemeClr val="accent1"/>
-          </a:effectRef>
-          <a:fontRef idx="minor">
-            <a:schemeClr val="lt1"/>
-          </a:fontRef>
-        </p:style>
-        <p:txBody>
-          <a:bodyPr rtlCol="0" anchor="ctr"/>
-          <a:lstStyle/>
-          <a:p>
-            <a:pPr algn="ctr"/>
-          </a:p>
-        </p:txBody>
-      </p:sp>
-      <p:sp>
-        <p:nvSpPr>
-          <p:cNvPr id="7" name="TextBox 6"/>
+              <a:t>Thank You</a:t>
+            </a:r>
+          </a:p>
+        </p:txBody>
+      </p:sp>
+      <p:sp>
+        <p:nvSpPr>
+          <p:cNvPr id="5" name="TextBox 4"/>
           <p:cNvSpPr txBox="1"/>
           <p:nvPr/>
         </p:nvSpPr>
         <p:spPr>
           <a:xfrm>
-            <a:off x="868680" y="1828800"/>
-            <a:ext cx="3291840" cy="594360"/>
+            <a:off x="457200" y="3383280"/>
+            <a:ext cx="11247120" cy="640080"/>
           </a:xfrm>
           <a:prstGeom prst="rect">
             <a:avLst/>
@@ -8767,26 +8999,26 @@
           <a:p>
             <a:pPr algn="ctr"/>
             <a:r>
-              <a:rPr sz="3000" b="1" i="0">
+              <a:rPr sz="3000" b="0" i="0">
                 <a:solidFill>
                   <a:srgbClr val="00A8E8"/>
                 </a:solidFill>
               </a:rPr>
-              <a:t>01</a:t>
-            </a:r>
-          </a:p>
-        </p:txBody>
-      </p:sp>
-      <p:sp>
-        <p:nvSpPr>
-          <p:cNvPr id="8" name="TextBox 7"/>
+              <a:t>Questions welcome</a:t>
+            </a:r>
+          </a:p>
+        </p:txBody>
+      </p:sp>
+      <p:sp>
+        <p:nvSpPr>
+          <p:cNvPr id="6" name="TextBox 5"/>
           <p:cNvSpPr txBox="1"/>
           <p:nvPr/>
         </p:nvSpPr>
         <p:spPr>
           <a:xfrm>
-            <a:off x="868680" y="2468880"/>
-            <a:ext cx="3291840" cy="594360"/>
+            <a:off x="457200" y="4206240"/>
+            <a:ext cx="11247120" cy="502920"/>
           </a:xfrm>
           <a:prstGeom prst="rect">
             <a:avLst/>
@@ -8801,26 +9033,26 @@
           <a:p>
             <a:pPr algn="ctr"/>
             <a:r>
-              <a:rPr sz="2000" b="1" i="0">
-                <a:solidFill>
-                  <a:srgbClr val="FFFFFF"/>
-                </a:solidFill>
-              </a:rPr>
-              <a:t>Approve Pilot</a:t>
-            </a:r>
-          </a:p>
-        </p:txBody>
-      </p:sp>
-      <p:sp>
-        <p:nvSpPr>
-          <p:cNvPr id="9" name="TextBox 8"/>
+              <a:rPr sz="1600" b="0" i="0">
+                <a:solidFill>
+                  <a:srgbClr val="CCD6E0"/>
+                </a:solidFill>
+              </a:rPr>
+              <a:t>TrenchVerify — From Site Photo to Compliance Audit — Automatically</a:t>
+            </a:r>
+          </a:p>
+        </p:txBody>
+      </p:sp>
+      <p:sp>
+        <p:nvSpPr>
+          <p:cNvPr id="7" name="TextBox 6"/>
           <p:cNvSpPr txBox="1"/>
           <p:nvPr/>
         </p:nvSpPr>
         <p:spPr>
           <a:xfrm>
-            <a:off x="1051560" y="3200400"/>
-            <a:ext cx="2926080" cy="2011680"/>
+            <a:off x="457200" y="4754880"/>
+            <a:ext cx="11247120" cy="323165"/>
           </a:xfrm>
           <a:prstGeom prst="rect">
             <a:avLst/>
@@ -8835,677 +9067,74 @@
           <a:p>
             <a:pPr algn="ctr"/>
             <a:r>
-              <a:rPr sz="1600" b="0" i="0">
+              <a:rPr sz="1500" b="0" i="0" dirty="0">
                 <a:solidFill>
                   <a:srgbClr val="CCD6E0"/>
                 </a:solidFill>
               </a:rPr>
-              <a:t>Authorise the TrenchVerify AI pilot
-for the current Klosterneuburg
-route build</a:t>
-            </a:r>
-          </a:p>
-        </p:txBody>
-      </p:sp>
-      <p:sp>
-        <p:nvSpPr>
-          <p:cNvPr id="10" name="Rectangle 9"/>
-          <p:cNvSpPr/>
-          <p:nvPr/>
-        </p:nvSpPr>
-        <p:spPr>
-          <a:xfrm>
-            <a:off x="4617720" y="1600200"/>
-            <a:ext cx="3291840" cy="3840480"/>
-          </a:xfrm>
-          <a:prstGeom prst="rect">
-            <a:avLst/>
-          </a:prstGeom>
-          <a:solidFill>
-            <a:srgbClr val="122636"/>
-          </a:solidFill>
-          <a:ln>
-            <a:noFill/>
-          </a:ln>
-        </p:spPr>
-        <p:style>
-          <a:lnRef idx="1">
-            <a:schemeClr val="accent1"/>
-          </a:lnRef>
-          <a:fillRef idx="3">
-            <a:schemeClr val="accent1"/>
-          </a:fillRef>
-          <a:effectRef idx="2">
-            <a:schemeClr val="accent1"/>
-          </a:effectRef>
-          <a:fontRef idx="minor">
-            <a:schemeClr val="lt1"/>
-          </a:fontRef>
-        </p:style>
-        <p:txBody>
-          <a:bodyPr rtlCol="0" anchor="ctr"/>
-          <a:lstStyle/>
-          <a:p>
-            <a:pPr algn="ctr"/>
-          </a:p>
-        </p:txBody>
-      </p:sp>
-      <p:sp>
-        <p:nvSpPr>
-          <p:cNvPr id="11" name="Rectangle 10"/>
-          <p:cNvSpPr/>
-          <p:nvPr/>
-        </p:nvSpPr>
-        <p:spPr>
-          <a:xfrm>
-            <a:off x="4617720" y="1600200"/>
-            <a:ext cx="3291840" cy="137160"/>
-          </a:xfrm>
-          <a:prstGeom prst="rect">
-            <a:avLst/>
-          </a:prstGeom>
-          <a:solidFill>
-            <a:srgbClr val="FFC107"/>
-          </a:solidFill>
-          <a:ln>
-            <a:noFill/>
-          </a:ln>
-        </p:spPr>
-        <p:style>
-          <a:lnRef idx="1">
-            <a:schemeClr val="accent1"/>
-          </a:lnRef>
-          <a:fillRef idx="3">
-            <a:schemeClr val="accent1"/>
-          </a:fillRef>
-          <a:effectRef idx="2">
-            <a:schemeClr val="accent1"/>
-          </a:effectRef>
-          <a:fontRef idx="minor">
-            <a:schemeClr val="lt1"/>
-          </a:fontRef>
-        </p:style>
-        <p:txBody>
-          <a:bodyPr rtlCol="0" anchor="ctr"/>
-          <a:lstStyle/>
-          <a:p>
-            <a:pPr algn="ctr"/>
-          </a:p>
-        </p:txBody>
-      </p:sp>
-      <p:sp>
-        <p:nvSpPr>
-          <p:cNvPr id="12" name="TextBox 11"/>
-          <p:cNvSpPr txBox="1"/>
-          <p:nvPr/>
-        </p:nvSpPr>
-        <p:spPr>
-          <a:xfrm>
-            <a:off x="4617720" y="1828800"/>
-            <a:ext cx="3291840" cy="594360"/>
-          </a:xfrm>
-          <a:prstGeom prst="rect">
-            <a:avLst/>
-          </a:prstGeom>
-          <a:noFill/>
-        </p:spPr>
-        <p:txBody>
-          <a:bodyPr wrap="square">
-            <a:spAutoFit/>
-          </a:bodyPr>
-          <a:lstStyle/>
-          <a:p>
-            <a:pPr algn="ctr"/>
-            <a:r>
-              <a:rPr sz="3000" b="1" i="0">
-                <a:solidFill>
-                  <a:srgbClr val="FFC107"/>
-                </a:solidFill>
-              </a:rPr>
-              <a:t>02</a:t>
-            </a:r>
-          </a:p>
-        </p:txBody>
-      </p:sp>
-      <p:sp>
-        <p:nvSpPr>
-          <p:cNvPr id="13" name="TextBox 12"/>
-          <p:cNvSpPr txBox="1"/>
-          <p:nvPr/>
-        </p:nvSpPr>
-        <p:spPr>
-          <a:xfrm>
-            <a:off x="4617720" y="2468880"/>
-            <a:ext cx="3291840" cy="594360"/>
-          </a:xfrm>
-          <a:prstGeom prst="rect">
-            <a:avLst/>
-          </a:prstGeom>
-          <a:noFill/>
-        </p:spPr>
-        <p:txBody>
-          <a:bodyPr wrap="square">
-            <a:spAutoFit/>
-          </a:bodyPr>
-          <a:lstStyle/>
-          <a:p>
-            <a:pPr algn="ctr"/>
-            <a:r>
-              <a:rPr sz="2000" b="1" i="0">
-                <a:solidFill>
-                  <a:srgbClr val="FFFFFF"/>
-                </a:solidFill>
-              </a:rPr>
-              <a:t>Define KPIs</a:t>
-            </a:r>
-          </a:p>
-        </p:txBody>
-      </p:sp>
-      <p:sp>
-        <p:nvSpPr>
-          <p:cNvPr id="14" name="TextBox 13"/>
-          <p:cNvSpPr txBox="1"/>
-          <p:nvPr/>
-        </p:nvSpPr>
-        <p:spPr>
-          <a:xfrm>
-            <a:off x="4800600" y="3200400"/>
-            <a:ext cx="2926080" cy="2011680"/>
-          </a:xfrm>
-          <a:prstGeom prst="rect">
-            <a:avLst/>
-          </a:prstGeom>
-          <a:noFill/>
-        </p:spPr>
-        <p:txBody>
-          <a:bodyPr wrap="square">
-            <a:spAutoFit/>
-          </a:bodyPr>
-          <a:lstStyle/>
-          <a:p>
-            <a:pPr algn="ctr"/>
-            <a:r>
-              <a:rPr sz="1600" b="0" i="0">
+              <a:t>Team: </a:t>
+            </a:r>
+            <a:r>
+              <a:rPr lang="en-US" sz="1500" dirty="0">
                 <a:solidFill>
                   <a:srgbClr val="CCD6E0"/>
                 </a:solidFill>
               </a:rPr>
-              <a:t>Set acceptance thresholds:
-coverage %, photo compliance rate,
-time-to-report</a:t>
-            </a:r>
-          </a:p>
-        </p:txBody>
-      </p:sp>
-      <p:sp>
-        <p:nvSpPr>
-          <p:cNvPr id="15" name="Rectangle 14"/>
-          <p:cNvSpPr/>
-          <p:nvPr/>
-        </p:nvSpPr>
-        <p:spPr>
-          <a:xfrm>
-            <a:off x="8366760" y="1600200"/>
-            <a:ext cx="3291840" cy="3840480"/>
-          </a:xfrm>
-          <a:prstGeom prst="rect">
-            <a:avLst/>
-          </a:prstGeom>
-          <a:solidFill>
-            <a:srgbClr val="122636"/>
-          </a:solidFill>
-          <a:ln>
-            <a:noFill/>
-          </a:ln>
-        </p:spPr>
-        <p:style>
-          <a:lnRef idx="1">
-            <a:schemeClr val="accent1"/>
-          </a:lnRef>
-          <a:fillRef idx="3">
-            <a:schemeClr val="accent1"/>
-          </a:fillRef>
-          <a:effectRef idx="2">
-            <a:schemeClr val="accent1"/>
-          </a:effectRef>
-          <a:fontRef idx="minor">
-            <a:schemeClr val="lt1"/>
-          </a:fontRef>
-        </p:style>
-        <p:txBody>
-          <a:bodyPr rtlCol="0" anchor="ctr"/>
-          <a:lstStyle/>
-          <a:p>
-            <a:pPr algn="ctr"/>
-          </a:p>
-        </p:txBody>
-      </p:sp>
-      <p:sp>
-        <p:nvSpPr>
-          <p:cNvPr id="16" name="Rectangle 15"/>
-          <p:cNvSpPr/>
-          <p:nvPr/>
-        </p:nvSpPr>
-        <p:spPr>
-          <a:xfrm>
-            <a:off x="8366760" y="1600200"/>
-            <a:ext cx="3291840" cy="137160"/>
-          </a:xfrm>
-          <a:prstGeom prst="rect">
-            <a:avLst/>
-          </a:prstGeom>
-          <a:solidFill>
-            <a:srgbClr val="00D47E"/>
-          </a:solidFill>
-          <a:ln>
-            <a:noFill/>
-          </a:ln>
-        </p:spPr>
-        <p:style>
-          <a:lnRef idx="1">
-            <a:schemeClr val="accent1"/>
-          </a:lnRef>
-          <a:fillRef idx="3">
-            <a:schemeClr val="accent1"/>
-          </a:fillRef>
-          <a:effectRef idx="2">
-            <a:schemeClr val="accent1"/>
-          </a:effectRef>
-          <a:fontRef idx="minor">
-            <a:schemeClr val="lt1"/>
-          </a:fontRef>
-        </p:style>
-        <p:txBody>
-          <a:bodyPr rtlCol="0" anchor="ctr"/>
-          <a:lstStyle/>
-          <a:p>
-            <a:pPr algn="ctr"/>
-          </a:p>
-        </p:txBody>
-      </p:sp>
-      <p:sp>
-        <p:nvSpPr>
-          <p:cNvPr id="17" name="TextBox 16"/>
-          <p:cNvSpPr txBox="1"/>
-          <p:nvPr/>
-        </p:nvSpPr>
-        <p:spPr>
-          <a:xfrm>
-            <a:off x="8366760" y="1828800"/>
-            <a:ext cx="3291840" cy="594360"/>
-          </a:xfrm>
-          <a:prstGeom prst="rect">
-            <a:avLst/>
-          </a:prstGeom>
-          <a:noFill/>
-        </p:spPr>
-        <p:txBody>
-          <a:bodyPr wrap="square">
-            <a:spAutoFit/>
-          </a:bodyPr>
-          <a:lstStyle/>
-          <a:p>
-            <a:pPr algn="ctr"/>
-            <a:r>
-              <a:rPr sz="3000" b="1" i="0">
-                <a:solidFill>
-                  <a:srgbClr val="00D47E"/>
-                </a:solidFill>
-              </a:rPr>
-              <a:t>03</a:t>
-            </a:r>
-          </a:p>
-        </p:txBody>
-      </p:sp>
-      <p:sp>
-        <p:nvSpPr>
-          <p:cNvPr id="18" name="TextBox 17"/>
-          <p:cNvSpPr txBox="1"/>
-          <p:nvPr/>
-        </p:nvSpPr>
-        <p:spPr>
-          <a:xfrm>
-            <a:off x="8366760" y="2468880"/>
-            <a:ext cx="3291840" cy="594360"/>
-          </a:xfrm>
-          <a:prstGeom prst="rect">
-            <a:avLst/>
-          </a:prstGeom>
-          <a:noFill/>
-        </p:spPr>
-        <p:txBody>
-          <a:bodyPr wrap="square">
-            <a:spAutoFit/>
-          </a:bodyPr>
-          <a:lstStyle/>
-          <a:p>
-            <a:pPr algn="ctr"/>
-            <a:r>
-              <a:rPr sz="2000" b="1" i="0">
-                <a:solidFill>
-                  <a:srgbClr val="FFFFFF"/>
-                </a:solidFill>
-              </a:rPr>
-              <a:t>Scale</a:t>
-            </a:r>
-          </a:p>
-        </p:txBody>
-      </p:sp>
-      <p:sp>
-        <p:nvSpPr>
-          <p:cNvPr id="19" name="TextBox 18"/>
-          <p:cNvSpPr txBox="1"/>
-          <p:nvPr/>
-        </p:nvSpPr>
-        <p:spPr>
-          <a:xfrm>
-            <a:off x="8549640" y="3200400"/>
-            <a:ext cx="2926080" cy="2011680"/>
-          </a:xfrm>
-          <a:prstGeom prst="rect">
-            <a:avLst/>
-          </a:prstGeom>
-          <a:noFill/>
-        </p:spPr>
-        <p:txBody>
-          <a:bodyPr wrap="square">
-            <a:spAutoFit/>
-          </a:bodyPr>
-          <a:lstStyle/>
-          <a:p>
-            <a:pPr algn="ctr"/>
-            <a:r>
-              <a:rPr sz="1600" b="0" i="0">
+              <a:t>42 </a:t>
+            </a:r>
+            <a:r>
+              <a:rPr lang="en-US" sz="1500" dirty="0" err="1">
                 <a:solidFill>
                   <a:srgbClr val="CCD6E0"/>
                 </a:solidFill>
               </a:rPr>
-              <a:t>Roll out across all future APG
-construction phases — protect
-the full network</a:t>
-            </a:r>
-          </a:p>
-        </p:txBody>
-      </p:sp>
-      <p:sp>
-        <p:nvSpPr>
-          <p:cNvPr id="20" name="TextBox 19"/>
-          <p:cNvSpPr txBox="1"/>
-          <p:nvPr/>
-        </p:nvSpPr>
-        <p:spPr>
-          <a:xfrm>
-            <a:off x="457200" y="5623560"/>
-            <a:ext cx="11247120" cy="594360"/>
-          </a:xfrm>
-          <a:prstGeom prst="rect">
-            <a:avLst/>
-          </a:prstGeom>
-          <a:noFill/>
-        </p:spPr>
-        <p:txBody>
-          <a:bodyPr wrap="square">
-            <a:spAutoFit/>
-          </a:bodyPr>
-          <a:lstStyle/>
-          <a:p>
-            <a:pPr algn="ctr"/>
-            <a:r>
-              <a:rPr sz="1700" b="1" i="0">
-                <a:solidFill>
-                  <a:srgbClr val="00D47E"/>
-                </a:solidFill>
-              </a:rPr>
-              <a:t>Protect €42M+ in infrastructure.  Secure the 50-year network lifespan.  Act today.</a:t>
-            </a:r>
-          </a:p>
-        </p:txBody>
-      </p:sp>
-    </p:spTree>
-  </p:cSld>
-  <p:clrMapOvr>
-    <a:masterClrMapping/>
-  </p:clrMapOvr>
-</p:sld>
-</file>
-
-<file path=ppt/slides/slide9.xml><?xml version="1.0" encoding="utf-8"?>
-<p:sld xmlns:a="http://schemas.openxmlformats.org/drawingml/2006/main" xmlns:p="http://schemas.openxmlformats.org/presentationml/2006/main" xmlns:r="http://schemas.openxmlformats.org/officeDocument/2006/relationships">
-  <p:cSld>
-    <p:bg>
-      <p:bgPr>
-        <a:solidFill>
-          <a:srgbClr val="0D1B2A"/>
-        </a:solidFill>
-        <a:effectLst/>
-      </p:bgPr>
-    </p:bg>
-    <p:spTree>
-      <p:nvGrpSpPr>
-        <p:cNvPr id="1" name=""/>
-        <p:cNvGrpSpPr/>
-        <p:nvPr/>
-      </p:nvGrpSpPr>
-      <p:grpSpPr/>
-      <p:sp>
-        <p:nvSpPr>
-          <p:cNvPr id="2" name="Rectangle 1"/>
-          <p:cNvSpPr/>
-          <p:nvPr/>
-        </p:nvSpPr>
-        <p:spPr>
-          <a:xfrm>
-            <a:off x="0" y="0"/>
-            <a:ext cx="12188952" cy="73152"/>
-          </a:xfrm>
-          <a:prstGeom prst="rect">
-            <a:avLst/>
-          </a:prstGeom>
-          <a:solidFill>
-            <a:srgbClr val="00A8E8"/>
-          </a:solidFill>
-          <a:ln>
-            <a:noFill/>
-          </a:ln>
-        </p:spPr>
-        <p:style>
-          <a:lnRef idx="1">
-            <a:schemeClr val="accent1"/>
-          </a:lnRef>
-          <a:fillRef idx="3">
-            <a:schemeClr val="accent1"/>
-          </a:fillRef>
-          <a:effectRef idx="2">
-            <a:schemeClr val="accent1"/>
-          </a:effectRef>
-          <a:fontRef idx="minor">
-            <a:schemeClr val="lt1"/>
-          </a:fontRef>
-        </p:style>
-        <p:txBody>
-          <a:bodyPr rtlCol="0" anchor="ctr"/>
-          <a:lstStyle/>
-          <a:p>
-            <a:pPr algn="ctr"/>
-          </a:p>
-        </p:txBody>
-      </p:sp>
-      <p:sp>
-        <p:nvSpPr>
-          <p:cNvPr id="3" name="Rectangle 2"/>
-          <p:cNvSpPr/>
-          <p:nvPr/>
-        </p:nvSpPr>
-        <p:spPr>
-          <a:xfrm>
-            <a:off x="0" y="6766560"/>
-            <a:ext cx="12188952" cy="73152"/>
-          </a:xfrm>
-          <a:prstGeom prst="rect">
-            <a:avLst/>
-          </a:prstGeom>
-          <a:solidFill>
-            <a:srgbClr val="00D47E"/>
-          </a:solidFill>
-          <a:ln>
-            <a:noFill/>
-          </a:ln>
-        </p:spPr>
-        <p:style>
-          <a:lnRef idx="1">
-            <a:schemeClr val="accent1"/>
-          </a:lnRef>
-          <a:fillRef idx="3">
-            <a:schemeClr val="accent1"/>
-          </a:fillRef>
-          <a:effectRef idx="2">
-            <a:schemeClr val="accent1"/>
-          </a:effectRef>
-          <a:fontRef idx="minor">
-            <a:schemeClr val="lt1"/>
-          </a:fontRef>
-        </p:style>
-        <p:txBody>
-          <a:bodyPr rtlCol="0" anchor="ctr"/>
-          <a:lstStyle/>
-          <a:p>
-            <a:pPr algn="ctr"/>
-          </a:p>
-        </p:txBody>
-      </p:sp>
-      <p:sp>
-        <p:nvSpPr>
-          <p:cNvPr id="4" name="TextBox 3"/>
-          <p:cNvSpPr txBox="1"/>
-          <p:nvPr/>
-        </p:nvSpPr>
-        <p:spPr>
-          <a:xfrm>
-            <a:off x="457200" y="1645920"/>
-            <a:ext cx="11247120" cy="1645920"/>
-          </a:xfrm>
-          <a:prstGeom prst="rect">
-            <a:avLst/>
-          </a:prstGeom>
-          <a:noFill/>
-        </p:spPr>
-        <p:txBody>
-          <a:bodyPr wrap="square">
-            <a:spAutoFit/>
-          </a:bodyPr>
-          <a:lstStyle/>
-          <a:p>
-            <a:pPr algn="ctr"/>
-            <a:r>
-              <a:rPr sz="8000" b="1" i="0">
-                <a:solidFill>
-                  <a:srgbClr val="FFFFFF"/>
-                </a:solidFill>
-              </a:rPr>
-              <a:t>Thank You</a:t>
-            </a:r>
-          </a:p>
-        </p:txBody>
-      </p:sp>
-      <p:sp>
-        <p:nvSpPr>
-          <p:cNvPr id="5" name="TextBox 4"/>
-          <p:cNvSpPr txBox="1"/>
-          <p:nvPr/>
-        </p:nvSpPr>
-        <p:spPr>
-          <a:xfrm>
-            <a:off x="457200" y="3383280"/>
-            <a:ext cx="11247120" cy="640080"/>
-          </a:xfrm>
-          <a:prstGeom prst="rect">
-            <a:avLst/>
-          </a:prstGeom>
-          <a:noFill/>
-        </p:spPr>
-        <p:txBody>
-          <a:bodyPr wrap="square">
-            <a:spAutoFit/>
-          </a:bodyPr>
-          <a:lstStyle/>
-          <a:p>
-            <a:pPr algn="ctr"/>
-            <a:r>
-              <a:rPr sz="3000" b="0" i="0">
-                <a:solidFill>
-                  <a:srgbClr val="00A8E8"/>
-                </a:solidFill>
-              </a:rPr>
-              <a:t>Questions welcome</a:t>
-            </a:r>
-          </a:p>
-        </p:txBody>
-      </p:sp>
-      <p:sp>
-        <p:nvSpPr>
-          <p:cNvPr id="6" name="TextBox 5"/>
-          <p:cNvSpPr txBox="1"/>
-          <p:nvPr/>
-        </p:nvSpPr>
-        <p:spPr>
-          <a:xfrm>
-            <a:off x="457200" y="4206240"/>
-            <a:ext cx="11247120" cy="502920"/>
-          </a:xfrm>
-          <a:prstGeom prst="rect">
-            <a:avLst/>
-          </a:prstGeom>
-          <a:noFill/>
-        </p:spPr>
-        <p:txBody>
-          <a:bodyPr wrap="square">
-            <a:spAutoFit/>
-          </a:bodyPr>
-          <a:lstStyle/>
-          <a:p>
-            <a:pPr algn="ctr"/>
-            <a:r>
-              <a:rPr sz="1600" b="0" i="0">
+              <a:t>Claudettes</a:t>
+            </a:r>
+            <a:r>
+              <a:rPr lang="en-US" sz="1500" dirty="0">
                 <a:solidFill>
                   <a:srgbClr val="CCD6E0"/>
                 </a:solidFill>
               </a:rPr>
-              <a:t>TrenchVerify — From Site Photo to Compliance Audit — Automatically</a:t>
-            </a:r>
-          </a:p>
-        </p:txBody>
-      </p:sp>
-      <p:sp>
-        <p:nvSpPr>
-          <p:cNvPr id="7" name="TextBox 6"/>
-          <p:cNvSpPr txBox="1"/>
-          <p:nvPr/>
-        </p:nvSpPr>
-        <p:spPr>
-          <a:xfrm>
-            <a:off x="457200" y="4754880"/>
-            <a:ext cx="11247120" cy="457200"/>
-          </a:xfrm>
-          <a:prstGeom prst="rect">
-            <a:avLst/>
-          </a:prstGeom>
-          <a:noFill/>
-        </p:spPr>
-        <p:txBody>
-          <a:bodyPr wrap="square">
-            <a:spAutoFit/>
-          </a:bodyPr>
-          <a:lstStyle/>
-          <a:p>
-            <a:pPr algn="ctr"/>
-            <a:r>
-              <a:rPr sz="1500" b="0" i="0">
+              <a:t> : [Ahmad]  ·  [</a:t>
+            </a:r>
+            <a:r>
+              <a:rPr lang="en-US" sz="1500" dirty="0" err="1">
                 <a:solidFill>
                   <a:srgbClr val="CCD6E0"/>
                 </a:solidFill>
               </a:rPr>
-              <a:t>Team: [Name 1]  ·  [Name 2]  ·  [Name 3]</a:t>
-            </a:r>
+              <a:t>Tino</a:t>
+            </a:r>
+            <a:r>
+              <a:rPr lang="en-US" sz="1500" dirty="0">
+                <a:solidFill>
+                  <a:srgbClr val="CCD6E0"/>
+                </a:solidFill>
+              </a:rPr>
+              <a:t>]  ·  [Evgenii]  ·  [</a:t>
+            </a:r>
+            <a:r>
+              <a:rPr lang="en-US" sz="1500" dirty="0" err="1">
+                <a:solidFill>
+                  <a:srgbClr val="CCD6E0"/>
+                </a:solidFill>
+              </a:rPr>
+              <a:t>Himani</a:t>
+            </a:r>
+            <a:r>
+              <a:rPr lang="en-US" sz="1500" dirty="0">
+                <a:solidFill>
+                  <a:srgbClr val="CCD6E0"/>
+                </a:solidFill>
+              </a:rPr>
+              <a:t>]</a:t>
+            </a:r>
+            <a:endParaRPr sz="1500" b="0" i="0" dirty="0">
+              <a:solidFill>
+                <a:srgbClr val="CCD6E0"/>
+              </a:solidFill>
+            </a:endParaRPr>
           </a:p>
         </p:txBody>
       </p:sp>

--- a/APG_TrenchVerify_Pitch.pptx
+++ b/APG_TrenchVerify_Pitch.pptx
@@ -2,25 +2,25 @@
 <file path=ppt/presentation.xml><?xml version="1.0" encoding="utf-8"?>
 <p:presentation xmlns:a="http://schemas.openxmlformats.org/drawingml/2006/main" xmlns:r="http://schemas.openxmlformats.org/officeDocument/2006/relationships" xmlns:mc="http://schemas.openxmlformats.org/markup-compatibility/2006" xmlns:mv="urn:schemas-microsoft-com:mac:vml" xmlns:p="http://schemas.openxmlformats.org/presentationml/2006/main" xmlns:c="http://schemas.openxmlformats.org/drawingml/2006/chart" xmlns:dgm="http://schemas.openxmlformats.org/drawingml/2006/diagram" xmlns:o="urn:schemas-microsoft-com:office:office" xmlns:v="urn:schemas-microsoft-com:vml" xmlns:pvml="urn:schemas-microsoft-com:office:powerpoint" xmlns:com="http://schemas.openxmlformats.org/drawingml/2006/compatibility" xmlns:p14="http://schemas.microsoft.com/office/powerpoint/2010/main" xmlns:p15="http://schemas.microsoft.com/office/powerpoint/2012/main" xmlns:ahyp="http://schemas.microsoft.com/office/drawing/2018/hyperlinkcolor" autoCompressPictures="0" strictFirstAndLastChars="0" saveSubsetFonts="1">
   <p:sldMasterIdLst>
-    <p:sldMasterId id="2147483648" r:id="rId4"/>
+    <p:sldMasterId id="2147483648" r:id="rId5"/>
   </p:sldMasterIdLst>
   <p:notesMasterIdLst>
-    <p:notesMasterId r:id="rId5"/>
+    <p:notesMasterId r:id="rId6"/>
   </p:notesMasterIdLst>
   <p:sldIdLst>
-    <p:sldId id="256" r:id="rId6"/>
-    <p:sldId id="257" r:id="rId7"/>
-    <p:sldId id="258" r:id="rId8"/>
-    <p:sldId id="259" r:id="rId9"/>
-    <p:sldId id="260" r:id="rId10"/>
-    <p:sldId id="261" r:id="rId11"/>
-    <p:sldId id="262" r:id="rId12"/>
-    <p:sldId id="263" r:id="rId13"/>
-    <p:sldId id="264" r:id="rId14"/>
-    <p:sldId id="265" r:id="rId15"/>
-    <p:sldId id="266" r:id="rId16"/>
-    <p:sldId id="267" r:id="rId17"/>
-    <p:sldId id="268" r:id="rId18"/>
+    <p:sldId id="256" r:id="rId7"/>
+    <p:sldId id="257" r:id="rId8"/>
+    <p:sldId id="258" r:id="rId9"/>
+    <p:sldId id="259" r:id="rId10"/>
+    <p:sldId id="260" r:id="rId11"/>
+    <p:sldId id="261" r:id="rId12"/>
+    <p:sldId id="262" r:id="rId13"/>
+    <p:sldId id="263" r:id="rId14"/>
+    <p:sldId id="264" r:id="rId15"/>
+    <p:sldId id="265" r:id="rId16"/>
+    <p:sldId id="266" r:id="rId17"/>
+    <p:sldId id="267" r:id="rId18"/>
+    <p:sldId id="268" r:id="rId19"/>
   </p:sldIdLst>
   <p:sldSz cy="6858000" cx="12188825"/>
   <p:notesSz cx="6858000" cy="9144000"/>
@@ -269,10 +269,33 @@
       </p15:sldGuideLst>
     </p:ext>
     <p:ext uri="GoogleSlidesCustomDataVersion2">
-      <go:slidesCustomData xmlns:go="http://customooxmlschemas.google.com/" r:id="rId19" roundtripDataSignature="AMtx7mjmiGYk8qmLgbHwmuOVF2qtt3l28w=="/>
+      <go:slidesCustomData xmlns:go="http://customooxmlschemas.google.com/" r:id="rId20" roundtripDataSignature="AMtx7mh4uYVPGJMBsn4C907AYIYVj7BaWQ=="/>
     </p:ext>
   </p:extLst>
 </p:presentation>
+</file>
+
+<file path=ppt/commentAuthors.xml><?xml version="1.0" encoding="utf-8"?>
+<p:cmAuthorLst xmlns:a="http://schemas.openxmlformats.org/drawingml/2006/main" xmlns:r="http://schemas.openxmlformats.org/officeDocument/2006/relationships" xmlns:mc="http://schemas.openxmlformats.org/markup-compatibility/2006" xmlns:mv="urn:schemas-microsoft-com:mac:vml" xmlns:p="http://schemas.openxmlformats.org/presentationml/2006/main" xmlns:c="http://schemas.openxmlformats.org/drawingml/2006/chart" xmlns:dgm="http://schemas.openxmlformats.org/drawingml/2006/diagram" xmlns:o="urn:schemas-microsoft-com:office:office" xmlns:v="urn:schemas-microsoft-com:vml" xmlns:pvml="urn:schemas-microsoft-com:office:powerpoint" xmlns:com="http://schemas.openxmlformats.org/drawingml/2006/compatibility" xmlns:p14="http://schemas.microsoft.com/office/powerpoint/2010/main" xmlns:p15="http://schemas.microsoft.com/office/powerpoint/2012/main" xmlns:ahyp="http://schemas.microsoft.com/office/drawing/2018/hyperlinkcolor">
+  <p:cmAuthor clrIdx="0" id="0" initials="" lastIdx="1" name="tino _2002"/>
+</p:cmAuthorLst>
+</file>
+
+<file path=ppt/comments/comment1.xml><?xml version="1.0" encoding="utf-8"?>
+<p:cmLst xmlns:a="http://schemas.openxmlformats.org/drawingml/2006/main" xmlns:r="http://schemas.openxmlformats.org/officeDocument/2006/relationships" xmlns:mc="http://schemas.openxmlformats.org/markup-compatibility/2006" xmlns:mv="urn:schemas-microsoft-com:mac:vml" xmlns:p="http://schemas.openxmlformats.org/presentationml/2006/main" xmlns:c="http://schemas.openxmlformats.org/drawingml/2006/chart" xmlns:dgm="http://schemas.openxmlformats.org/drawingml/2006/diagram" xmlns:o="urn:schemas-microsoft-com:office:office" xmlns:v="urn:schemas-microsoft-com:vml" xmlns:pvml="urn:schemas-microsoft-com:office:powerpoint" xmlns:com="http://schemas.openxmlformats.org/drawingml/2006/compatibility" xmlns:p14="http://schemas.microsoft.com/office/powerpoint/2010/main" xmlns:p15="http://schemas.microsoft.com/office/powerpoint/2012/main" xmlns:ahyp="http://schemas.microsoft.com/office/drawing/2018/hyperlinkcolor">
+  <p:cm authorId="0" idx="1" dt="2026-05-17T09:35:03.623">
+    <p:pos x="6000" y="0"/>
+    <p:text>reason is mutually exclusive flags. Reccommend multi flag approach</p:text>
+    <p:extLst>
+      <p:ext uri="{C676402C-5697-4E1C-873F-D02D1690AC5C}">
+        <p15:threadingInfo timeZoneBias="0"/>
+      </p:ext>
+      <p:ext uri="http://customooxmlschemas.google.com/">
+        <go:slidesCustomData xmlns:go="http://customooxmlschemas.google.com/" commentPostId="AAAB6jJVkgM"/>
+      </p:ext>
+    </p:extLst>
+  </p:cm>
+</p:cmLst>
 </file>
 
 <file path=ppt/notesMasters/notesMaster1.xml><?xml version="1.0" encoding="utf-8"?>
@@ -12461,7 +12484,7 @@
           <p:nvPr/>
         </p:nvPicPr>
         <p:blipFill>
-          <a:blip r:embed="rId3">
+          <a:blip r:embed="rId4">
             <a:alphaModFix/>
           </a:blip>
           <a:stretch>
@@ -12489,7 +12512,7 @@
           <p:nvPr/>
         </p:nvPicPr>
         <p:blipFill rotWithShape="1">
-          <a:blip r:embed="rId4">
+          <a:blip r:embed="rId5">
             <a:alphaModFix/>
           </a:blip>
           <a:srcRect b="0" l="1670" r="-1670" t="0"/>
@@ -12516,7 +12539,7 @@
           <p:nvPr/>
         </p:nvPicPr>
         <p:blipFill>
-          <a:blip r:embed="rId5">
+          <a:blip r:embed="rId6">
             <a:alphaModFix/>
           </a:blip>
           <a:stretch>
@@ -13258,8 +13281,8 @@
         </p:nvSpPr>
         <p:spPr>
           <a:xfrm>
-            <a:off x="457200" y="1371600"/>
-            <a:ext cx="3566160" cy="5029200"/>
+            <a:off x="8502838" y="1371600"/>
+            <a:ext cx="3566100" cy="5029200"/>
           </a:xfrm>
           <a:prstGeom prst="rect">
             <a:avLst/>
@@ -13316,8 +13339,8 @@
         </p:nvSpPr>
         <p:spPr>
           <a:xfrm>
-            <a:off x="640080" y="1508760"/>
-            <a:ext cx="3200400" cy="822960"/>
+            <a:off x="8685718" y="1508760"/>
+            <a:ext cx="3200400" cy="708000"/>
           </a:xfrm>
           <a:prstGeom prst="rect">
             <a:avLst/>
@@ -13389,8 +13412,8 @@
         </p:nvSpPr>
         <p:spPr>
           <a:xfrm>
-            <a:off x="640080" y="2423160"/>
-            <a:ext cx="3200400" cy="3657600"/>
+            <a:off x="8685718" y="2423160"/>
+            <a:ext cx="3200400" cy="2555100"/>
           </a:xfrm>
           <a:prstGeom prst="rect">
             <a:avLst/>
@@ -13688,8 +13711,8 @@
         </p:nvSpPr>
         <p:spPr>
           <a:xfrm>
-            <a:off x="8138160" y="1371600"/>
-            <a:ext cx="3566160" cy="5029200"/>
+            <a:off x="229402" y="1392333"/>
+            <a:ext cx="3566100" cy="5029200"/>
           </a:xfrm>
           <a:prstGeom prst="rect">
             <a:avLst/>
@@ -13746,8 +13769,8 @@
         </p:nvSpPr>
         <p:spPr>
           <a:xfrm>
-            <a:off x="8321040" y="1508760"/>
-            <a:ext cx="3200400" cy="822960"/>
+            <a:off x="412282" y="1529493"/>
+            <a:ext cx="3200400" cy="708000"/>
           </a:xfrm>
           <a:prstGeom prst="rect">
             <a:avLst/>
@@ -13782,7 +13805,31 @@
                 <a:cs typeface="Calibri"/>
                 <a:sym typeface="Calibri"/>
               </a:rPr>
-              <a:t>Slow &amp;</a:t>
+              <a:t>Slow Human</a:t>
+            </a:r>
+            <a:r>
+              <a:rPr b="1" lang="en-US" sz="2000">
+                <a:solidFill>
+                  <a:srgbClr val="FFC107"/>
+                </a:solidFill>
+                <a:latin typeface="Calibri"/>
+                <a:ea typeface="Calibri"/>
+                <a:cs typeface="Calibri"/>
+                <a:sym typeface="Calibri"/>
+              </a:rPr>
+              <a:t> Review </a:t>
+            </a:r>
+            <a:r>
+              <a:rPr b="1" i="0" lang="en-US" sz="2000">
+                <a:solidFill>
+                  <a:srgbClr val="FFC107"/>
+                </a:solidFill>
+                <a:latin typeface="Calibri"/>
+                <a:ea typeface="Calibri"/>
+                <a:cs typeface="Calibri"/>
+                <a:sym typeface="Calibri"/>
+              </a:rPr>
+              <a:t>&amp;</a:t>
             </a:r>
             <a:br>
               <a:rPr b="1" i="0" lang="en-US" sz="2000">
@@ -13819,8 +13866,8 @@
         </p:nvSpPr>
         <p:spPr>
           <a:xfrm>
-            <a:off x="8321040" y="2423160"/>
-            <a:ext cx="3200400" cy="3170099"/>
+            <a:off x="412282" y="2443893"/>
+            <a:ext cx="3200400" cy="3170700"/>
           </a:xfrm>
           <a:prstGeom prst="rect">
             <a:avLst/>
@@ -19428,6 +19475,285 @@
 </file>
 
 <file path=ppt/theme/theme1.xml><?xml version="1.0" encoding="utf-8"?>
+<a:theme xmlns:a="http://schemas.openxmlformats.org/drawingml/2006/main" xmlns:r="http://schemas.openxmlformats.org/officeDocument/2006/relationships" name="Office Theme">
+  <a:themeElements>
+    <a:clrScheme name="Office">
+      <a:dk1>
+        <a:srgbClr val="000000"/>
+      </a:dk1>
+      <a:lt1>
+        <a:srgbClr val="FFFFFF"/>
+      </a:lt1>
+      <a:dk2>
+        <a:srgbClr val="1F497D"/>
+      </a:dk2>
+      <a:lt2>
+        <a:srgbClr val="EEECE1"/>
+      </a:lt2>
+      <a:accent1>
+        <a:srgbClr val="4F81BD"/>
+      </a:accent1>
+      <a:accent2>
+        <a:srgbClr val="C0504D"/>
+      </a:accent2>
+      <a:accent3>
+        <a:srgbClr val="9BBB59"/>
+      </a:accent3>
+      <a:accent4>
+        <a:srgbClr val="8064A2"/>
+      </a:accent4>
+      <a:accent5>
+        <a:srgbClr val="4BACC6"/>
+      </a:accent5>
+      <a:accent6>
+        <a:srgbClr val="F79646"/>
+      </a:accent6>
+      <a:hlink>
+        <a:srgbClr val="0000FF"/>
+      </a:hlink>
+      <a:folHlink>
+        <a:srgbClr val="800080"/>
+      </a:folHlink>
+    </a:clrScheme>
+    <a:fontScheme name="Office">
+      <a:majorFont>
+        <a:latin typeface="Arial"/>
+        <a:ea typeface=""/>
+        <a:cs typeface=""/>
+        <a:font script="Jpan" typeface="ＭＳ Ｐゴシック"/>
+        <a:font script="Hang" typeface="맑은 고딕"/>
+        <a:font script="Hans" typeface="宋体"/>
+        <a:font script="Hant" typeface="新細明體"/>
+        <a:font script="Arab" typeface="Times New Roman"/>
+        <a:font script="Hebr" typeface="Times New Roman"/>
+        <a:font script="Thai" typeface="Angsana New"/>
+        <a:font script="Ethi" typeface="Nyala"/>
+        <a:font script="Beng" typeface="Vrinda"/>
+        <a:font script="Gujr" typeface="Shruti"/>
+        <a:font script="Khmr" typeface="MoolBoran"/>
+        <a:font script="Knda" typeface="Tunga"/>
+        <a:font script="Guru" typeface="Raavi"/>
+        <a:font script="Cans" typeface="Euphemia"/>
+        <a:font script="Cher" typeface="Plantagenet Cherokee"/>
+        <a:font script="Yiii" typeface="Microsoft Yi Baiti"/>
+        <a:font script="Tibt" typeface="Microsoft Himalaya"/>
+        <a:font script="Thaa" typeface="MV Boli"/>
+        <a:font script="Deva" typeface="Mangal"/>
+        <a:font script="Telu" typeface="Gautami"/>
+        <a:font script="Taml" typeface="Latha"/>
+        <a:font script="Syrc" typeface="Estrangelo Edessa"/>
+        <a:font script="Orya" typeface="Kalinga"/>
+        <a:font script="Mlym" typeface="Kartika"/>
+        <a:font script="Laoo" typeface="DokChampa"/>
+        <a:font script="Sinh" typeface="Iskoola Pota"/>
+        <a:font script="Mong" typeface="Mongolian Baiti"/>
+        <a:font script="Viet" typeface="Times New Roman"/>
+        <a:font script="Uigh" typeface="Microsoft Uighur"/>
+        <a:font script="Geor" typeface="Sylfaen"/>
+      </a:majorFont>
+      <a:minorFont>
+        <a:latin typeface="Arial"/>
+        <a:ea typeface=""/>
+        <a:cs typeface=""/>
+        <a:font script="Jpan" typeface="ＭＳ Ｐゴシック"/>
+        <a:font script="Hang" typeface="맑은 고딕"/>
+        <a:font script="Hans" typeface="宋体"/>
+        <a:font script="Hant" typeface="新細明體"/>
+        <a:font script="Arab" typeface="Arial"/>
+        <a:font script="Hebr" typeface="Arial"/>
+        <a:font script="Thai" typeface="Cordia New"/>
+        <a:font script="Ethi" typeface="Nyala"/>
+        <a:font script="Beng" typeface="Vrinda"/>
+        <a:font script="Gujr" typeface="Shruti"/>
+        <a:font script="Khmr" typeface="DaunPenh"/>
+        <a:font script="Knda" typeface="Tunga"/>
+        <a:font script="Guru" typeface="Raavi"/>
+        <a:font script="Cans" typeface="Euphemia"/>
+        <a:font script="Cher" typeface="Plantagenet Cherokee"/>
+        <a:font script="Yiii" typeface="Microsoft Yi Baiti"/>
+        <a:font script="Tibt" typeface="Microsoft Himalaya"/>
+        <a:font script="Thaa" typeface="MV Boli"/>
+        <a:font script="Deva" typeface="Mangal"/>
+        <a:font script="Telu" typeface="Gautami"/>
+        <a:font script="Taml" typeface="Latha"/>
+        <a:font script="Syrc" typeface="Estrangelo Edessa"/>
+        <a:font script="Orya" typeface="Kalinga"/>
+        <a:font script="Mlym" typeface="Kartika"/>
+        <a:font script="Laoo" typeface="DokChampa"/>
+        <a:font script="Sinh" typeface="Iskoola Pota"/>
+        <a:font script="Mong" typeface="Mongolian Baiti"/>
+        <a:font script="Viet" typeface="Arial"/>
+        <a:font script="Uigh" typeface="Microsoft Uighur"/>
+        <a:font script="Geor" typeface="Sylfaen"/>
+      </a:minorFont>
+    </a:fontScheme>
+    <a:fmtScheme name="Office">
+      <a:fillStyleLst>
+        <a:solidFill>
+          <a:schemeClr val="phClr"/>
+        </a:solidFill>
+        <a:gradFill rotWithShape="1">
+          <a:gsLst>
+            <a:gs pos="0">
+              <a:schemeClr val="phClr">
+                <a:tint val="50000"/>
+                <a:satMod val="300000"/>
+              </a:schemeClr>
+            </a:gs>
+            <a:gs pos="35000">
+              <a:schemeClr val="phClr">
+                <a:tint val="37000"/>
+                <a:satMod val="300000"/>
+              </a:schemeClr>
+            </a:gs>
+            <a:gs pos="100000">
+              <a:schemeClr val="phClr">
+                <a:tint val="15000"/>
+                <a:satMod val="350000"/>
+              </a:schemeClr>
+            </a:gs>
+          </a:gsLst>
+          <a:lin ang="16200000" scaled="1"/>
+        </a:gradFill>
+        <a:gradFill rotWithShape="1">
+          <a:gsLst>
+            <a:gs pos="0">
+              <a:schemeClr val="phClr">
+                <a:tint val="100000"/>
+                <a:shade val="100000"/>
+                <a:satMod val="130000"/>
+              </a:schemeClr>
+            </a:gs>
+            <a:gs pos="100000">
+              <a:schemeClr val="phClr">
+                <a:tint val="50000"/>
+                <a:shade val="100000"/>
+                <a:satMod val="350000"/>
+              </a:schemeClr>
+            </a:gs>
+          </a:gsLst>
+          <a:lin ang="16200000" scaled="0"/>
+        </a:gradFill>
+      </a:fillStyleLst>
+      <a:lnStyleLst>
+        <a:ln w="9525" cap="flat" cmpd="sng" algn="ctr">
+          <a:solidFill>
+            <a:schemeClr val="phClr">
+              <a:shade val="95000"/>
+              <a:satMod val="105000"/>
+            </a:schemeClr>
+          </a:solidFill>
+          <a:prstDash val="solid"/>
+        </a:ln>
+        <a:ln w="25400" cap="flat" cmpd="sng" algn="ctr">
+          <a:solidFill>
+            <a:schemeClr val="phClr"/>
+          </a:solidFill>
+          <a:prstDash val="solid"/>
+        </a:ln>
+        <a:ln w="38100" cap="flat" cmpd="sng" algn="ctr">
+          <a:solidFill>
+            <a:schemeClr val="phClr"/>
+          </a:solidFill>
+          <a:prstDash val="solid"/>
+        </a:ln>
+      </a:lnStyleLst>
+      <a:effectStyleLst>
+        <a:effectStyle>
+          <a:effectLst>
+            <a:outerShdw blurRad="40000" dist="20000" dir="5400000" rotWithShape="0">
+              <a:srgbClr val="000000">
+                <a:alpha val="38000"/>
+              </a:srgbClr>
+            </a:outerShdw>
+          </a:effectLst>
+        </a:effectStyle>
+        <a:effectStyle>
+          <a:effectLst>
+            <a:outerShdw blurRad="40000" dist="23000" dir="5400000" rotWithShape="0">
+              <a:srgbClr val="000000">
+                <a:alpha val="35000"/>
+              </a:srgbClr>
+            </a:outerShdw>
+          </a:effectLst>
+        </a:effectStyle>
+        <a:effectStyle>
+          <a:effectLst>
+            <a:outerShdw blurRad="40000" dist="23000" dir="5400000" rotWithShape="0">
+              <a:srgbClr val="000000">
+                <a:alpha val="35000"/>
+              </a:srgbClr>
+            </a:outerShdw>
+          </a:effectLst>
+          <a:scene3d>
+            <a:camera prst="orthographicFront">
+              <a:rot lat="0" lon="0" rev="0"/>
+            </a:camera>
+            <a:lightRig rig="threePt" dir="t">
+              <a:rot lat="0" lon="0" rev="1200000"/>
+            </a:lightRig>
+          </a:scene3d>
+          <a:sp3d>
+            <a:bevelT w="63500" h="25400"/>
+          </a:sp3d>
+        </a:effectStyle>
+      </a:effectStyleLst>
+      <a:bgFillStyleLst>
+        <a:solidFill>
+          <a:schemeClr val="phClr"/>
+        </a:solidFill>
+        <a:gradFill rotWithShape="1">
+          <a:gsLst>
+            <a:gs pos="0">
+              <a:schemeClr val="phClr">
+                <a:tint val="40000"/>
+                <a:satMod val="350000"/>
+              </a:schemeClr>
+            </a:gs>
+            <a:gs pos="40000">
+              <a:schemeClr val="phClr">
+                <a:tint val="45000"/>
+                <a:shade val="99000"/>
+                <a:satMod val="350000"/>
+              </a:schemeClr>
+            </a:gs>
+            <a:gs pos="100000">
+              <a:schemeClr val="phClr">
+                <a:shade val="20000"/>
+                <a:satMod val="255000"/>
+              </a:schemeClr>
+            </a:gs>
+          </a:gsLst>
+          <a:path path="circle">
+            <a:fillToRect l="50000" t="-80000" r="50000" b="180000"/>
+          </a:path>
+        </a:gradFill>
+        <a:gradFill rotWithShape="1">
+          <a:gsLst>
+            <a:gs pos="0">
+              <a:schemeClr val="phClr">
+                <a:tint val="80000"/>
+                <a:satMod val="300000"/>
+              </a:schemeClr>
+            </a:gs>
+            <a:gs pos="100000">
+              <a:schemeClr val="phClr">
+                <a:shade val="30000"/>
+                <a:satMod val="200000"/>
+              </a:schemeClr>
+            </a:gs>
+          </a:gsLst>
+          <a:path path="circle">
+            <a:fillToRect l="50000" t="50000" r="50000" b="50000"/>
+          </a:path>
+        </a:gradFill>
+      </a:bgFillStyleLst>
+    </a:fmtScheme>
+  </a:themeElements>
+</a:theme>
+</file>
+
+<file path=ppt/theme/theme2.xml><?xml version="1.0" encoding="utf-8"?>
 <a:theme xmlns:a="http://schemas.openxmlformats.org/drawingml/2006/main" xmlns:r="http://schemas.openxmlformats.org/officeDocument/2006/relationships">
   <a:themeElements>
     <a:clrScheme name="Default">
@@ -19704,283 +20030,4 @@
     </a:fmtScheme>
   </a:themeElements>
 </a:theme>
-</file>
-
-<file path=ppt/theme/theme2.xml><?xml version="1.0" encoding="utf-8"?>
-<a:theme xmlns:a="http://schemas.openxmlformats.org/drawingml/2006/main" xmlns:r="http://schemas.openxmlformats.org/officeDocument/2006/relationships" name="Office Theme">
-  <a:themeElements>
-    <a:clrScheme name="Office">
-      <a:dk1>
-        <a:srgbClr val="000000"/>
-      </a:dk1>
-      <a:lt1>
-        <a:srgbClr val="FFFFFF"/>
-      </a:lt1>
-      <a:dk2>
-        <a:srgbClr val="1F497D"/>
-      </a:dk2>
-      <a:lt2>
-        <a:srgbClr val="EEECE1"/>
-      </a:lt2>
-      <a:accent1>
-        <a:srgbClr val="4F81BD"/>
-      </a:accent1>
-      <a:accent2>
-        <a:srgbClr val="C0504D"/>
-      </a:accent2>
-      <a:accent3>
-        <a:srgbClr val="9BBB59"/>
-      </a:accent3>
-      <a:accent4>
-        <a:srgbClr val="8064A2"/>
-      </a:accent4>
-      <a:accent5>
-        <a:srgbClr val="4BACC6"/>
-      </a:accent5>
-      <a:accent6>
-        <a:srgbClr val="F79646"/>
-      </a:accent6>
-      <a:hlink>
-        <a:srgbClr val="0000FF"/>
-      </a:hlink>
-      <a:folHlink>
-        <a:srgbClr val="800080"/>
-      </a:folHlink>
-    </a:clrScheme>
-    <a:fontScheme name="Office">
-      <a:majorFont>
-        <a:latin typeface="Arial"/>
-        <a:ea typeface=""/>
-        <a:cs typeface=""/>
-        <a:font script="Jpan" typeface="ＭＳ Ｐゴシック"/>
-        <a:font script="Hang" typeface="맑은 고딕"/>
-        <a:font script="Hans" typeface="宋体"/>
-        <a:font script="Hant" typeface="新細明體"/>
-        <a:font script="Arab" typeface="Times New Roman"/>
-        <a:font script="Hebr" typeface="Times New Roman"/>
-        <a:font script="Thai" typeface="Angsana New"/>
-        <a:font script="Ethi" typeface="Nyala"/>
-        <a:font script="Beng" typeface="Vrinda"/>
-        <a:font script="Gujr" typeface="Shruti"/>
-        <a:font script="Khmr" typeface="MoolBoran"/>
-        <a:font script="Knda" typeface="Tunga"/>
-        <a:font script="Guru" typeface="Raavi"/>
-        <a:font script="Cans" typeface="Euphemia"/>
-        <a:font script="Cher" typeface="Plantagenet Cherokee"/>
-        <a:font script="Yiii" typeface="Microsoft Yi Baiti"/>
-        <a:font script="Tibt" typeface="Microsoft Himalaya"/>
-        <a:font script="Thaa" typeface="MV Boli"/>
-        <a:font script="Deva" typeface="Mangal"/>
-        <a:font script="Telu" typeface="Gautami"/>
-        <a:font script="Taml" typeface="Latha"/>
-        <a:font script="Syrc" typeface="Estrangelo Edessa"/>
-        <a:font script="Orya" typeface="Kalinga"/>
-        <a:font script="Mlym" typeface="Kartika"/>
-        <a:font script="Laoo" typeface="DokChampa"/>
-        <a:font script="Sinh" typeface="Iskoola Pota"/>
-        <a:font script="Mong" typeface="Mongolian Baiti"/>
-        <a:font script="Viet" typeface="Times New Roman"/>
-        <a:font script="Uigh" typeface="Microsoft Uighur"/>
-        <a:font script="Geor" typeface="Sylfaen"/>
-      </a:majorFont>
-      <a:minorFont>
-        <a:latin typeface="Arial"/>
-        <a:ea typeface=""/>
-        <a:cs typeface=""/>
-        <a:font script="Jpan" typeface="ＭＳ Ｐゴシック"/>
-        <a:font script="Hang" typeface="맑은 고딕"/>
-        <a:font script="Hans" typeface="宋体"/>
-        <a:font script="Hant" typeface="新細明體"/>
-        <a:font script="Arab" typeface="Arial"/>
-        <a:font script="Hebr" typeface="Arial"/>
-        <a:font script="Thai" typeface="Cordia New"/>
-        <a:font script="Ethi" typeface="Nyala"/>
-        <a:font script="Beng" typeface="Vrinda"/>
-        <a:font script="Gujr" typeface="Shruti"/>
-        <a:font script="Khmr" typeface="DaunPenh"/>
-        <a:font script="Knda" typeface="Tunga"/>
-        <a:font script="Guru" typeface="Raavi"/>
-        <a:font script="Cans" typeface="Euphemia"/>
-        <a:font script="Cher" typeface="Plantagenet Cherokee"/>
-        <a:font script="Yiii" typeface="Microsoft Yi Baiti"/>
-        <a:font script="Tibt" typeface="Microsoft Himalaya"/>
-        <a:font script="Thaa" typeface="MV Boli"/>
-        <a:font script="Deva" typeface="Mangal"/>
-        <a:font script="Telu" typeface="Gautami"/>
-        <a:font script="Taml" typeface="Latha"/>
-        <a:font script="Syrc" typeface="Estrangelo Edessa"/>
-        <a:font script="Orya" typeface="Kalinga"/>
-        <a:font script="Mlym" typeface="Kartika"/>
-        <a:font script="Laoo" typeface="DokChampa"/>
-        <a:font script="Sinh" typeface="Iskoola Pota"/>
-        <a:font script="Mong" typeface="Mongolian Baiti"/>
-        <a:font script="Viet" typeface="Arial"/>
-        <a:font script="Uigh" typeface="Microsoft Uighur"/>
-        <a:font script="Geor" typeface="Sylfaen"/>
-      </a:minorFont>
-    </a:fontScheme>
-    <a:fmtScheme name="Office">
-      <a:fillStyleLst>
-        <a:solidFill>
-          <a:schemeClr val="phClr"/>
-        </a:solidFill>
-        <a:gradFill rotWithShape="1">
-          <a:gsLst>
-            <a:gs pos="0">
-              <a:schemeClr val="phClr">
-                <a:tint val="50000"/>
-                <a:satMod val="300000"/>
-              </a:schemeClr>
-            </a:gs>
-            <a:gs pos="35000">
-              <a:schemeClr val="phClr">
-                <a:tint val="37000"/>
-                <a:satMod val="300000"/>
-              </a:schemeClr>
-            </a:gs>
-            <a:gs pos="100000">
-              <a:schemeClr val="phClr">
-                <a:tint val="15000"/>
-                <a:satMod val="350000"/>
-              </a:schemeClr>
-            </a:gs>
-          </a:gsLst>
-          <a:lin ang="16200000" scaled="1"/>
-        </a:gradFill>
-        <a:gradFill rotWithShape="1">
-          <a:gsLst>
-            <a:gs pos="0">
-              <a:schemeClr val="phClr">
-                <a:tint val="100000"/>
-                <a:shade val="100000"/>
-                <a:satMod val="130000"/>
-              </a:schemeClr>
-            </a:gs>
-            <a:gs pos="100000">
-              <a:schemeClr val="phClr">
-                <a:tint val="50000"/>
-                <a:shade val="100000"/>
-                <a:satMod val="350000"/>
-              </a:schemeClr>
-            </a:gs>
-          </a:gsLst>
-          <a:lin ang="16200000" scaled="0"/>
-        </a:gradFill>
-      </a:fillStyleLst>
-      <a:lnStyleLst>
-        <a:ln w="9525" cap="flat" cmpd="sng" algn="ctr">
-          <a:solidFill>
-            <a:schemeClr val="phClr">
-              <a:shade val="95000"/>
-              <a:satMod val="105000"/>
-            </a:schemeClr>
-          </a:solidFill>
-          <a:prstDash val="solid"/>
-        </a:ln>
-        <a:ln w="25400" cap="flat" cmpd="sng" algn="ctr">
-          <a:solidFill>
-            <a:schemeClr val="phClr"/>
-          </a:solidFill>
-          <a:prstDash val="solid"/>
-        </a:ln>
-        <a:ln w="38100" cap="flat" cmpd="sng" algn="ctr">
-          <a:solidFill>
-            <a:schemeClr val="phClr"/>
-          </a:solidFill>
-          <a:prstDash val="solid"/>
-        </a:ln>
-      </a:lnStyleLst>
-      <a:effectStyleLst>
-        <a:effectStyle>
-          <a:effectLst>
-            <a:outerShdw blurRad="40000" dist="20000" dir="5400000" rotWithShape="0">
-              <a:srgbClr val="000000">
-                <a:alpha val="38000"/>
-              </a:srgbClr>
-            </a:outerShdw>
-          </a:effectLst>
-        </a:effectStyle>
-        <a:effectStyle>
-          <a:effectLst>
-            <a:outerShdw blurRad="40000" dist="23000" dir="5400000" rotWithShape="0">
-              <a:srgbClr val="000000">
-                <a:alpha val="35000"/>
-              </a:srgbClr>
-            </a:outerShdw>
-          </a:effectLst>
-        </a:effectStyle>
-        <a:effectStyle>
-          <a:effectLst>
-            <a:outerShdw blurRad="40000" dist="23000" dir="5400000" rotWithShape="0">
-              <a:srgbClr val="000000">
-                <a:alpha val="35000"/>
-              </a:srgbClr>
-            </a:outerShdw>
-          </a:effectLst>
-          <a:scene3d>
-            <a:camera prst="orthographicFront">
-              <a:rot lat="0" lon="0" rev="0"/>
-            </a:camera>
-            <a:lightRig rig="threePt" dir="t">
-              <a:rot lat="0" lon="0" rev="1200000"/>
-            </a:lightRig>
-          </a:scene3d>
-          <a:sp3d>
-            <a:bevelT w="63500" h="25400"/>
-          </a:sp3d>
-        </a:effectStyle>
-      </a:effectStyleLst>
-      <a:bgFillStyleLst>
-        <a:solidFill>
-          <a:schemeClr val="phClr"/>
-        </a:solidFill>
-        <a:gradFill rotWithShape="1">
-          <a:gsLst>
-            <a:gs pos="0">
-              <a:schemeClr val="phClr">
-                <a:tint val="40000"/>
-                <a:satMod val="350000"/>
-              </a:schemeClr>
-            </a:gs>
-            <a:gs pos="40000">
-              <a:schemeClr val="phClr">
-                <a:tint val="45000"/>
-                <a:shade val="99000"/>
-                <a:satMod val="350000"/>
-              </a:schemeClr>
-            </a:gs>
-            <a:gs pos="100000">
-              <a:schemeClr val="phClr">
-                <a:shade val="20000"/>
-                <a:satMod val="255000"/>
-              </a:schemeClr>
-            </a:gs>
-          </a:gsLst>
-          <a:path path="circle">
-            <a:fillToRect l="50000" t="-80000" r="50000" b="180000"/>
-          </a:path>
-        </a:gradFill>
-        <a:gradFill rotWithShape="1">
-          <a:gsLst>
-            <a:gs pos="0">
-              <a:schemeClr val="phClr">
-                <a:tint val="80000"/>
-                <a:satMod val="300000"/>
-              </a:schemeClr>
-            </a:gs>
-            <a:gs pos="100000">
-              <a:schemeClr val="phClr">
-                <a:shade val="30000"/>
-                <a:satMod val="200000"/>
-              </a:schemeClr>
-            </a:gs>
-          </a:gsLst>
-          <a:path path="circle">
-            <a:fillToRect l="50000" t="50000" r="50000" b="50000"/>
-          </a:path>
-        </a:gradFill>
-      </a:bgFillStyleLst>
-    </a:fmtScheme>
-  </a:themeElements>
-</a:theme>
 </file>
--- a/APG_TrenchVerify_Pitch.pptx
+++ b/APG_TrenchVerify_Pitch.pptx
@@ -269,7 +269,7 @@
       </p15:sldGuideLst>
     </p:ext>
     <p:ext uri="GoogleSlidesCustomDataVersion2">
-      <go:slidesCustomData xmlns:go="http://customooxmlschemas.google.com/" r:id="rId20" roundtripDataSignature="AMtx7mh4uYVPGJMBsn4C907AYIYVj7BaWQ=="/>
+      <go:slidesCustomData xmlns:go="http://customooxmlschemas.google.com/" r:id="rId20" roundtripDataSignature="AMtx7miMs7rhwdUjbb5KvReLb7iBeQEvSQ=="/>
     </p:ext>
   </p:extLst>
 </p:presentation>
@@ -828,7 +828,7 @@
   <p:cSld>
     <p:spTree>
       <p:nvGrpSpPr>
-        <p:cNvPr id="221" name="Shape 221"/>
+        <p:cNvPr id="222" name="Shape 222"/>
         <p:cNvGrpSpPr/>
         <p:nvPr/>
       </p:nvGrpSpPr>
@@ -842,7 +842,7 @@
       </p:grpSpPr>
       <p:sp>
         <p:nvSpPr>
-          <p:cNvPr id="222" name="Google Shape;222;g3e2a95130a1_0_47:notes"/>
+          <p:cNvPr id="223" name="Google Shape;223;g3e2a95130a1_0_47:notes"/>
           <p:cNvSpPr txBox="1"/>
           <p:nvPr>
             <p:ph idx="1" type="body"/>
@@ -881,7 +881,7 @@
       </p:sp>
       <p:sp>
         <p:nvSpPr>
-          <p:cNvPr id="223" name="Google Shape;223;g3e2a95130a1_0_47:notes"/>
+          <p:cNvPr id="224" name="Google Shape;224;g3e2a95130a1_0_47:notes"/>
           <p:cNvSpPr/>
           <p:nvPr>
             <p:ph idx="2" type="sldImg"/>
@@ -927,7 +927,7 @@
   <p:cSld>
     <p:spTree>
       <p:nvGrpSpPr>
-        <p:cNvPr id="230" name="Shape 230"/>
+        <p:cNvPr id="231" name="Shape 231"/>
         <p:cNvGrpSpPr/>
         <p:nvPr/>
       </p:nvGrpSpPr>
@@ -941,7 +941,7 @@
       </p:grpSpPr>
       <p:sp>
         <p:nvSpPr>
-          <p:cNvPr id="231" name="Google Shape;231;g3e2a95130a1_0_26:notes"/>
+          <p:cNvPr id="232" name="Google Shape;232;g3e2a95130a1_0_26:notes"/>
           <p:cNvSpPr txBox="1"/>
           <p:nvPr>
             <p:ph idx="1" type="body"/>
@@ -980,7 +980,7 @@
       </p:sp>
       <p:sp>
         <p:nvSpPr>
-          <p:cNvPr id="232" name="Google Shape;232;g3e2a95130a1_0_26:notes"/>
+          <p:cNvPr id="233" name="Google Shape;233;g3e2a95130a1_0_26:notes"/>
           <p:cNvSpPr/>
           <p:nvPr>
             <p:ph idx="2" type="sldImg"/>
@@ -1026,7 +1026,7 @@
   <p:cSld>
     <p:spTree>
       <p:nvGrpSpPr>
-        <p:cNvPr id="240" name="Shape 240"/>
+        <p:cNvPr id="241" name="Shape 241"/>
         <p:cNvGrpSpPr/>
         <p:nvPr/>
       </p:nvGrpSpPr>
@@ -1040,7 +1040,7 @@
       </p:grpSpPr>
       <p:sp>
         <p:nvSpPr>
-          <p:cNvPr id="241" name="Google Shape;241;g3e2a95130a1_2_8:notes"/>
+          <p:cNvPr id="242" name="Google Shape;242;g3e2a95130a1_2_8:notes"/>
           <p:cNvSpPr/>
           <p:nvPr>
             <p:ph idx="2" type="sldImg"/>
@@ -1075,7 +1075,7 @@
       </p:sp>
       <p:sp>
         <p:nvSpPr>
-          <p:cNvPr id="242" name="Google Shape;242;g3e2a95130a1_2_8:notes"/>
+          <p:cNvPr id="243" name="Google Shape;243;g3e2a95130a1_2_8:notes"/>
           <p:cNvSpPr txBox="1"/>
           <p:nvPr>
             <p:ph idx="1" type="body"/>
@@ -1125,7 +1125,7 @@
   <p:cSld>
     <p:spTree>
       <p:nvGrpSpPr>
-        <p:cNvPr id="246" name="Shape 246"/>
+        <p:cNvPr id="247" name="Shape 247"/>
         <p:cNvGrpSpPr/>
         <p:nvPr/>
       </p:nvGrpSpPr>
@@ -1139,7 +1139,7 @@
       </p:grpSpPr>
       <p:sp>
         <p:nvSpPr>
-          <p:cNvPr id="247" name="Google Shape;247;p8:notes"/>
+          <p:cNvPr id="248" name="Google Shape;248;p8:notes"/>
           <p:cNvSpPr txBox="1"/>
           <p:nvPr>
             <p:ph idx="1" type="body"/>
@@ -1178,7 +1178,7 @@
       </p:sp>
       <p:sp>
         <p:nvSpPr>
-          <p:cNvPr id="248" name="Google Shape;248;p8:notes"/>
+          <p:cNvPr id="249" name="Google Shape;249;p8:notes"/>
           <p:cNvSpPr/>
           <p:nvPr>
             <p:ph idx="2" type="sldImg"/>
@@ -1224,7 +1224,7 @@
   <p:cSld>
     <p:spTree>
       <p:nvGrpSpPr>
-        <p:cNvPr id="91" name="Shape 91"/>
+        <p:cNvPr id="92" name="Shape 92"/>
         <p:cNvGrpSpPr/>
         <p:nvPr/>
       </p:nvGrpSpPr>
@@ -1238,7 +1238,7 @@
       </p:grpSpPr>
       <p:sp>
         <p:nvSpPr>
-          <p:cNvPr id="92" name="Google Shape;92;p2:notes"/>
+          <p:cNvPr id="93" name="Google Shape;93;p2:notes"/>
           <p:cNvSpPr txBox="1"/>
           <p:nvPr>
             <p:ph idx="1" type="body"/>
@@ -1277,7 +1277,7 @@
       </p:sp>
       <p:sp>
         <p:nvSpPr>
-          <p:cNvPr id="93" name="Google Shape;93;p2:notes"/>
+          <p:cNvPr id="94" name="Google Shape;94;p2:notes"/>
           <p:cNvSpPr/>
           <p:nvPr>
             <p:ph idx="2" type="sldImg"/>
@@ -1323,7 +1323,7 @@
   <p:cSld>
     <p:spTree>
       <p:nvGrpSpPr>
-        <p:cNvPr id="107" name="Shape 107"/>
+        <p:cNvPr id="108" name="Shape 108"/>
         <p:cNvGrpSpPr/>
         <p:nvPr/>
       </p:nvGrpSpPr>
@@ -1337,7 +1337,7 @@
       </p:grpSpPr>
       <p:sp>
         <p:nvSpPr>
-          <p:cNvPr id="108" name="Google Shape;108;p3:notes"/>
+          <p:cNvPr id="109" name="Google Shape;109;p3:notes"/>
           <p:cNvSpPr txBox="1"/>
           <p:nvPr>
             <p:ph idx="1" type="body"/>
@@ -1376,7 +1376,7 @@
       </p:sp>
       <p:sp>
         <p:nvSpPr>
-          <p:cNvPr id="109" name="Google Shape;109;p3:notes"/>
+          <p:cNvPr id="110" name="Google Shape;110;p3:notes"/>
           <p:cNvSpPr/>
           <p:nvPr>
             <p:ph idx="2" type="sldImg"/>
@@ -1422,7 +1422,7 @@
   <p:cSld>
     <p:spTree>
       <p:nvGrpSpPr>
-        <p:cNvPr id="127" name="Shape 127"/>
+        <p:cNvPr id="128" name="Shape 128"/>
         <p:cNvGrpSpPr/>
         <p:nvPr/>
       </p:nvGrpSpPr>
@@ -1436,7 +1436,7 @@
       </p:grpSpPr>
       <p:sp>
         <p:nvSpPr>
-          <p:cNvPr id="128" name="Google Shape;128;p4:notes"/>
+          <p:cNvPr id="129" name="Google Shape;129;p4:notes"/>
           <p:cNvSpPr txBox="1"/>
           <p:nvPr>
             <p:ph idx="1" type="body"/>
@@ -1475,7 +1475,7 @@
       </p:sp>
       <p:sp>
         <p:nvSpPr>
-          <p:cNvPr id="129" name="Google Shape;129;p4:notes"/>
+          <p:cNvPr id="130" name="Google Shape;130;p4:notes"/>
           <p:cNvSpPr/>
           <p:nvPr>
             <p:ph idx="2" type="sldImg"/>
@@ -1521,7 +1521,7 @@
   <p:cSld>
     <p:spTree>
       <p:nvGrpSpPr>
-        <p:cNvPr id="150" name="Shape 150"/>
+        <p:cNvPr id="151" name="Shape 151"/>
         <p:cNvGrpSpPr/>
         <p:nvPr/>
       </p:nvGrpSpPr>
@@ -1535,7 +1535,7 @@
       </p:grpSpPr>
       <p:sp>
         <p:nvSpPr>
-          <p:cNvPr id="151" name="Google Shape;151;g3e2a95130a1_0_58:notes"/>
+          <p:cNvPr id="152" name="Google Shape;152;g3e2a95130a1_0_58:notes"/>
           <p:cNvSpPr/>
           <p:nvPr>
             <p:ph idx="2" type="sldImg"/>
@@ -1570,7 +1570,7 @@
       </p:sp>
       <p:sp>
         <p:nvSpPr>
-          <p:cNvPr id="152" name="Google Shape;152;g3e2a95130a1_0_58:notes"/>
+          <p:cNvPr id="153" name="Google Shape;153;g3e2a95130a1_0_58:notes"/>
           <p:cNvSpPr txBox="1"/>
           <p:nvPr>
             <p:ph idx="1" type="body"/>
@@ -1620,7 +1620,7 @@
   <p:cSld>
     <p:spTree>
       <p:nvGrpSpPr>
-        <p:cNvPr id="155" name="Shape 155"/>
+        <p:cNvPr id="156" name="Shape 156"/>
         <p:cNvGrpSpPr/>
         <p:nvPr/>
       </p:nvGrpSpPr>
@@ -1634,7 +1634,7 @@
       </p:grpSpPr>
       <p:sp>
         <p:nvSpPr>
-          <p:cNvPr id="156" name="Google Shape;156;g3e2a95130a1_0_3:notes"/>
+          <p:cNvPr id="157" name="Google Shape;157;g3e2a95130a1_0_3:notes"/>
           <p:cNvSpPr txBox="1"/>
           <p:nvPr>
             <p:ph idx="1" type="body"/>
@@ -1673,7 +1673,7 @@
       </p:sp>
       <p:sp>
         <p:nvSpPr>
-          <p:cNvPr id="157" name="Google Shape;157;g3e2a95130a1_0_3:notes"/>
+          <p:cNvPr id="158" name="Google Shape;158;g3e2a95130a1_0_3:notes"/>
           <p:cNvSpPr/>
           <p:nvPr>
             <p:ph idx="2" type="sldImg"/>
@@ -1719,7 +1719,7 @@
   <p:cSld>
     <p:spTree>
       <p:nvGrpSpPr>
-        <p:cNvPr id="166" name="Shape 166"/>
+        <p:cNvPr id="167" name="Shape 167"/>
         <p:cNvGrpSpPr/>
         <p:nvPr/>
       </p:nvGrpSpPr>
@@ -1733,7 +1733,7 @@
       </p:grpSpPr>
       <p:sp>
         <p:nvSpPr>
-          <p:cNvPr id="167" name="Google Shape;167;g3e2a95130a1_0_63:notes"/>
+          <p:cNvPr id="168" name="Google Shape;168;g3e2a95130a1_0_63:notes"/>
           <p:cNvSpPr txBox="1"/>
           <p:nvPr>
             <p:ph idx="1" type="body"/>
@@ -1772,7 +1772,7 @@
       </p:sp>
       <p:sp>
         <p:nvSpPr>
-          <p:cNvPr id="168" name="Google Shape;168;g3e2a95130a1_0_63:notes"/>
+          <p:cNvPr id="169" name="Google Shape;169;g3e2a95130a1_0_63:notes"/>
           <p:cNvSpPr/>
           <p:nvPr>
             <p:ph idx="2" type="sldImg"/>
@@ -1818,7 +1818,7 @@
   <p:cSld>
     <p:spTree>
       <p:nvGrpSpPr>
-        <p:cNvPr id="175" name="Shape 175"/>
+        <p:cNvPr id="176" name="Shape 176"/>
         <p:cNvGrpSpPr/>
         <p:nvPr/>
       </p:nvGrpSpPr>
@@ -1832,7 +1832,7 @@
       </p:grpSpPr>
       <p:sp>
         <p:nvSpPr>
-          <p:cNvPr id="176" name="Google Shape;176;p6:notes"/>
+          <p:cNvPr id="177" name="Google Shape;177;p6:notes"/>
           <p:cNvSpPr txBox="1"/>
           <p:nvPr>
             <p:ph idx="1" type="body"/>
@@ -1871,7 +1871,7 @@
       </p:sp>
       <p:sp>
         <p:nvSpPr>
-          <p:cNvPr id="177" name="Google Shape;177;p6:notes"/>
+          <p:cNvPr id="178" name="Google Shape;178;p6:notes"/>
           <p:cNvSpPr/>
           <p:nvPr>
             <p:ph idx="2" type="sldImg"/>
@@ -1917,7 +1917,7 @@
   <p:cSld>
     <p:spTree>
       <p:nvGrpSpPr>
-        <p:cNvPr id="198" name="Shape 198"/>
+        <p:cNvPr id="199" name="Shape 199"/>
         <p:cNvGrpSpPr/>
         <p:nvPr/>
       </p:nvGrpSpPr>
@@ -1931,7 +1931,7 @@
       </p:grpSpPr>
       <p:sp>
         <p:nvSpPr>
-          <p:cNvPr id="199" name="Google Shape;199;p7:notes"/>
+          <p:cNvPr id="200" name="Google Shape;200;p7:notes"/>
           <p:cNvSpPr txBox="1"/>
           <p:nvPr>
             <p:ph idx="1" type="body"/>
@@ -1970,7 +1970,7 @@
       </p:sp>
       <p:sp>
         <p:nvSpPr>
-          <p:cNvPr id="200" name="Google Shape;200;p7:notes"/>
+          <p:cNvPr id="201" name="Google Shape;201;p7:notes"/>
           <p:cNvSpPr/>
           <p:nvPr>
             <p:ph idx="2" type="sldImg"/>
@@ -12013,6 +12013,64 @@
           </a:p>
         </p:txBody>
       </p:sp>
+      <p:sp>
+        <p:nvSpPr>
+          <p:cNvPr id="91" name="Google Shape;91;p1"/>
+          <p:cNvSpPr txBox="1"/>
+          <p:nvPr/>
+        </p:nvSpPr>
+        <p:spPr>
+          <a:xfrm>
+            <a:off x="640080" y="4143773"/>
+            <a:ext cx="10515600" cy="307800"/>
+          </a:xfrm>
+          <a:prstGeom prst="rect">
+            <a:avLst/>
+          </a:prstGeom>
+          <a:noFill/>
+          <a:ln>
+            <a:noFill/>
+          </a:ln>
+        </p:spPr>
+        <p:txBody>
+          <a:bodyPr anchorCtr="0" anchor="t" bIns="45700" lIns="91425" spcFirstLastPara="1" rIns="91425" wrap="square" tIns="45700">
+            <a:spAutoFit/>
+          </a:bodyPr>
+          <a:lstStyle/>
+          <a:p>
+            <a:pPr indent="0" lvl="0" marL="0" marR="0" rtl="0" algn="l">
+              <a:spcBef>
+                <a:spcPts val="0"/>
+              </a:spcBef>
+              <a:spcAft>
+                <a:spcPts val="0"/>
+              </a:spcAft>
+              <a:buNone/>
+            </a:pPr>
+            <a:r>
+              <a:rPr lang="en-US">
+                <a:solidFill>
+                  <a:srgbClr val="CCD6E0"/>
+                </a:solidFill>
+                <a:latin typeface="Calibri"/>
+                <a:ea typeface="Calibri"/>
+                <a:cs typeface="Calibri"/>
+                <a:sym typeface="Calibri"/>
+              </a:rPr>
+              <a:t>Prototype Documentation: https://pathanahmad.github.io/vienna-up-2026/</a:t>
+            </a:r>
+            <a:endParaRPr b="0" i="0" sz="1400" u="none" cap="none" strike="noStrike">
+              <a:solidFill>
+                <a:srgbClr val="CCD6E0"/>
+              </a:solidFill>
+              <a:latin typeface="Calibri"/>
+              <a:ea typeface="Calibri"/>
+              <a:cs typeface="Calibri"/>
+              <a:sym typeface="Calibri"/>
+            </a:endParaRPr>
+          </a:p>
+        </p:txBody>
+      </p:sp>
     </p:spTree>
   </p:cSld>
   <p:clrMapOvr>
@@ -12033,7 +12091,7 @@
     </p:bg>
     <p:spTree>
       <p:nvGrpSpPr>
-        <p:cNvPr id="224" name="Shape 224"/>
+        <p:cNvPr id="225" name="Shape 225"/>
         <p:cNvGrpSpPr/>
         <p:nvPr/>
       </p:nvGrpSpPr>
@@ -12047,7 +12105,7 @@
       </p:grpSpPr>
       <p:sp>
         <p:nvSpPr>
-          <p:cNvPr id="225" name="Google Shape;225;g3e2a95130a1_0_47"/>
+          <p:cNvPr id="226" name="Google Shape;226;g3e2a95130a1_0_47"/>
           <p:cNvSpPr/>
           <p:nvPr/>
         </p:nvSpPr>
@@ -12105,7 +12163,7 @@
       </p:sp>
       <p:sp>
         <p:nvSpPr>
-          <p:cNvPr id="226" name="Google Shape;226;g3e2a95130a1_0_47"/>
+          <p:cNvPr id="227" name="Google Shape;227;g3e2a95130a1_0_47"/>
           <p:cNvSpPr/>
           <p:nvPr/>
         </p:nvSpPr>
@@ -12163,7 +12221,7 @@
       </p:sp>
       <p:sp>
         <p:nvSpPr>
-          <p:cNvPr id="227" name="Google Shape;227;g3e2a95130a1_0_47"/>
+          <p:cNvPr id="228" name="Google Shape;228;g3e2a95130a1_0_47"/>
           <p:cNvSpPr txBox="1"/>
           <p:nvPr/>
         </p:nvSpPr>
@@ -12213,7 +12271,7 @@
       </p:sp>
       <p:pic>
         <p:nvPicPr>
-          <p:cNvPr id="228" name="Google Shape;228;g3e2a95130a1_0_47"/>
+          <p:cNvPr id="229" name="Google Shape;229;g3e2a95130a1_0_47"/>
           <p:cNvPicPr preferRelativeResize="0"/>
           <p:nvPr/>
         </p:nvPicPr>
@@ -12241,7 +12299,7 @@
       </p:pic>
       <p:pic>
         <p:nvPicPr>
-          <p:cNvPr id="229" name="Google Shape;229;g3e2a95130a1_0_47"/>
+          <p:cNvPr id="230" name="Google Shape;230;g3e2a95130a1_0_47"/>
           <p:cNvPicPr preferRelativeResize="0"/>
           <p:nvPr/>
         </p:nvPicPr>
@@ -12287,7 +12345,7 @@
     </p:bg>
     <p:spTree>
       <p:nvGrpSpPr>
-        <p:cNvPr id="233" name="Shape 233"/>
+        <p:cNvPr id="234" name="Shape 234"/>
         <p:cNvGrpSpPr/>
         <p:nvPr/>
       </p:nvGrpSpPr>
@@ -12301,7 +12359,7 @@
       </p:grpSpPr>
       <p:sp>
         <p:nvSpPr>
-          <p:cNvPr id="234" name="Google Shape;234;g3e2a95130a1_0_26"/>
+          <p:cNvPr id="235" name="Google Shape;235;g3e2a95130a1_0_26"/>
           <p:cNvSpPr/>
           <p:nvPr/>
         </p:nvSpPr>
@@ -12359,7 +12417,7 @@
       </p:sp>
       <p:sp>
         <p:nvSpPr>
-          <p:cNvPr id="235" name="Google Shape;235;g3e2a95130a1_0_26"/>
+          <p:cNvPr id="236" name="Google Shape;236;g3e2a95130a1_0_26"/>
           <p:cNvSpPr/>
           <p:nvPr/>
         </p:nvSpPr>
@@ -12417,7 +12475,7 @@
       </p:sp>
       <p:sp>
         <p:nvSpPr>
-          <p:cNvPr id="236" name="Google Shape;236;g3e2a95130a1_0_26"/>
+          <p:cNvPr id="237" name="Google Shape;237;g3e2a95130a1_0_26"/>
           <p:cNvSpPr txBox="1"/>
           <p:nvPr/>
         </p:nvSpPr>
@@ -12479,7 +12537,7 @@
       </p:sp>
       <p:pic>
         <p:nvPicPr>
-          <p:cNvPr id="237" name="Google Shape;237;g3e2a95130a1_0_26"/>
+          <p:cNvPr id="238" name="Google Shape;238;g3e2a95130a1_0_26"/>
           <p:cNvPicPr preferRelativeResize="0"/>
           <p:nvPr/>
         </p:nvPicPr>
@@ -12507,7 +12565,7 @@
       </p:pic>
       <p:pic>
         <p:nvPicPr>
-          <p:cNvPr id="238" name="Google Shape;238;g3e2a95130a1_0_26"/>
+          <p:cNvPr id="239" name="Google Shape;239;g3e2a95130a1_0_26"/>
           <p:cNvPicPr preferRelativeResize="0"/>
           <p:nvPr/>
         </p:nvPicPr>
@@ -12534,7 +12592,7 @@
       </p:pic>
       <p:pic>
         <p:nvPicPr>
-          <p:cNvPr id="239" name="Google Shape;239;g3e2a95130a1_0_26"/>
+          <p:cNvPr id="240" name="Google Shape;240;g3e2a95130a1_0_26"/>
           <p:cNvPicPr preferRelativeResize="0"/>
           <p:nvPr/>
         </p:nvPicPr>
@@ -12573,7 +12631,7 @@
   <p:cSld>
     <p:spTree>
       <p:nvGrpSpPr>
-        <p:cNvPr id="243" name="Shape 243"/>
+        <p:cNvPr id="244" name="Shape 244"/>
         <p:cNvGrpSpPr/>
         <p:nvPr/>
       </p:nvGrpSpPr>
@@ -12587,7 +12645,7 @@
       </p:grpSpPr>
       <p:pic>
         <p:nvPicPr>
-          <p:cNvPr id="244" name="Google Shape;244;g3e2a95130a1_2_8"/>
+          <p:cNvPr id="245" name="Google Shape;245;g3e2a95130a1_2_8"/>
           <p:cNvPicPr preferRelativeResize="0"/>
           <p:nvPr/>
         </p:nvPicPr>
@@ -12615,7 +12673,7 @@
       </p:pic>
       <p:pic>
         <p:nvPicPr>
-          <p:cNvPr id="245" name="Google Shape;245;g3e2a95130a1_2_8"/>
+          <p:cNvPr id="246" name="Google Shape;246;g3e2a95130a1_2_8"/>
           <p:cNvPicPr preferRelativeResize="0"/>
           <p:nvPr/>
         </p:nvPicPr>
@@ -12661,7 +12719,7 @@
     </p:bg>
     <p:spTree>
       <p:nvGrpSpPr>
-        <p:cNvPr id="249" name="Shape 249"/>
+        <p:cNvPr id="250" name="Shape 250"/>
         <p:cNvGrpSpPr/>
         <p:nvPr/>
       </p:nvGrpSpPr>
@@ -12675,7 +12733,7 @@
       </p:grpSpPr>
       <p:sp>
         <p:nvSpPr>
-          <p:cNvPr id="250" name="Google Shape;250;p8"/>
+          <p:cNvPr id="251" name="Google Shape;251;p8"/>
           <p:cNvSpPr/>
           <p:nvPr/>
         </p:nvSpPr>
@@ -12733,7 +12791,7 @@
       </p:sp>
       <p:sp>
         <p:nvSpPr>
-          <p:cNvPr id="251" name="Google Shape;251;p8"/>
+          <p:cNvPr id="252" name="Google Shape;252;p8"/>
           <p:cNvSpPr/>
           <p:nvPr/>
         </p:nvSpPr>
@@ -12791,7 +12849,7 @@
       </p:sp>
       <p:sp>
         <p:nvSpPr>
-          <p:cNvPr id="252" name="Google Shape;252;p8"/>
+          <p:cNvPr id="253" name="Google Shape;253;p8"/>
           <p:cNvSpPr txBox="1"/>
           <p:nvPr/>
         </p:nvSpPr>
@@ -12841,7 +12899,7 @@
       </p:sp>
       <p:sp>
         <p:nvSpPr>
-          <p:cNvPr id="253" name="Google Shape;253;p8"/>
+          <p:cNvPr id="254" name="Google Shape;254;p8"/>
           <p:cNvSpPr txBox="1"/>
           <p:nvPr/>
         </p:nvSpPr>
@@ -12891,7 +12949,7 @@
       </p:sp>
       <p:sp>
         <p:nvSpPr>
-          <p:cNvPr id="254" name="Google Shape;254;p8"/>
+          <p:cNvPr id="255" name="Google Shape;255;p8"/>
           <p:cNvSpPr txBox="1"/>
           <p:nvPr/>
         </p:nvSpPr>
@@ -12941,7 +12999,7 @@
       </p:sp>
       <p:sp>
         <p:nvSpPr>
-          <p:cNvPr id="255" name="Google Shape;255;p8"/>
+          <p:cNvPr id="256" name="Google Shape;256;p8"/>
           <p:cNvSpPr txBox="1"/>
           <p:nvPr/>
         </p:nvSpPr>
@@ -13011,7 +13069,7 @@
       </p:sp>
       <p:sp>
         <p:nvSpPr>
-          <p:cNvPr id="256" name="Google Shape;256;p8"/>
+          <p:cNvPr id="257" name="Google Shape;257;p8"/>
           <p:cNvSpPr txBox="1"/>
           <p:nvPr/>
         </p:nvSpPr>
@@ -13079,7 +13137,7 @@
     </p:bg>
     <p:spTree>
       <p:nvGrpSpPr>
-        <p:cNvPr id="94" name="Shape 94"/>
+        <p:cNvPr id="95" name="Shape 95"/>
         <p:cNvGrpSpPr/>
         <p:nvPr/>
       </p:nvGrpSpPr>
@@ -13093,7 +13151,7 @@
       </p:grpSpPr>
       <p:sp>
         <p:nvSpPr>
-          <p:cNvPr id="95" name="Google Shape;95;p2"/>
+          <p:cNvPr id="96" name="Google Shape;96;p2"/>
           <p:cNvSpPr/>
           <p:nvPr/>
         </p:nvSpPr>
@@ -13151,7 +13209,7 @@
       </p:sp>
       <p:sp>
         <p:nvSpPr>
-          <p:cNvPr id="96" name="Google Shape;96;p2"/>
+          <p:cNvPr id="97" name="Google Shape;97;p2"/>
           <p:cNvSpPr txBox="1"/>
           <p:nvPr/>
         </p:nvSpPr>
@@ -13201,7 +13259,7 @@
       </p:sp>
       <p:sp>
         <p:nvSpPr>
-          <p:cNvPr id="97" name="Google Shape;97;p2"/>
+          <p:cNvPr id="98" name="Google Shape;98;p2"/>
           <p:cNvSpPr txBox="1"/>
           <p:nvPr/>
         </p:nvSpPr>
@@ -13275,7 +13333,7 @@
       </p:sp>
       <p:sp>
         <p:nvSpPr>
-          <p:cNvPr id="98" name="Google Shape;98;p2"/>
+          <p:cNvPr id="99" name="Google Shape;99;p2"/>
           <p:cNvSpPr/>
           <p:nvPr/>
         </p:nvSpPr>
@@ -13333,7 +13391,7 @@
       </p:sp>
       <p:sp>
         <p:nvSpPr>
-          <p:cNvPr id="99" name="Google Shape;99;p2"/>
+          <p:cNvPr id="100" name="Google Shape;100;p2"/>
           <p:cNvSpPr txBox="1"/>
           <p:nvPr/>
         </p:nvSpPr>
@@ -13406,7 +13464,7 @@
       </p:sp>
       <p:sp>
         <p:nvSpPr>
-          <p:cNvPr id="100" name="Google Shape;100;p2"/>
+          <p:cNvPr id="101" name="Google Shape;101;p2"/>
           <p:cNvSpPr txBox="1"/>
           <p:nvPr/>
         </p:nvSpPr>
@@ -13490,7 +13548,7 @@
       </p:sp>
       <p:sp>
         <p:nvSpPr>
-          <p:cNvPr id="101" name="Google Shape;101;p2"/>
+          <p:cNvPr id="102" name="Google Shape;102;p2"/>
           <p:cNvSpPr/>
           <p:nvPr/>
         </p:nvSpPr>
@@ -13548,7 +13606,7 @@
       </p:sp>
       <p:sp>
         <p:nvSpPr>
-          <p:cNvPr id="102" name="Google Shape;102;p2"/>
+          <p:cNvPr id="103" name="Google Shape;103;p2"/>
           <p:cNvSpPr txBox="1"/>
           <p:nvPr/>
         </p:nvSpPr>
@@ -13621,7 +13679,7 @@
       </p:sp>
       <p:sp>
         <p:nvSpPr>
-          <p:cNvPr id="103" name="Google Shape;103;p2"/>
+          <p:cNvPr id="104" name="Google Shape;104;p2"/>
           <p:cNvSpPr txBox="1"/>
           <p:nvPr/>
         </p:nvSpPr>
@@ -13705,7 +13763,7 @@
       </p:sp>
       <p:sp>
         <p:nvSpPr>
-          <p:cNvPr id="104" name="Google Shape;104;p2"/>
+          <p:cNvPr id="105" name="Google Shape;105;p2"/>
           <p:cNvSpPr/>
           <p:nvPr/>
         </p:nvSpPr>
@@ -13763,7 +13821,7 @@
       </p:sp>
       <p:sp>
         <p:nvSpPr>
-          <p:cNvPr id="105" name="Google Shape;105;p2"/>
+          <p:cNvPr id="106" name="Google Shape;106;p2"/>
           <p:cNvSpPr txBox="1"/>
           <p:nvPr/>
         </p:nvSpPr>
@@ -13860,7 +13918,7 @@
       </p:sp>
       <p:sp>
         <p:nvSpPr>
-          <p:cNvPr id="106" name="Google Shape;106;p2"/>
+          <p:cNvPr id="107" name="Google Shape;107;p2"/>
           <p:cNvSpPr txBox="1"/>
           <p:nvPr/>
         </p:nvSpPr>
@@ -14076,7 +14134,7 @@
     </p:bg>
     <p:spTree>
       <p:nvGrpSpPr>
-        <p:cNvPr id="110" name="Shape 110"/>
+        <p:cNvPr id="111" name="Shape 111"/>
         <p:cNvGrpSpPr/>
         <p:nvPr/>
       </p:nvGrpSpPr>
@@ -14090,7 +14148,7 @@
       </p:grpSpPr>
       <p:sp>
         <p:nvSpPr>
-          <p:cNvPr id="111" name="Google Shape;111;p3"/>
+          <p:cNvPr id="112" name="Google Shape;112;p3"/>
           <p:cNvSpPr/>
           <p:nvPr/>
         </p:nvSpPr>
@@ -14148,7 +14206,7 @@
       </p:sp>
       <p:sp>
         <p:nvSpPr>
-          <p:cNvPr id="112" name="Google Shape;112;p3"/>
+          <p:cNvPr id="113" name="Google Shape;113;p3"/>
           <p:cNvSpPr txBox="1"/>
           <p:nvPr/>
         </p:nvSpPr>
@@ -14198,7 +14256,7 @@
       </p:sp>
       <p:sp>
         <p:nvSpPr>
-          <p:cNvPr id="113" name="Google Shape;113;p3"/>
+          <p:cNvPr id="114" name="Google Shape;114;p3"/>
           <p:cNvSpPr txBox="1"/>
           <p:nvPr/>
         </p:nvSpPr>
@@ -14248,7 +14306,7 @@
       </p:sp>
       <p:sp>
         <p:nvSpPr>
-          <p:cNvPr id="114" name="Google Shape;114;p3"/>
+          <p:cNvPr id="115" name="Google Shape;115;p3"/>
           <p:cNvSpPr/>
           <p:nvPr/>
         </p:nvSpPr>
@@ -14306,7 +14364,7 @@
       </p:sp>
       <p:sp>
         <p:nvSpPr>
-          <p:cNvPr id="115" name="Google Shape;115;p3"/>
+          <p:cNvPr id="116" name="Google Shape;116;p3"/>
           <p:cNvSpPr txBox="1"/>
           <p:nvPr/>
         </p:nvSpPr>
@@ -14356,7 +14414,7 @@
       </p:sp>
       <p:sp>
         <p:nvSpPr>
-          <p:cNvPr id="116" name="Google Shape;116;p3"/>
+          <p:cNvPr id="117" name="Google Shape;117;p3"/>
           <p:cNvSpPr txBox="1"/>
           <p:nvPr/>
         </p:nvSpPr>
@@ -14429,7 +14487,7 @@
       </p:sp>
       <p:sp>
         <p:nvSpPr>
-          <p:cNvPr id="117" name="Google Shape;117;p3"/>
+          <p:cNvPr id="118" name="Google Shape;118;p3"/>
           <p:cNvSpPr/>
           <p:nvPr/>
         </p:nvSpPr>
@@ -14487,7 +14545,7 @@
       </p:sp>
       <p:sp>
         <p:nvSpPr>
-          <p:cNvPr id="118" name="Google Shape;118;p3"/>
+          <p:cNvPr id="119" name="Google Shape;119;p3"/>
           <p:cNvSpPr txBox="1"/>
           <p:nvPr/>
         </p:nvSpPr>
@@ -14537,7 +14595,7 @@
       </p:sp>
       <p:sp>
         <p:nvSpPr>
-          <p:cNvPr id="119" name="Google Shape;119;p3"/>
+          <p:cNvPr id="120" name="Google Shape;120;p3"/>
           <p:cNvSpPr txBox="1"/>
           <p:nvPr/>
         </p:nvSpPr>
@@ -14610,7 +14668,7 @@
       </p:sp>
       <p:sp>
         <p:nvSpPr>
-          <p:cNvPr id="120" name="Google Shape;120;p3"/>
+          <p:cNvPr id="121" name="Google Shape;121;p3"/>
           <p:cNvSpPr/>
           <p:nvPr/>
         </p:nvSpPr>
@@ -14668,7 +14726,7 @@
       </p:sp>
       <p:sp>
         <p:nvSpPr>
-          <p:cNvPr id="121" name="Google Shape;121;p3"/>
+          <p:cNvPr id="122" name="Google Shape;122;p3"/>
           <p:cNvSpPr txBox="1"/>
           <p:nvPr/>
         </p:nvSpPr>
@@ -14718,7 +14776,7 @@
       </p:sp>
       <p:sp>
         <p:nvSpPr>
-          <p:cNvPr id="122" name="Google Shape;122;p3"/>
+          <p:cNvPr id="123" name="Google Shape;123;p3"/>
           <p:cNvSpPr txBox="1"/>
           <p:nvPr/>
         </p:nvSpPr>
@@ -14791,7 +14849,7 @@
       </p:sp>
       <p:sp>
         <p:nvSpPr>
-          <p:cNvPr id="123" name="Google Shape;123;p3"/>
+          <p:cNvPr id="124" name="Google Shape;124;p3"/>
           <p:cNvSpPr/>
           <p:nvPr/>
         </p:nvSpPr>
@@ -14849,7 +14907,7 @@
       </p:sp>
       <p:sp>
         <p:nvSpPr>
-          <p:cNvPr id="124" name="Google Shape;124;p3"/>
+          <p:cNvPr id="125" name="Google Shape;125;p3"/>
           <p:cNvSpPr txBox="1"/>
           <p:nvPr/>
         </p:nvSpPr>
@@ -14899,7 +14957,7 @@
       </p:sp>
       <p:sp>
         <p:nvSpPr>
-          <p:cNvPr id="125" name="Google Shape;125;p3"/>
+          <p:cNvPr id="126" name="Google Shape;126;p3"/>
           <p:cNvSpPr txBox="1"/>
           <p:nvPr/>
         </p:nvSpPr>
@@ -14972,7 +15030,7 @@
       </p:sp>
       <p:sp>
         <p:nvSpPr>
-          <p:cNvPr id="126" name="Google Shape;126;p3"/>
+          <p:cNvPr id="127" name="Google Shape;127;p3"/>
           <p:cNvSpPr txBox="1"/>
           <p:nvPr/>
         </p:nvSpPr>
@@ -15063,7 +15121,7 @@
     </p:bg>
     <p:spTree>
       <p:nvGrpSpPr>
-        <p:cNvPr id="130" name="Shape 130"/>
+        <p:cNvPr id="131" name="Shape 131"/>
         <p:cNvGrpSpPr/>
         <p:nvPr/>
       </p:nvGrpSpPr>
@@ -15077,7 +15135,7 @@
       </p:grpSpPr>
       <p:sp>
         <p:nvSpPr>
-          <p:cNvPr id="131" name="Google Shape;131;p4"/>
+          <p:cNvPr id="132" name="Google Shape;132;p4"/>
           <p:cNvSpPr/>
           <p:nvPr/>
         </p:nvSpPr>
@@ -15135,7 +15193,7 @@
       </p:sp>
       <p:sp>
         <p:nvSpPr>
-          <p:cNvPr id="132" name="Google Shape;132;p4"/>
+          <p:cNvPr id="133" name="Google Shape;133;p4"/>
           <p:cNvSpPr txBox="1"/>
           <p:nvPr/>
         </p:nvSpPr>
@@ -15185,7 +15243,7 @@
       </p:sp>
       <p:sp>
         <p:nvSpPr>
-          <p:cNvPr id="133" name="Google Shape;133;p4"/>
+          <p:cNvPr id="134" name="Google Shape;134;p4"/>
           <p:cNvSpPr txBox="1"/>
           <p:nvPr/>
         </p:nvSpPr>
@@ -15247,7 +15305,7 @@
       </p:sp>
       <p:sp>
         <p:nvSpPr>
-          <p:cNvPr id="134" name="Google Shape;134;p4"/>
+          <p:cNvPr id="135" name="Google Shape;135;p4"/>
           <p:cNvSpPr/>
           <p:nvPr/>
         </p:nvSpPr>
@@ -15305,7 +15363,7 @@
       </p:sp>
       <p:sp>
         <p:nvSpPr>
-          <p:cNvPr id="135" name="Google Shape;135;p4"/>
+          <p:cNvPr id="136" name="Google Shape;136;p4"/>
           <p:cNvSpPr/>
           <p:nvPr/>
         </p:nvSpPr>
@@ -15363,7 +15421,7 @@
       </p:sp>
       <p:sp>
         <p:nvSpPr>
-          <p:cNvPr id="136" name="Google Shape;136;p4"/>
+          <p:cNvPr id="137" name="Google Shape;137;p4"/>
           <p:cNvSpPr txBox="1"/>
           <p:nvPr/>
         </p:nvSpPr>
@@ -15436,7 +15494,7 @@
       </p:sp>
       <p:sp>
         <p:nvSpPr>
-          <p:cNvPr id="137" name="Google Shape;137;p4"/>
+          <p:cNvPr id="138" name="Google Shape;138;p4"/>
           <p:cNvSpPr txBox="1"/>
           <p:nvPr/>
         </p:nvSpPr>
@@ -15509,7 +15567,7 @@
       </p:sp>
       <p:sp>
         <p:nvSpPr>
-          <p:cNvPr id="138" name="Google Shape;138;p4"/>
+          <p:cNvPr id="139" name="Google Shape;139;p4"/>
           <p:cNvSpPr/>
           <p:nvPr/>
         </p:nvSpPr>
@@ -15567,7 +15625,7 @@
       </p:sp>
       <p:sp>
         <p:nvSpPr>
-          <p:cNvPr id="139" name="Google Shape;139;p4"/>
+          <p:cNvPr id="140" name="Google Shape;140;p4"/>
           <p:cNvSpPr/>
           <p:nvPr/>
         </p:nvSpPr>
@@ -15625,7 +15683,7 @@
       </p:sp>
       <p:sp>
         <p:nvSpPr>
-          <p:cNvPr id="140" name="Google Shape;140;p4"/>
+          <p:cNvPr id="141" name="Google Shape;141;p4"/>
           <p:cNvSpPr txBox="1"/>
           <p:nvPr/>
         </p:nvSpPr>
@@ -15698,7 +15756,7 @@
       </p:sp>
       <p:sp>
         <p:nvSpPr>
-          <p:cNvPr id="141" name="Google Shape;141;p4"/>
+          <p:cNvPr id="142" name="Google Shape;142;p4"/>
           <p:cNvSpPr txBox="1"/>
           <p:nvPr/>
         </p:nvSpPr>
@@ -15771,7 +15829,7 @@
       </p:sp>
       <p:sp>
         <p:nvSpPr>
-          <p:cNvPr id="142" name="Google Shape;142;p4"/>
+          <p:cNvPr id="143" name="Google Shape;143;p4"/>
           <p:cNvSpPr/>
           <p:nvPr/>
         </p:nvSpPr>
@@ -15829,7 +15887,7 @@
       </p:sp>
       <p:sp>
         <p:nvSpPr>
-          <p:cNvPr id="143" name="Google Shape;143;p4"/>
+          <p:cNvPr id="144" name="Google Shape;144;p4"/>
           <p:cNvSpPr/>
           <p:nvPr/>
         </p:nvSpPr>
@@ -15887,7 +15945,7 @@
       </p:sp>
       <p:sp>
         <p:nvSpPr>
-          <p:cNvPr id="144" name="Google Shape;144;p4"/>
+          <p:cNvPr id="145" name="Google Shape;145;p4"/>
           <p:cNvSpPr txBox="1"/>
           <p:nvPr/>
         </p:nvSpPr>
@@ -15960,7 +16018,7 @@
       </p:sp>
       <p:sp>
         <p:nvSpPr>
-          <p:cNvPr id="145" name="Google Shape;145;p4"/>
+          <p:cNvPr id="146" name="Google Shape;146;p4"/>
           <p:cNvSpPr txBox="1"/>
           <p:nvPr/>
         </p:nvSpPr>
@@ -16033,7 +16091,7 @@
       </p:sp>
       <p:sp>
         <p:nvSpPr>
-          <p:cNvPr id="146" name="Google Shape;146;p4"/>
+          <p:cNvPr id="147" name="Google Shape;147;p4"/>
           <p:cNvSpPr/>
           <p:nvPr/>
         </p:nvSpPr>
@@ -16091,7 +16149,7 @@
       </p:sp>
       <p:sp>
         <p:nvSpPr>
-          <p:cNvPr id="147" name="Google Shape;147;p4"/>
+          <p:cNvPr id="148" name="Google Shape;148;p4"/>
           <p:cNvSpPr/>
           <p:nvPr/>
         </p:nvSpPr>
@@ -16149,7 +16207,7 @@
       </p:sp>
       <p:sp>
         <p:nvSpPr>
-          <p:cNvPr id="148" name="Google Shape;148;p4"/>
+          <p:cNvPr id="149" name="Google Shape;149;p4"/>
           <p:cNvSpPr txBox="1"/>
           <p:nvPr/>
         </p:nvSpPr>
@@ -16222,7 +16280,7 @@
       </p:sp>
       <p:sp>
         <p:nvSpPr>
-          <p:cNvPr id="149" name="Google Shape;149;p4"/>
+          <p:cNvPr id="150" name="Google Shape;150;p4"/>
           <p:cNvSpPr txBox="1"/>
           <p:nvPr/>
         </p:nvSpPr>
@@ -16306,7 +16364,7 @@
   <p:cSld>
     <p:spTree>
       <p:nvGrpSpPr>
-        <p:cNvPr id="153" name="Shape 153"/>
+        <p:cNvPr id="154" name="Shape 154"/>
         <p:cNvGrpSpPr/>
         <p:nvPr/>
       </p:nvGrpSpPr>
@@ -16320,7 +16378,7 @@
       </p:grpSpPr>
       <p:pic>
         <p:nvPicPr>
-          <p:cNvPr id="154" name="Google Shape;154;g3e2a95130a1_0_58"/>
+          <p:cNvPr id="155" name="Google Shape;155;g3e2a95130a1_0_58"/>
           <p:cNvPicPr preferRelativeResize="0"/>
           <p:nvPr/>
         </p:nvPicPr>
@@ -16366,7 +16424,7 @@
     </p:bg>
     <p:spTree>
       <p:nvGrpSpPr>
-        <p:cNvPr id="158" name="Shape 158"/>
+        <p:cNvPr id="159" name="Shape 159"/>
         <p:cNvGrpSpPr/>
         <p:nvPr/>
       </p:nvGrpSpPr>
@@ -16380,7 +16438,7 @@
       </p:grpSpPr>
       <p:sp>
         <p:nvSpPr>
-          <p:cNvPr id="159" name="Google Shape;159;g3e2a95130a1_0_3"/>
+          <p:cNvPr id="160" name="Google Shape;160;g3e2a95130a1_0_3"/>
           <p:cNvSpPr/>
           <p:nvPr/>
         </p:nvSpPr>
@@ -16438,7 +16496,7 @@
       </p:sp>
       <p:sp>
         <p:nvSpPr>
-          <p:cNvPr id="160" name="Google Shape;160;g3e2a95130a1_0_3"/>
+          <p:cNvPr id="161" name="Google Shape;161;g3e2a95130a1_0_3"/>
           <p:cNvSpPr/>
           <p:nvPr/>
         </p:nvSpPr>
@@ -16496,7 +16554,7 @@
       </p:sp>
       <p:sp>
         <p:nvSpPr>
-          <p:cNvPr id="161" name="Google Shape;161;g3e2a95130a1_0_3"/>
+          <p:cNvPr id="162" name="Google Shape;162;g3e2a95130a1_0_3"/>
           <p:cNvSpPr txBox="1"/>
           <p:nvPr/>
         </p:nvSpPr>
@@ -16546,7 +16604,7 @@
       </p:sp>
       <p:sp>
         <p:nvSpPr>
-          <p:cNvPr id="162" name="Google Shape;162;g3e2a95130a1_0_3"/>
+          <p:cNvPr id="163" name="Google Shape;163;g3e2a95130a1_0_3"/>
           <p:cNvSpPr/>
           <p:nvPr/>
         </p:nvSpPr>
@@ -16604,7 +16662,7 @@
       </p:sp>
       <p:sp>
         <p:nvSpPr>
-          <p:cNvPr id="163" name="Google Shape;163;g3e2a95130a1_0_3"/>
+          <p:cNvPr id="164" name="Google Shape;164;g3e2a95130a1_0_3"/>
           <p:cNvSpPr txBox="1"/>
           <p:nvPr/>
         </p:nvSpPr>
@@ -16654,7 +16712,7 @@
       </p:sp>
       <p:sp>
         <p:nvSpPr>
-          <p:cNvPr id="164" name="Google Shape;164;g3e2a95130a1_0_3"/>
+          <p:cNvPr id="165" name="Google Shape;165;g3e2a95130a1_0_3"/>
           <p:cNvSpPr txBox="1"/>
           <p:nvPr/>
         </p:nvSpPr>
@@ -16809,7 +16867,7 @@
       </p:sp>
       <p:pic>
         <p:nvPicPr>
-          <p:cNvPr id="165" name="Google Shape;165;g3e2a95130a1_0_3"/>
+          <p:cNvPr id="166" name="Google Shape;166;g3e2a95130a1_0_3"/>
           <p:cNvPicPr preferRelativeResize="0"/>
           <p:nvPr/>
         </p:nvPicPr>
@@ -16855,7 +16913,7 @@
     </p:bg>
     <p:spTree>
       <p:nvGrpSpPr>
-        <p:cNvPr id="169" name="Shape 169"/>
+        <p:cNvPr id="170" name="Shape 170"/>
         <p:cNvGrpSpPr/>
         <p:nvPr/>
       </p:nvGrpSpPr>
@@ -16869,7 +16927,7 @@
       </p:grpSpPr>
       <p:sp>
         <p:nvSpPr>
-          <p:cNvPr id="170" name="Google Shape;170;g3e2a95130a1_0_63"/>
+          <p:cNvPr id="171" name="Google Shape;171;g3e2a95130a1_0_63"/>
           <p:cNvSpPr/>
           <p:nvPr/>
         </p:nvSpPr>
@@ -16927,7 +16985,7 @@
       </p:sp>
       <p:sp>
         <p:nvSpPr>
-          <p:cNvPr id="171" name="Google Shape;171;g3e2a95130a1_0_63"/>
+          <p:cNvPr id="172" name="Google Shape;172;g3e2a95130a1_0_63"/>
           <p:cNvSpPr/>
           <p:nvPr/>
         </p:nvSpPr>
@@ -16985,7 +17043,7 @@
       </p:sp>
       <p:sp>
         <p:nvSpPr>
-          <p:cNvPr id="172" name="Google Shape;172;g3e2a95130a1_0_63"/>
+          <p:cNvPr id="173" name="Google Shape;173;g3e2a95130a1_0_63"/>
           <p:cNvSpPr txBox="1"/>
           <p:nvPr/>
         </p:nvSpPr>
@@ -17035,7 +17093,7 @@
       </p:sp>
       <p:pic>
         <p:nvPicPr>
-          <p:cNvPr id="173" name="Google Shape;173;g3e2a95130a1_0_63"/>
+          <p:cNvPr id="174" name="Google Shape;174;g3e2a95130a1_0_63"/>
           <p:cNvPicPr preferRelativeResize="0"/>
           <p:nvPr/>
         </p:nvPicPr>
@@ -17063,7 +17121,7 @@
       </p:pic>
       <p:pic>
         <p:nvPicPr>
-          <p:cNvPr id="174" name="Google Shape;174;g3e2a95130a1_0_63"/>
+          <p:cNvPr id="175" name="Google Shape;175;g3e2a95130a1_0_63"/>
           <p:cNvPicPr preferRelativeResize="0"/>
           <p:nvPr/>
         </p:nvPicPr>
@@ -17109,7 +17167,7 @@
     </p:bg>
     <p:spTree>
       <p:nvGrpSpPr>
-        <p:cNvPr id="178" name="Shape 178"/>
+        <p:cNvPr id="179" name="Shape 179"/>
         <p:cNvGrpSpPr/>
         <p:nvPr/>
       </p:nvGrpSpPr>
@@ -17123,7 +17181,7 @@
       </p:grpSpPr>
       <p:sp>
         <p:nvSpPr>
-          <p:cNvPr id="179" name="Google Shape;179;p6"/>
+          <p:cNvPr id="180" name="Google Shape;180;p6"/>
           <p:cNvSpPr/>
           <p:nvPr/>
         </p:nvSpPr>
@@ -17181,7 +17239,7 @@
       </p:sp>
       <p:sp>
         <p:nvSpPr>
-          <p:cNvPr id="180" name="Google Shape;180;p6"/>
+          <p:cNvPr id="181" name="Google Shape;181;p6"/>
           <p:cNvSpPr txBox="1"/>
           <p:nvPr/>
         </p:nvSpPr>
@@ -17231,7 +17289,7 @@
       </p:sp>
       <p:sp>
         <p:nvSpPr>
-          <p:cNvPr id="181" name="Google Shape;181;p6"/>
+          <p:cNvPr id="182" name="Google Shape;182;p6"/>
           <p:cNvSpPr txBox="1"/>
           <p:nvPr/>
         </p:nvSpPr>
@@ -17305,7 +17363,7 @@
       </p:sp>
       <p:sp>
         <p:nvSpPr>
-          <p:cNvPr id="182" name="Google Shape;182;p6"/>
+          <p:cNvPr id="183" name="Google Shape;183;p6"/>
           <p:cNvSpPr/>
           <p:nvPr/>
         </p:nvSpPr>
@@ -17363,7 +17421,7 @@
       </p:sp>
       <p:sp>
         <p:nvSpPr>
-          <p:cNvPr id="183" name="Google Shape;183;p6"/>
+          <p:cNvPr id="184" name="Google Shape;184;p6"/>
           <p:cNvSpPr/>
           <p:nvPr/>
         </p:nvSpPr>
@@ -17421,7 +17479,7 @@
       </p:sp>
       <p:sp>
         <p:nvSpPr>
-          <p:cNvPr id="184" name="Google Shape;184;p6"/>
+          <p:cNvPr id="185" name="Google Shape;185;p6"/>
           <p:cNvSpPr txBox="1"/>
           <p:nvPr/>
         </p:nvSpPr>
@@ -17494,7 +17552,7 @@
       </p:sp>
       <p:sp>
         <p:nvSpPr>
-          <p:cNvPr id="185" name="Google Shape;185;p6"/>
+          <p:cNvPr id="186" name="Google Shape;186;p6"/>
           <p:cNvSpPr txBox="1"/>
           <p:nvPr/>
         </p:nvSpPr>
@@ -17544,7 +17602,7 @@
       </p:sp>
       <p:sp>
         <p:nvSpPr>
-          <p:cNvPr id="186" name="Google Shape;186;p6"/>
+          <p:cNvPr id="187" name="Google Shape;187;p6"/>
           <p:cNvSpPr/>
           <p:nvPr/>
         </p:nvSpPr>
@@ -17602,7 +17660,7 @@
       </p:sp>
       <p:sp>
         <p:nvSpPr>
-          <p:cNvPr id="187" name="Google Shape;187;p6"/>
+          <p:cNvPr id="188" name="Google Shape;188;p6"/>
           <p:cNvSpPr/>
           <p:nvPr/>
         </p:nvSpPr>
@@ -17660,7 +17718,7 @@
       </p:sp>
       <p:sp>
         <p:nvSpPr>
-          <p:cNvPr id="188" name="Google Shape;188;p6"/>
+          <p:cNvPr id="189" name="Google Shape;189;p6"/>
           <p:cNvSpPr txBox="1"/>
           <p:nvPr/>
         </p:nvSpPr>
@@ -17733,7 +17791,7 @@
       </p:sp>
       <p:sp>
         <p:nvSpPr>
-          <p:cNvPr id="189" name="Google Shape;189;p6"/>
+          <p:cNvPr id="190" name="Google Shape;190;p6"/>
           <p:cNvSpPr txBox="1"/>
           <p:nvPr/>
         </p:nvSpPr>
@@ -17783,7 +17841,7 @@
       </p:sp>
       <p:sp>
         <p:nvSpPr>
-          <p:cNvPr id="190" name="Google Shape;190;p6"/>
+          <p:cNvPr id="191" name="Google Shape;191;p6"/>
           <p:cNvSpPr/>
           <p:nvPr/>
         </p:nvSpPr>
@@ -17841,7 +17899,7 @@
       </p:sp>
       <p:sp>
         <p:nvSpPr>
-          <p:cNvPr id="191" name="Google Shape;191;p6"/>
+          <p:cNvPr id="192" name="Google Shape;192;p6"/>
           <p:cNvSpPr/>
           <p:nvPr/>
         </p:nvSpPr>
@@ -17899,7 +17957,7 @@
       </p:sp>
       <p:sp>
         <p:nvSpPr>
-          <p:cNvPr id="192" name="Google Shape;192;p6"/>
+          <p:cNvPr id="193" name="Google Shape;193;p6"/>
           <p:cNvSpPr txBox="1"/>
           <p:nvPr/>
         </p:nvSpPr>
@@ -17972,7 +18030,7 @@
       </p:sp>
       <p:sp>
         <p:nvSpPr>
-          <p:cNvPr id="193" name="Google Shape;193;p6"/>
+          <p:cNvPr id="194" name="Google Shape;194;p6"/>
           <p:cNvSpPr txBox="1"/>
           <p:nvPr/>
         </p:nvSpPr>
@@ -18022,7 +18080,7 @@
       </p:sp>
       <p:sp>
         <p:nvSpPr>
-          <p:cNvPr id="194" name="Google Shape;194;p6"/>
+          <p:cNvPr id="195" name="Google Shape;195;p6"/>
           <p:cNvSpPr/>
           <p:nvPr/>
         </p:nvSpPr>
@@ -18080,7 +18138,7 @@
       </p:sp>
       <p:sp>
         <p:nvSpPr>
-          <p:cNvPr id="195" name="Google Shape;195;p6"/>
+          <p:cNvPr id="196" name="Google Shape;196;p6"/>
           <p:cNvSpPr/>
           <p:nvPr/>
         </p:nvSpPr>
@@ -18138,7 +18196,7 @@
       </p:sp>
       <p:sp>
         <p:nvSpPr>
-          <p:cNvPr id="196" name="Google Shape;196;p6"/>
+          <p:cNvPr id="197" name="Google Shape;197;p6"/>
           <p:cNvSpPr txBox="1"/>
           <p:nvPr/>
         </p:nvSpPr>
@@ -18211,7 +18269,7 @@
       </p:sp>
       <p:sp>
         <p:nvSpPr>
-          <p:cNvPr id="197" name="Google Shape;197;p6"/>
+          <p:cNvPr id="198" name="Google Shape;198;p6"/>
           <p:cNvSpPr txBox="1"/>
           <p:nvPr/>
         </p:nvSpPr>
@@ -18279,7 +18337,7 @@
     </p:bg>
     <p:spTree>
       <p:nvGrpSpPr>
-        <p:cNvPr id="201" name="Shape 201"/>
+        <p:cNvPr id="202" name="Shape 202"/>
         <p:cNvGrpSpPr/>
         <p:nvPr/>
       </p:nvGrpSpPr>
@@ -18293,7 +18351,7 @@
       </p:grpSpPr>
       <p:sp>
         <p:nvSpPr>
-          <p:cNvPr id="202" name="Google Shape;202;p7"/>
+          <p:cNvPr id="203" name="Google Shape;203;p7"/>
           <p:cNvSpPr/>
           <p:nvPr/>
         </p:nvSpPr>
@@ -18351,7 +18409,7 @@
       </p:sp>
       <p:sp>
         <p:nvSpPr>
-          <p:cNvPr id="203" name="Google Shape;203;p7"/>
+          <p:cNvPr id="204" name="Google Shape;204;p7"/>
           <p:cNvSpPr/>
           <p:nvPr/>
         </p:nvSpPr>
@@ -18409,7 +18467,7 @@
       </p:sp>
       <p:sp>
         <p:nvSpPr>
-          <p:cNvPr id="204" name="Google Shape;204;p7"/>
+          <p:cNvPr id="205" name="Google Shape;205;p7"/>
           <p:cNvSpPr txBox="1"/>
           <p:nvPr/>
         </p:nvSpPr>
@@ -18482,7 +18540,7 @@
       </p:sp>
       <p:sp>
         <p:nvSpPr>
-          <p:cNvPr id="205" name="Google Shape;205;p7"/>
+          <p:cNvPr id="206" name="Google Shape;206;p7"/>
           <p:cNvSpPr/>
           <p:nvPr/>
         </p:nvSpPr>
@@ -18540,7 +18598,7 @@
       </p:sp>
       <p:sp>
         <p:nvSpPr>
-          <p:cNvPr id="206" name="Google Shape;206;p7"/>
+          <p:cNvPr id="207" name="Google Shape;207;p7"/>
           <p:cNvSpPr/>
           <p:nvPr/>
         </p:nvSpPr>
@@ -18598,7 +18656,7 @@
       </p:sp>
       <p:sp>
         <p:nvSpPr>
-          <p:cNvPr id="207" name="Google Shape;207;p7"/>
+          <p:cNvPr id="208" name="Google Shape;208;p7"/>
           <p:cNvSpPr txBox="1"/>
           <p:nvPr/>
         </p:nvSpPr>
@@ -18648,7 +18706,7 @@
       </p:sp>
       <p:sp>
         <p:nvSpPr>
-          <p:cNvPr id="208" name="Google Shape;208;p7"/>
+          <p:cNvPr id="209" name="Google Shape;209;p7"/>
           <p:cNvSpPr txBox="1"/>
           <p:nvPr/>
         </p:nvSpPr>
@@ -18698,7 +18756,7 @@
       </p:sp>
       <p:sp>
         <p:nvSpPr>
-          <p:cNvPr id="209" name="Google Shape;209;p7"/>
+          <p:cNvPr id="210" name="Google Shape;210;p7"/>
           <p:cNvSpPr txBox="1"/>
           <p:nvPr/>
         </p:nvSpPr>
@@ -18794,7 +18852,7 @@
       </p:sp>
       <p:sp>
         <p:nvSpPr>
-          <p:cNvPr id="210" name="Google Shape;210;p7"/>
+          <p:cNvPr id="211" name="Google Shape;211;p7"/>
           <p:cNvSpPr/>
           <p:nvPr/>
         </p:nvSpPr>
@@ -18852,7 +18910,7 @@
       </p:sp>
       <p:sp>
         <p:nvSpPr>
-          <p:cNvPr id="211" name="Google Shape;211;p7"/>
+          <p:cNvPr id="212" name="Google Shape;212;p7"/>
           <p:cNvSpPr/>
           <p:nvPr/>
         </p:nvSpPr>
@@ -18910,7 +18968,7 @@
       </p:sp>
       <p:sp>
         <p:nvSpPr>
-          <p:cNvPr id="212" name="Google Shape;212;p7"/>
+          <p:cNvPr id="213" name="Google Shape;213;p7"/>
           <p:cNvSpPr txBox="1"/>
           <p:nvPr/>
         </p:nvSpPr>
@@ -18960,7 +19018,7 @@
       </p:sp>
       <p:sp>
         <p:nvSpPr>
-          <p:cNvPr id="213" name="Google Shape;213;p7"/>
+          <p:cNvPr id="214" name="Google Shape;214;p7"/>
           <p:cNvSpPr txBox="1"/>
           <p:nvPr/>
         </p:nvSpPr>
@@ -19010,7 +19068,7 @@
       </p:sp>
       <p:sp>
         <p:nvSpPr>
-          <p:cNvPr id="214" name="Google Shape;214;p7"/>
+          <p:cNvPr id="215" name="Google Shape;215;p7"/>
           <p:cNvSpPr txBox="1"/>
           <p:nvPr/>
         </p:nvSpPr>
@@ -19106,7 +19164,7 @@
       </p:sp>
       <p:sp>
         <p:nvSpPr>
-          <p:cNvPr id="215" name="Google Shape;215;p7"/>
+          <p:cNvPr id="216" name="Google Shape;216;p7"/>
           <p:cNvSpPr/>
           <p:nvPr/>
         </p:nvSpPr>
@@ -19164,7 +19222,7 @@
       </p:sp>
       <p:sp>
         <p:nvSpPr>
-          <p:cNvPr id="216" name="Google Shape;216;p7"/>
+          <p:cNvPr id="217" name="Google Shape;217;p7"/>
           <p:cNvSpPr/>
           <p:nvPr/>
         </p:nvSpPr>
@@ -19222,7 +19280,7 @@
       </p:sp>
       <p:sp>
         <p:nvSpPr>
-          <p:cNvPr id="217" name="Google Shape;217;p7"/>
+          <p:cNvPr id="218" name="Google Shape;218;p7"/>
           <p:cNvSpPr txBox="1"/>
           <p:nvPr/>
         </p:nvSpPr>
@@ -19272,7 +19330,7 @@
       </p:sp>
       <p:sp>
         <p:nvSpPr>
-          <p:cNvPr id="218" name="Google Shape;218;p7"/>
+          <p:cNvPr id="219" name="Google Shape;219;p7"/>
           <p:cNvSpPr txBox="1"/>
           <p:nvPr/>
         </p:nvSpPr>
@@ -19322,7 +19380,7 @@
       </p:sp>
       <p:sp>
         <p:nvSpPr>
-          <p:cNvPr id="219" name="Google Shape;219;p7"/>
+          <p:cNvPr id="220" name="Google Shape;220;p7"/>
           <p:cNvSpPr txBox="1"/>
           <p:nvPr/>
         </p:nvSpPr>
@@ -19418,7 +19476,7 @@
       </p:sp>
       <p:sp>
         <p:nvSpPr>
-          <p:cNvPr id="220" name="Google Shape;220;p7"/>
+          <p:cNvPr id="221" name="Google Shape;221;p7"/>
           <p:cNvSpPr txBox="1"/>
           <p:nvPr/>
         </p:nvSpPr>
@@ -19475,6 +19533,285 @@
 </file>
 
 <file path=ppt/theme/theme1.xml><?xml version="1.0" encoding="utf-8"?>
+<a:theme xmlns:a="http://schemas.openxmlformats.org/drawingml/2006/main" xmlns:r="http://schemas.openxmlformats.org/officeDocument/2006/relationships">
+  <a:themeElements>
+    <a:clrScheme name="Default">
+      <a:dk1>
+        <a:srgbClr val="000000"/>
+      </a:dk1>
+      <a:lt1>
+        <a:srgbClr val="FFFFFF"/>
+      </a:lt1>
+      <a:dk2>
+        <a:srgbClr val="158158"/>
+      </a:dk2>
+      <a:lt2>
+        <a:srgbClr val="F3F3F3"/>
+      </a:lt2>
+      <a:accent1>
+        <a:srgbClr val="058DC7"/>
+      </a:accent1>
+      <a:accent2>
+        <a:srgbClr val="50B432"/>
+      </a:accent2>
+      <a:accent3>
+        <a:srgbClr val="ED561B"/>
+      </a:accent3>
+      <a:accent4>
+        <a:srgbClr val="EDEF00"/>
+      </a:accent4>
+      <a:accent5>
+        <a:srgbClr val="24CBE5"/>
+      </a:accent5>
+      <a:accent6>
+        <a:srgbClr val="64E572"/>
+      </a:accent6>
+      <a:hlink>
+        <a:srgbClr val="2200CC"/>
+      </a:hlink>
+      <a:folHlink>
+        <a:srgbClr val="551A8B"/>
+      </a:folHlink>
+    </a:clrScheme>
+    <a:fontScheme name="Office">
+      <a:majorFont>
+        <a:latin typeface="Arial"/>
+        <a:ea typeface=""/>
+        <a:cs typeface=""/>
+        <a:font script="Jpan" typeface="ＭＳ Ｐゴシック"/>
+        <a:font script="Hang" typeface="맑은 고딕"/>
+        <a:font script="Hans" typeface="宋体"/>
+        <a:font script="Hant" typeface="新細明體"/>
+        <a:font script="Arab" typeface="Times New Roman"/>
+        <a:font script="Hebr" typeface="Times New Roman"/>
+        <a:font script="Thai" typeface="Angsana New"/>
+        <a:font script="Ethi" typeface="Nyala"/>
+        <a:font script="Beng" typeface="Vrinda"/>
+        <a:font script="Gujr" typeface="Shruti"/>
+        <a:font script="Khmr" typeface="MoolBoran"/>
+        <a:font script="Knda" typeface="Tunga"/>
+        <a:font script="Guru" typeface="Raavi"/>
+        <a:font script="Cans" typeface="Euphemia"/>
+        <a:font script="Cher" typeface="Plantagenet Cherokee"/>
+        <a:font script="Yiii" typeface="Microsoft Yi Baiti"/>
+        <a:font script="Tibt" typeface="Microsoft Himalaya"/>
+        <a:font script="Thaa" typeface="MV Boli"/>
+        <a:font script="Deva" typeface="Mangal"/>
+        <a:font script="Telu" typeface="Gautami"/>
+        <a:font script="Taml" typeface="Latha"/>
+        <a:font script="Syrc" typeface="Estrangelo Edessa"/>
+        <a:font script="Orya" typeface="Kalinga"/>
+        <a:font script="Mlym" typeface="Kartika"/>
+        <a:font script="Laoo" typeface="DokChampa"/>
+        <a:font script="Sinh" typeface="Iskoola Pota"/>
+        <a:font script="Mong" typeface="Mongolian Baiti"/>
+        <a:font script="Viet" typeface="Times New Roman"/>
+        <a:font script="Uigh" typeface="Microsoft Uighur"/>
+        <a:font script="Geor" typeface="Sylfaen"/>
+      </a:majorFont>
+      <a:minorFont>
+        <a:latin typeface="Arial"/>
+        <a:ea typeface=""/>
+        <a:cs typeface=""/>
+        <a:font script="Jpan" typeface="ＭＳ Ｐゴシック"/>
+        <a:font script="Hang" typeface="맑은 고딕"/>
+        <a:font script="Hans" typeface="宋体"/>
+        <a:font script="Hant" typeface="新細明體"/>
+        <a:font script="Arab" typeface="Arial"/>
+        <a:font script="Hebr" typeface="Arial"/>
+        <a:font script="Thai" typeface="Cordia New"/>
+        <a:font script="Ethi" typeface="Nyala"/>
+        <a:font script="Beng" typeface="Vrinda"/>
+        <a:font script="Gujr" typeface="Shruti"/>
+        <a:font script="Khmr" typeface="DaunPenh"/>
+        <a:font script="Knda" typeface="Tunga"/>
+        <a:font script="Guru" typeface="Raavi"/>
+        <a:font script="Cans" typeface="Euphemia"/>
+        <a:font script="Cher" typeface="Plantagenet Cherokee"/>
+        <a:font script="Yiii" typeface="Microsoft Yi Baiti"/>
+        <a:font script="Tibt" typeface="Microsoft Himalaya"/>
+        <a:font script="Thaa" typeface="MV Boli"/>
+        <a:font script="Deva" typeface="Mangal"/>
+        <a:font script="Telu" typeface="Gautami"/>
+        <a:font script="Taml" typeface="Latha"/>
+        <a:font script="Syrc" typeface="Estrangelo Edessa"/>
+        <a:font script="Orya" typeface="Kalinga"/>
+        <a:font script="Mlym" typeface="Kartika"/>
+        <a:font script="Laoo" typeface="DokChampa"/>
+        <a:font script="Sinh" typeface="Iskoola Pota"/>
+        <a:font script="Mong" typeface="Mongolian Baiti"/>
+        <a:font script="Viet" typeface="Arial"/>
+        <a:font script="Uigh" typeface="Microsoft Uighur"/>
+        <a:font script="Geor" typeface="Sylfaen"/>
+      </a:minorFont>
+    </a:fontScheme>
+    <a:fmtScheme name="Office">
+      <a:fillStyleLst>
+        <a:solidFill>
+          <a:schemeClr val="phClr"/>
+        </a:solidFill>
+        <a:gradFill rotWithShape="1">
+          <a:gsLst>
+            <a:gs pos="0">
+              <a:schemeClr val="phClr">
+                <a:tint val="50000"/>
+                <a:satMod val="300000"/>
+              </a:schemeClr>
+            </a:gs>
+            <a:gs pos="35000">
+              <a:schemeClr val="phClr">
+                <a:tint val="37000"/>
+                <a:satMod val="300000"/>
+              </a:schemeClr>
+            </a:gs>
+            <a:gs pos="100000">
+              <a:schemeClr val="phClr">
+                <a:tint val="15000"/>
+                <a:satMod val="350000"/>
+              </a:schemeClr>
+            </a:gs>
+          </a:gsLst>
+          <a:lin ang="16200000" scaled="1"/>
+        </a:gradFill>
+        <a:gradFill rotWithShape="1">
+          <a:gsLst>
+            <a:gs pos="0">
+              <a:schemeClr val="phClr">
+                <a:tint val="100000"/>
+                <a:shade val="100000"/>
+                <a:satMod val="130000"/>
+              </a:schemeClr>
+            </a:gs>
+            <a:gs pos="100000">
+              <a:schemeClr val="phClr">
+                <a:tint val="50000"/>
+                <a:shade val="100000"/>
+                <a:satMod val="350000"/>
+              </a:schemeClr>
+            </a:gs>
+          </a:gsLst>
+          <a:lin ang="16200000" scaled="0"/>
+        </a:gradFill>
+      </a:fillStyleLst>
+      <a:lnStyleLst>
+        <a:ln w="9525" cap="flat" cmpd="sng" algn="ctr">
+          <a:solidFill>
+            <a:schemeClr val="phClr">
+              <a:shade val="95000"/>
+              <a:satMod val="105000"/>
+            </a:schemeClr>
+          </a:solidFill>
+          <a:prstDash val="solid"/>
+        </a:ln>
+        <a:ln w="25400" cap="flat" cmpd="sng" algn="ctr">
+          <a:solidFill>
+            <a:schemeClr val="phClr"/>
+          </a:solidFill>
+          <a:prstDash val="solid"/>
+        </a:ln>
+        <a:ln w="38100" cap="flat" cmpd="sng" algn="ctr">
+          <a:solidFill>
+            <a:schemeClr val="phClr"/>
+          </a:solidFill>
+          <a:prstDash val="solid"/>
+        </a:ln>
+      </a:lnStyleLst>
+      <a:effectStyleLst>
+        <a:effectStyle>
+          <a:effectLst>
+            <a:outerShdw blurRad="40000" dist="20000" dir="5400000" rotWithShape="0">
+              <a:srgbClr val="000000">
+                <a:alpha val="38000"/>
+              </a:srgbClr>
+            </a:outerShdw>
+          </a:effectLst>
+        </a:effectStyle>
+        <a:effectStyle>
+          <a:effectLst>
+            <a:outerShdw blurRad="40000" dist="23000" dir="5400000" rotWithShape="0">
+              <a:srgbClr val="000000">
+                <a:alpha val="35000"/>
+              </a:srgbClr>
+            </a:outerShdw>
+          </a:effectLst>
+        </a:effectStyle>
+        <a:effectStyle>
+          <a:effectLst>
+            <a:outerShdw blurRad="40000" dist="23000" dir="5400000" rotWithShape="0">
+              <a:srgbClr val="000000">
+                <a:alpha val="35000"/>
+              </a:srgbClr>
+            </a:outerShdw>
+          </a:effectLst>
+          <a:scene3d>
+            <a:camera prst="orthographicFront">
+              <a:rot lat="0" lon="0" rev="0"/>
+            </a:camera>
+            <a:lightRig rig="threePt" dir="t">
+              <a:rot lat="0" lon="0" rev="1200000"/>
+            </a:lightRig>
+          </a:scene3d>
+          <a:sp3d>
+            <a:bevelT w="63500" h="25400"/>
+          </a:sp3d>
+        </a:effectStyle>
+      </a:effectStyleLst>
+      <a:bgFillStyleLst>
+        <a:solidFill>
+          <a:schemeClr val="phClr"/>
+        </a:solidFill>
+        <a:gradFill rotWithShape="1">
+          <a:gsLst>
+            <a:gs pos="0">
+              <a:schemeClr val="phClr">
+                <a:tint val="40000"/>
+                <a:satMod val="350000"/>
+              </a:schemeClr>
+            </a:gs>
+            <a:gs pos="40000">
+              <a:schemeClr val="phClr">
+                <a:tint val="45000"/>
+                <a:shade val="99000"/>
+                <a:satMod val="350000"/>
+              </a:schemeClr>
+            </a:gs>
+            <a:gs pos="100000">
+              <a:schemeClr val="phClr">
+                <a:shade val="20000"/>
+                <a:satMod val="255000"/>
+              </a:schemeClr>
+            </a:gs>
+          </a:gsLst>
+          <a:path path="circle">
+            <a:fillToRect l="50000" t="-80000" r="50000" b="180000"/>
+          </a:path>
+        </a:gradFill>
+        <a:gradFill rotWithShape="1">
+          <a:gsLst>
+            <a:gs pos="0">
+              <a:schemeClr val="phClr">
+                <a:tint val="80000"/>
+                <a:satMod val="300000"/>
+              </a:schemeClr>
+            </a:gs>
+            <a:gs pos="100000">
+              <a:schemeClr val="phClr">
+                <a:shade val="30000"/>
+                <a:satMod val="200000"/>
+              </a:schemeClr>
+            </a:gs>
+          </a:gsLst>
+          <a:path path="circle">
+            <a:fillToRect l="50000" t="50000" r="50000" b="50000"/>
+          </a:path>
+        </a:gradFill>
+      </a:bgFillStyleLst>
+    </a:fmtScheme>
+  </a:themeElements>
+</a:theme>
+</file>
+
+<file path=ppt/theme/theme2.xml><?xml version="1.0" encoding="utf-8"?>
 <a:theme xmlns:a="http://schemas.openxmlformats.org/drawingml/2006/main" xmlns:r="http://schemas.openxmlformats.org/officeDocument/2006/relationships" name="Office Theme">
   <a:themeElements>
     <a:clrScheme name="Office">
@@ -19751,283 +20088,4 @@
     </a:fmtScheme>
   </a:themeElements>
 </a:theme>
-</file>
-
-<file path=ppt/theme/theme2.xml><?xml version="1.0" encoding="utf-8"?>
-<a:theme xmlns:a="http://schemas.openxmlformats.org/drawingml/2006/main" xmlns:r="http://schemas.openxmlformats.org/officeDocument/2006/relationships">
-  <a:themeElements>
-    <a:clrScheme name="Default">
-      <a:dk1>
-        <a:srgbClr val="000000"/>
-      </a:dk1>
-      <a:lt1>
-        <a:srgbClr val="FFFFFF"/>
-      </a:lt1>
-      <a:dk2>
-        <a:srgbClr val="158158"/>
-      </a:dk2>
-      <a:lt2>
-        <a:srgbClr val="F3F3F3"/>
-      </a:lt2>
-      <a:accent1>
-        <a:srgbClr val="058DC7"/>
-      </a:accent1>
-      <a:accent2>
-        <a:srgbClr val="50B432"/>
-      </a:accent2>
-      <a:accent3>
-        <a:srgbClr val="ED561B"/>
-      </a:accent3>
-      <a:accent4>
-        <a:srgbClr val="EDEF00"/>
-      </a:accent4>
-      <a:accent5>
-        <a:srgbClr val="24CBE5"/>
-      </a:accent5>
-      <a:accent6>
-        <a:srgbClr val="64E572"/>
-      </a:accent6>
-      <a:hlink>
-        <a:srgbClr val="2200CC"/>
-      </a:hlink>
-      <a:folHlink>
-        <a:srgbClr val="551A8B"/>
-      </a:folHlink>
-    </a:clrScheme>
-    <a:fontScheme name="Office">
-      <a:majorFont>
-        <a:latin typeface="Arial"/>
-        <a:ea typeface=""/>
-        <a:cs typeface=""/>
-        <a:font script="Jpan" typeface="ＭＳ Ｐゴシック"/>
-        <a:font script="Hang" typeface="맑은 고딕"/>
-        <a:font script="Hans" typeface="宋体"/>
-        <a:font script="Hant" typeface="新細明體"/>
-        <a:font script="Arab" typeface="Times New Roman"/>
-        <a:font script="Hebr" typeface="Times New Roman"/>
-        <a:font script="Thai" typeface="Angsana New"/>
-        <a:font script="Ethi" typeface="Nyala"/>
-        <a:font script="Beng" typeface="Vrinda"/>
-        <a:font script="Gujr" typeface="Shruti"/>
-        <a:font script="Khmr" typeface="MoolBoran"/>
-        <a:font script="Knda" typeface="Tunga"/>
-        <a:font script="Guru" typeface="Raavi"/>
-        <a:font script="Cans" typeface="Euphemia"/>
-        <a:font script="Cher" typeface="Plantagenet Cherokee"/>
-        <a:font script="Yiii" typeface="Microsoft Yi Baiti"/>
-        <a:font script="Tibt" typeface="Microsoft Himalaya"/>
-        <a:font script="Thaa" typeface="MV Boli"/>
-        <a:font script="Deva" typeface="Mangal"/>
-        <a:font script="Telu" typeface="Gautami"/>
-        <a:font script="Taml" typeface="Latha"/>
-        <a:font script="Syrc" typeface="Estrangelo Edessa"/>
-        <a:font script="Orya" typeface="Kalinga"/>
-        <a:font script="Mlym" typeface="Kartika"/>
-        <a:font script="Laoo" typeface="DokChampa"/>
-        <a:font script="Sinh" typeface="Iskoola Pota"/>
-        <a:font script="Mong" typeface="Mongolian Baiti"/>
-        <a:font script="Viet" typeface="Times New Roman"/>
-        <a:font script="Uigh" typeface="Microsoft Uighur"/>
-        <a:font script="Geor" typeface="Sylfaen"/>
-      </a:majorFont>
-      <a:minorFont>
-        <a:latin typeface="Arial"/>
-        <a:ea typeface=""/>
-        <a:cs typeface=""/>
-        <a:font script="Jpan" typeface="ＭＳ Ｐゴシック"/>
-        <a:font script="Hang" typeface="맑은 고딕"/>
-        <a:font script="Hans" typeface="宋体"/>
-        <a:font script="Hant" typeface="新細明體"/>
-        <a:font script="Arab" typeface="Arial"/>
-        <a:font script="Hebr" typeface="Arial"/>
-        <a:font script="Thai" typeface="Cordia New"/>
-        <a:font script="Ethi" typeface="Nyala"/>
-        <a:font script="Beng" typeface="Vrinda"/>
-        <a:font script="Gujr" typeface="Shruti"/>
-        <a:font script="Khmr" typeface="DaunPenh"/>
-        <a:font script="Knda" typeface="Tunga"/>
-        <a:font script="Guru" typeface="Raavi"/>
-        <a:font script="Cans" typeface="Euphemia"/>
-        <a:font script="Cher" typeface="Plantagenet Cherokee"/>
-        <a:font script="Yiii" typeface="Microsoft Yi Baiti"/>
-        <a:font script="Tibt" typeface="Microsoft Himalaya"/>
-        <a:font script="Thaa" typeface="MV Boli"/>
-        <a:font script="Deva" typeface="Mangal"/>
-        <a:font script="Telu" typeface="Gautami"/>
-        <a:font script="Taml" typeface="Latha"/>
-        <a:font script="Syrc" typeface="Estrangelo Edessa"/>
-        <a:font script="Orya" typeface="Kalinga"/>
-        <a:font script="Mlym" typeface="Kartika"/>
-        <a:font script="Laoo" typeface="DokChampa"/>
-        <a:font script="Sinh" typeface="Iskoola Pota"/>
-        <a:font script="Mong" typeface="Mongolian Baiti"/>
-        <a:font script="Viet" typeface="Arial"/>
-        <a:font script="Uigh" typeface="Microsoft Uighur"/>
-        <a:font script="Geor" typeface="Sylfaen"/>
-      </a:minorFont>
-    </a:fontScheme>
-    <a:fmtScheme name="Office">
-      <a:fillStyleLst>
-        <a:solidFill>
-          <a:schemeClr val="phClr"/>
-        </a:solidFill>
-        <a:gradFill rotWithShape="1">
-          <a:gsLst>
-            <a:gs pos="0">
-              <a:schemeClr val="phClr">
-                <a:tint val="50000"/>
-                <a:satMod val="300000"/>
-              </a:schemeClr>
-            </a:gs>
-            <a:gs pos="35000">
-              <a:schemeClr val="phClr">
-                <a:tint val="37000"/>
-                <a:satMod val="300000"/>
-              </a:schemeClr>
-            </a:gs>
-            <a:gs pos="100000">
-              <a:schemeClr val="phClr">
-                <a:tint val="15000"/>
-                <a:satMod val="350000"/>
-              </a:schemeClr>
-            </a:gs>
-          </a:gsLst>
-          <a:lin ang="16200000" scaled="1"/>
-        </a:gradFill>
-        <a:gradFill rotWithShape="1">
-          <a:gsLst>
-            <a:gs pos="0">
-              <a:schemeClr val="phClr">
-                <a:tint val="100000"/>
-                <a:shade val="100000"/>
-                <a:satMod val="130000"/>
-              </a:schemeClr>
-            </a:gs>
-            <a:gs pos="100000">
-              <a:schemeClr val="phClr">
-                <a:tint val="50000"/>
-                <a:shade val="100000"/>
-                <a:satMod val="350000"/>
-              </a:schemeClr>
-            </a:gs>
-          </a:gsLst>
-          <a:lin ang="16200000" scaled="0"/>
-        </a:gradFill>
-      </a:fillStyleLst>
-      <a:lnStyleLst>
-        <a:ln w="9525" cap="flat" cmpd="sng" algn="ctr">
-          <a:solidFill>
-            <a:schemeClr val="phClr">
-              <a:shade val="95000"/>
-              <a:satMod val="105000"/>
-            </a:schemeClr>
-          </a:solidFill>
-          <a:prstDash val="solid"/>
-        </a:ln>
-        <a:ln w="25400" cap="flat" cmpd="sng" algn="ctr">
-          <a:solidFill>
-            <a:schemeClr val="phClr"/>
-          </a:solidFill>
-          <a:prstDash val="solid"/>
-        </a:ln>
-        <a:ln w="38100" cap="flat" cmpd="sng" algn="ctr">
-          <a:solidFill>
-            <a:schemeClr val="phClr"/>
-          </a:solidFill>
-          <a:prstDash val="solid"/>
-        </a:ln>
-      </a:lnStyleLst>
-      <a:effectStyleLst>
-        <a:effectStyle>
-          <a:effectLst>
-            <a:outerShdw blurRad="40000" dist="20000" dir="5400000" rotWithShape="0">
-              <a:srgbClr val="000000">
-                <a:alpha val="38000"/>
-              </a:srgbClr>
-            </a:outerShdw>
-          </a:effectLst>
-        </a:effectStyle>
-        <a:effectStyle>
-          <a:effectLst>
-            <a:outerShdw blurRad="40000" dist="23000" dir="5400000" rotWithShape="0">
-              <a:srgbClr val="000000">
-                <a:alpha val="35000"/>
-              </a:srgbClr>
-            </a:outerShdw>
-          </a:effectLst>
-        </a:effectStyle>
-        <a:effectStyle>
-          <a:effectLst>
-            <a:outerShdw blurRad="40000" dist="23000" dir="5400000" rotWithShape="0">
-              <a:srgbClr val="000000">
-                <a:alpha val="35000"/>
-              </a:srgbClr>
-            </a:outerShdw>
-          </a:effectLst>
-          <a:scene3d>
-            <a:camera prst="orthographicFront">
-              <a:rot lat="0" lon="0" rev="0"/>
-            </a:camera>
-            <a:lightRig rig="threePt" dir="t">
-              <a:rot lat="0" lon="0" rev="1200000"/>
-            </a:lightRig>
-          </a:scene3d>
-          <a:sp3d>
-            <a:bevelT w="63500" h="25400"/>
-          </a:sp3d>
-        </a:effectStyle>
-      </a:effectStyleLst>
-      <a:bgFillStyleLst>
-        <a:solidFill>
-          <a:schemeClr val="phClr"/>
-        </a:solidFill>
-        <a:gradFill rotWithShape="1">
-          <a:gsLst>
-            <a:gs pos="0">
-              <a:schemeClr val="phClr">
-                <a:tint val="40000"/>
-                <a:satMod val="350000"/>
-              </a:schemeClr>
-            </a:gs>
-            <a:gs pos="40000">
-              <a:schemeClr val="phClr">
-                <a:tint val="45000"/>
-                <a:shade val="99000"/>
-                <a:satMod val="350000"/>
-              </a:schemeClr>
-            </a:gs>
-            <a:gs pos="100000">
-              <a:schemeClr val="phClr">
-                <a:shade val="20000"/>
-                <a:satMod val="255000"/>
-              </a:schemeClr>
-            </a:gs>
-          </a:gsLst>
-          <a:path path="circle">
-            <a:fillToRect l="50000" t="-80000" r="50000" b="180000"/>
-          </a:path>
-        </a:gradFill>
-        <a:gradFill rotWithShape="1">
-          <a:gsLst>
-            <a:gs pos="0">
-              <a:schemeClr val="phClr">
-                <a:tint val="80000"/>
-                <a:satMod val="300000"/>
-              </a:schemeClr>
-            </a:gs>
-            <a:gs pos="100000">
-              <a:schemeClr val="phClr">
-                <a:shade val="30000"/>
-                <a:satMod val="200000"/>
-              </a:schemeClr>
-            </a:gs>
-          </a:gsLst>
-          <a:path path="circle">
-            <a:fillToRect l="50000" t="50000" r="50000" b="50000"/>
-          </a:path>
-        </a:gradFill>
-      </a:bgFillStyleLst>
-    </a:fmtScheme>
-  </a:themeElements>
-</a:theme>
 </file>